--- a/pitch-deck/narve-pitch-deck.pptx
+++ b/pitch-deck/narve-pitch-deck.pptx
@@ -865,7 +865,7 @@
           <a:lstStyle/>
           <a:p>
             <a:r>
-              <a:t>[PLACEHOLDER: founder bio — name, technical background, prior companies, domain credibility in markets or ML.] What the repo already evidences: execution breadth (every service documented, tested, deployable — including a 3,903-line risk/position-sizing build with Kelly sizing, Black-Scholes Greeks, and circuit breakers), operational maturity (CI, pre-deploy snapshots, production hardening flags, partner onboarding docs), and intellectual honesty as a working style (4-agent adversarial audit that caught a backtest off-by-one; Newey-West/Bonferroni statistical discipline). [PLACEHOLDER: raise amount and terms.] Framing for the close: this is not build-risk capital — product, billing rail, tests, and deploy tooling exist; capital converts a launch-ready system into a market position while the ledger moat compounds. Natural cost lines from the known risk register: X API spend (scales linearly with coverage), scraper resilience, semantic matching, per-tenant pipeline isolation, and launch GTM. Diligence items to have clean answers for: 'betyc' brand leftover, Stripe env vars unset in production, and README growth targets being goals, not traction. Then hand over the investor key and let the product finish the pitch.</a:t>
+              <a:t>Team: Julian Habbig (CEO, julian@habbig.com) and Sho Cakarel (CTO, sho@cakarel.com). [PLACEHOLDER: one sentence of background per founder — prior companies, domain credibility in markets or ML.] What the repo already evidences: execution breadth (every service documented, tested, deployable — including a 3,903-line risk/position-sizing build with Kelly sizing, Black-Scholes Greeks, and circuit breakers), operational maturity (CI, pre-deploy snapshots, production hardening flags, partner onboarding docs), and intellectual honesty as a working style (4-agent adversarial audit that caught a backtest off-by-one; Newey-West/Bonferroni statistical discipline). [PLACEHOLDER: raise amount and terms.] Framing for the close: this is not build-risk capital — product, billing rail, tests, and deploy tooling exist; capital converts a launch-ready system into a market position while the ledger moat compounds. Natural cost lines from the known risk register: X API spend (scales linearly with coverage), scraper resilience, semantic matching, per-tenant pipeline isolation, and launch GTM. Diligence items to have clean answers for: 'betyc' brand leftover, Stripe env vars unset in production, and README growth targets being goals, not traction. Then hand over the investor key and let the product finish the pitch.</a:t>
             </a:r>
           </a:p>
         </p:txBody>
@@ -4673,8 +4673,8 @@
         </p:nvSpPr>
         <p:spPr>
           <a:xfrm>
-            <a:off x="0" y="5349240"/>
-            <a:ext cx="12191695" cy="365760"/>
+            <a:off x="0" y="5303520"/>
+            <a:ext cx="12191695" cy="685800"/>
           </a:xfrm>
           <a:prstGeom prst="rect">
             <a:avLst/>
@@ -4687,15 +4687,67 @@
           </a:bodyPr>
           <a:lstStyle/>
           <a:p>
+            <a:pPr algn="ctr">
+              <a:spcAft>
+                <a:spcPts val="400"/>
+              </a:spcAft>
+            </a:pPr>
+            <a:r>
+              <a:rPr sz="1200" b="1" i="0">
+                <a:solidFill>
+                  <a:srgbClr val="EBEBEF"/>
+                </a:solidFill>
+                <a:latin typeface="Inter"/>
+              </a:rPr>
+              <a:t>Julian Habbig</a:t>
+            </a:r>
+            <a:r>
+              <a:rPr sz="1200" b="0" i="0">
+                <a:solidFill>
+                  <a:srgbClr val="8B8D98"/>
+                </a:solidFill>
+                <a:latin typeface="Inter"/>
+              </a:rPr>
+              <a:t> · CEO · julian@habbig.com</a:t>
+            </a:r>
+            <a:r>
+              <a:rPr sz="1200" b="0" i="0">
+                <a:solidFill>
+                  <a:srgbClr val="8B8D98"/>
+                </a:solidFill>
+                <a:latin typeface="Inter"/>
+              </a:rPr>
+              <a:t>      </a:t>
+            </a:r>
+            <a:r>
+              <a:rPr sz="1200" b="1" i="0">
+                <a:solidFill>
+                  <a:srgbClr val="EBEBEF"/>
+                </a:solidFill>
+                <a:latin typeface="Inter"/>
+              </a:rPr>
+              <a:t>Sho Cakarel</a:t>
+            </a:r>
+            <a:r>
+              <a:rPr sz="1200" b="0" i="0">
+                <a:solidFill>
+                  <a:srgbClr val="8B8D98"/>
+                </a:solidFill>
+                <a:latin typeface="Inter"/>
+              </a:rPr>
+              <a:t> · CTO · sho@cakarel.com</a:t>
+            </a:r>
+          </a:p>
+          <a:p>
             <a:pPr algn="ctr"/>
             <a:r>
-              <a:rPr sz="1150" b="0" i="0">
+              <a:rPr sz="1100" b="0" i="0">
                 <a:solidFill>
                   <a:srgbClr val="5C5E6A"/>
                 </a:solidFill>
                 <a:latin typeface="Inter"/>
               </a:rPr>
-              <a:t>[PLACEHOLDER: founder name + contact]   ·   Pre-seed   ·   July 2026</a:t>
+              <a:t>Pre-seed   ·   July 2026</a:t>
             </a:r>
           </a:p>
         </p:txBody>
@@ -5807,7 +5859,7 @@
               </a:spcAft>
             </a:pPr>
             <a:r>
-              <a:rPr sz="1300" b="1" i="0">
+              <a:rPr sz="1350" b="1" i="0">
                 <a:solidFill>
                   <a:srgbClr val="6366F1"/>
                 </a:solidFill>
@@ -5816,7 +5868,7 @@
               <a:t>—  </a:t>
             </a:r>
             <a:r>
-              <a:rPr sz="1300" b="1" i="0">
+              <a:rPr sz="1350" b="1" i="0">
                 <a:solidFill>
                   <a:srgbClr val="EBEBEF"/>
                 </a:solidFill>
@@ -5825,7 +5877,7 @@
               <a:t>Terminals, wallet trackers, Dune: </a:t>
             </a:r>
             <a:r>
-              <a:rPr sz="1300" b="0" i="0">
+              <a:rPr sz="1350" b="0" i="0">
                 <a:solidFill>
                   <a:srgbClr val="8B8D98"/>
                 </a:solidFill>
@@ -5844,7 +5896,7 @@
               </a:spcAft>
             </a:pPr>
             <a:r>
-              <a:rPr sz="1300" b="1" i="0">
+              <a:rPr sz="1350" b="1" i="0">
                 <a:solidFill>
                   <a:srgbClr val="6366F1"/>
                 </a:solidFill>
@@ -5853,7 +5905,7 @@
               <a:t>—  </a:t>
             </a:r>
             <a:r>
-              <a:rPr sz="1300" b="1" i="0">
+              <a:rPr sz="1350" b="1" i="0">
                 <a:solidFill>
                   <a:srgbClr val="EBEBEF"/>
                 </a:solidFill>
@@ -5862,7 +5914,7 @@
               <a:t>LunarCrush, Santiment: </a:t>
             </a:r>
             <a:r>
-              <a:rPr sz="1300" b="0" i="0">
+              <a:rPr sz="1350" b="0" i="0">
                 <a:solidFill>
                   <a:srgbClr val="8B8D98"/>
                 </a:solidFill>
@@ -5881,7 +5933,7 @@
               </a:spcAft>
             </a:pPr>
             <a:r>
-              <a:rPr sz="1300" b="1" i="0">
+              <a:rPr sz="1350" b="1" i="0">
                 <a:solidFill>
                   <a:srgbClr val="6366F1"/>
                 </a:solidFill>
@@ -5890,7 +5942,7 @@
               <a:t>—  </a:t>
             </a:r>
             <a:r>
-              <a:rPr sz="1300" b="1" i="0">
+              <a:rPr sz="1350" b="1" i="0">
                 <a:solidFill>
                   <a:srgbClr val="EBEBEF"/>
                 </a:solidFill>
@@ -5899,7 +5951,7 @@
               <a:t>Metaculus, FutureSearch: </a:t>
             </a:r>
             <a:r>
-              <a:rPr sz="1300" b="0" i="0">
+              <a:rPr sz="1350" b="0" i="0">
                 <a:solidFill>
                   <a:srgbClr val="8B8D98"/>
                 </a:solidFill>
@@ -5918,7 +5970,7 @@
               </a:spcAft>
             </a:pPr>
             <a:r>
-              <a:rPr sz="1300" b="1" i="0">
+              <a:rPr sz="1350" b="1" i="0">
                 <a:solidFill>
                   <a:srgbClr val="6366F1"/>
                 </a:solidFill>
@@ -5927,7 +5979,7 @@
               <a:t>—  </a:t>
             </a:r>
             <a:r>
-              <a:rPr sz="1300" b="1" i="0">
+              <a:rPr sz="1350" b="1" i="0">
                 <a:solidFill>
                   <a:srgbClr val="EBEBEF"/>
                 </a:solidFill>
@@ -5936,7 +5988,7 @@
               <a:t>narve.ai alone: </a:t>
             </a:r>
             <a:r>
-              <a:rPr sz="1300" b="0" i="0">
+              <a:rPr sz="1350" b="0" i="0">
                 <a:solidFill>
                   <a:srgbClr val="8B8D98"/>
                 </a:solidFill>
@@ -7155,8 +7207,8 @@
         </p:nvSpPr>
         <p:spPr>
           <a:xfrm>
-            <a:off x="685800" y="2057400"/>
-            <a:ext cx="2624328" cy="1554480"/>
+            <a:off x="685800" y="2103120"/>
+            <a:ext cx="2533573" cy="1737360"/>
           </a:xfrm>
           <a:prstGeom prst="roundRect">
             <a:avLst>
@@ -7203,8 +7255,8 @@
         </p:nvSpPr>
         <p:spPr>
           <a:xfrm>
-            <a:off x="886968" y="2221992"/>
-            <a:ext cx="2221992" cy="1280160"/>
+            <a:off x="886968" y="2267712"/>
+            <a:ext cx="2131237" cy="1463040"/>
           </a:xfrm>
           <a:prstGeom prst="rect">
             <a:avLst/>
@@ -7274,7 +7326,7 @@
         </p:nvSpPr>
         <p:spPr>
           <a:xfrm>
-            <a:off x="685800" y="2258568"/>
+            <a:off x="685800" y="2304288"/>
             <a:ext cx="27432" cy="256032"/>
           </a:xfrm>
           <a:prstGeom prst="roundRect">
@@ -7320,8 +7372,8 @@
         </p:nvSpPr>
         <p:spPr>
           <a:xfrm>
-            <a:off x="3511296" y="2057400"/>
-            <a:ext cx="2624328" cy="1554480"/>
+            <a:off x="3447973" y="2103120"/>
+            <a:ext cx="2533573" cy="1737360"/>
           </a:xfrm>
           <a:prstGeom prst="roundRect">
             <a:avLst>
@@ -7368,8 +7420,8 @@
         </p:nvSpPr>
         <p:spPr>
           <a:xfrm>
-            <a:off x="3712464" y="2221992"/>
-            <a:ext cx="2221992" cy="1280160"/>
+            <a:off x="3649141" y="2267712"/>
+            <a:ext cx="2131237" cy="1463040"/>
           </a:xfrm>
           <a:prstGeom prst="rect">
             <a:avLst/>
@@ -7439,7 +7491,7 @@
         </p:nvSpPr>
         <p:spPr>
           <a:xfrm>
-            <a:off x="3511296" y="2258568"/>
+            <a:off x="3447973" y="2304288"/>
             <a:ext cx="27432" cy="256032"/>
           </a:xfrm>
           <a:prstGeom prst="roundRect">
@@ -7485,8 +7537,8 @@
         </p:nvSpPr>
         <p:spPr>
           <a:xfrm>
-            <a:off x="6336792" y="2057400"/>
-            <a:ext cx="2624328" cy="1554480"/>
+            <a:off x="6210146" y="2103120"/>
+            <a:ext cx="2533573" cy="1737360"/>
           </a:xfrm>
           <a:prstGeom prst="roundRect">
             <a:avLst>
@@ -7533,8 +7585,8 @@
         </p:nvSpPr>
         <p:spPr>
           <a:xfrm>
-            <a:off x="6537960" y="2221992"/>
-            <a:ext cx="2221992" cy="1280160"/>
+            <a:off x="6411314" y="2267712"/>
+            <a:ext cx="2131237" cy="1463040"/>
           </a:xfrm>
           <a:prstGeom prst="rect">
             <a:avLst/>
@@ -7604,7 +7656,7 @@
         </p:nvSpPr>
         <p:spPr>
           <a:xfrm>
-            <a:off x="6336792" y="2258568"/>
+            <a:off x="6210146" y="2304288"/>
             <a:ext cx="27432" cy="256032"/>
           </a:xfrm>
           <a:prstGeom prst="roundRect">
@@ -7650,8 +7702,8 @@
         </p:nvSpPr>
         <p:spPr>
           <a:xfrm>
-            <a:off x="9162288" y="2057400"/>
-            <a:ext cx="2624328" cy="1554480"/>
+            <a:off x="8972319" y="2103120"/>
+            <a:ext cx="2533573" cy="1737360"/>
           </a:xfrm>
           <a:prstGeom prst="roundRect">
             <a:avLst>
@@ -7698,8 +7750,8 @@
         </p:nvSpPr>
         <p:spPr>
           <a:xfrm>
-            <a:off x="9363456" y="2221992"/>
-            <a:ext cx="2221992" cy="1280160"/>
+            <a:off x="9173487" y="2267712"/>
+            <a:ext cx="2131237" cy="1463040"/>
           </a:xfrm>
           <a:prstGeom prst="rect">
             <a:avLst/>
@@ -7769,7 +7821,7 @@
         </p:nvSpPr>
         <p:spPr>
           <a:xfrm>
-            <a:off x="9162288" y="2258568"/>
+            <a:off x="8972319" y="2304288"/>
             <a:ext cx="27432" cy="256032"/>
           </a:xfrm>
           <a:prstGeom prst="roundRect">
@@ -7815,7 +7867,7 @@
         </p:nvSpPr>
         <p:spPr>
           <a:xfrm>
-            <a:off x="685800" y="3977639"/>
+            <a:off x="685800" y="4114800"/>
             <a:ext cx="10820095" cy="960120"/>
           </a:xfrm>
           <a:prstGeom prst="roundRect">
@@ -7863,7 +7915,7 @@
         </p:nvSpPr>
         <p:spPr>
           <a:xfrm>
-            <a:off x="1005840" y="3977639"/>
+            <a:off x="1005840" y="4114800"/>
             <a:ext cx="10180015" cy="960120"/>
           </a:xfrm>
           <a:prstGeom prst="rect">
@@ -7911,7 +7963,7 @@
         </p:nvSpPr>
         <p:spPr>
           <a:xfrm>
-            <a:off x="685800" y="5212080"/>
+            <a:off x="685800" y="5321808"/>
             <a:ext cx="10820095" cy="4206240"/>
           </a:xfrm>
           <a:prstGeom prst="rect">
@@ -7995,7 +8047,7 @@
                 </a:solidFill>
                 <a:latin typeface="Inter"/>
               </a:rPr>
-              <a:t>every signal paper-traded and force-settled; public backtest harness (Sharpe, drawdown). Zero user or revenue numbers on this slide — deliberately.</a:t>
+              <a:t>every signal paper-traded and force-settled; public backtest harness (Sharpe, drawdown).</a:t>
             </a:r>
           </a:p>
         </p:txBody>
@@ -9175,7 +9227,7 @@
                 </a:solidFill>
                 <a:latin typeface="Inter"/>
               </a:rPr>
-              <a:t>[PLACEHOLDER: Founder] built the entire stack — raising [PLACEHOLDER: $X] to switch it on.</a:t>
+              <a:t>Habbig &amp; Cakarel built the entire stack — raising [PLACEHOLDER: $X] to switch it on.</a:t>
             </a:r>
           </a:p>
         </p:txBody>
@@ -9267,30 +9319,84 @@
           </a:p>
           <a:p>
             <a:pPr>
-              <a:lnSpc>
-                <a:spcPct val="125000"/>
-              </a:lnSpc>
               <a:spcAft>
-                <a:spcPts val="1000"/>
+                <a:spcPts val="200"/>
               </a:spcAft>
             </a:pPr>
             <a:r>
-              <a:rPr sz="1300" b="1" i="0">
+              <a:rPr sz="1500" b="1" i="0">
                 <a:solidFill>
                   <a:srgbClr val="EBEBEF"/>
                 </a:solidFill>
                 <a:latin typeface="Inter"/>
               </a:rPr>
-              <a:t>[PLACEHOLDER: founder name] </a:t>
-            </a:r>
-            <a:r>
-              <a:rPr sz="1300" b="0" i="0">
+              <a:t>Julian Habbig</a:t>
+            </a:r>
+            <a:r>
+              <a:rPr sz="1250" b="1" i="0">
+                <a:solidFill>
+                  <a:srgbClr val="6366F1"/>
+                </a:solidFill>
+                <a:latin typeface="Inter"/>
+              </a:rPr>
+              <a:t>  ·  CEO</a:t>
+            </a:r>
+          </a:p>
+          <a:p>
+            <a:pPr>
+              <a:spcAft>
+                <a:spcPts val="900"/>
+              </a:spcAft>
+            </a:pPr>
+            <a:r>
+              <a:rPr sz="1150" b="0" i="0">
                 <a:solidFill>
                   <a:srgbClr val="8B8D98"/>
                 </a:solidFill>
                 <a:latin typeface="Inter"/>
               </a:rPr>
-              <a:t>— background, prior roles, relevant wins.</a:t>
+              <a:t>julian@habbig.com · [PLACEHOLDER: background, prior roles, relevant wins]</a:t>
+            </a:r>
+          </a:p>
+          <a:p>
+            <a:pPr>
+              <a:spcAft>
+                <a:spcPts val="200"/>
+              </a:spcAft>
+            </a:pPr>
+            <a:r>
+              <a:rPr sz="1500" b="1" i="0">
+                <a:solidFill>
+                  <a:srgbClr val="EBEBEF"/>
+                </a:solidFill>
+                <a:latin typeface="Inter"/>
+              </a:rPr>
+              <a:t>Sho Cakarel</a:t>
+            </a:r>
+            <a:r>
+              <a:rPr sz="1250" b="1" i="0">
+                <a:solidFill>
+                  <a:srgbClr val="6366F1"/>
+                </a:solidFill>
+                <a:latin typeface="Inter"/>
+              </a:rPr>
+              <a:t>  ·  CTO</a:t>
+            </a:r>
+          </a:p>
+          <a:p>
+            <a:pPr>
+              <a:spcAft>
+                <a:spcPts val="900"/>
+              </a:spcAft>
+            </a:pPr>
+            <a:r>
+              <a:rPr sz="1150" b="0" i="0">
+                <a:solidFill>
+                  <a:srgbClr val="8B8D98"/>
+                </a:solidFill>
+                <a:latin typeface="Inter"/>
+              </a:rPr>
+              <a:t>sho@cakarel.com · [PLACEHOLDER: background, prior roles, relevant wins]</a:t>
             </a:r>
           </a:p>
           <a:p>
@@ -9298,12 +9404,9 @@
               <a:lnSpc>
                 <a:spcPct val="125000"/>
               </a:lnSpc>
-              <a:spcAft>
-                <a:spcPts val="1000"/>
-              </a:spcAft>
             </a:pPr>
             <a:r>
-              <a:rPr sz="1300" b="1" i="0">
+              <a:rPr sz="1250" b="1" i="0">
                 <a:solidFill>
                   <a:srgbClr val="EBEBEF"/>
                 </a:solidFill>
@@ -9312,41 +9415,13 @@
               <a:t>The repo is the résumé: </a:t>
             </a:r>
             <a:r>
-              <a:rPr sz="1300" b="0" i="0">
+              <a:rPr sz="1250" b="0" i="0">
                 <a:solidFill>
                   <a:srgbClr val="8B8D98"/>
                 </a:solidFill>
                 <a:latin typeface="Inter"/>
               </a:rPr>
               <a:t>15 dashboards, 2 trading bots, one auth/billing gateway, one 20-model quant toolkit — documented, tested, deployable.</a:t>
-            </a:r>
-          </a:p>
-          <a:p>
-            <a:pPr>
-              <a:lnSpc>
-                <a:spcPct val="125000"/>
-              </a:lnSpc>
-              <a:spcAft>
-                <a:spcPts val="1000"/>
-              </a:spcAft>
-            </a:pPr>
-            <a:r>
-              <a:rPr sz="1300" b="1" i="0">
-                <a:solidFill>
-                  <a:srgbClr val="EBEBEF"/>
-                </a:solidFill>
-                <a:latin typeface="Inter"/>
-              </a:rPr>
-              <a:t>Working style as brand: </a:t>
-            </a:r>
-            <a:r>
-              <a:rPr sz="1300" b="0" i="0">
-                <a:solidFill>
-                  <a:srgbClr val="8B8D98"/>
-                </a:solidFill>
-                <a:latin typeface="Inter"/>
-              </a:rPr>
-              <a:t>null-benchmarked models, after-cost edges, honest failure reporting.</a:t>
             </a:r>
           </a:p>
         </p:txBody>
@@ -9785,7 +9860,7 @@
         </p:nvSpPr>
         <p:spPr>
           <a:xfrm>
-            <a:off x="685800" y="1965960"/>
+            <a:off x="685800" y="2011680"/>
             <a:ext cx="6126480" cy="4206240"/>
           </a:xfrm>
           <a:prstGeom prst="rect">
@@ -9956,7 +10031,7 @@
         </p:nvSpPr>
         <p:spPr>
           <a:xfrm>
-            <a:off x="7315200" y="2148840"/>
+            <a:off x="7315200" y="2011680"/>
             <a:ext cx="4160520" cy="1417320"/>
           </a:xfrm>
           <a:prstGeom prst="roundRect">
@@ -10004,7 +10079,7 @@
         </p:nvSpPr>
         <p:spPr>
           <a:xfrm>
-            <a:off x="7534656" y="2313432"/>
+            <a:off x="7534656" y="2176272"/>
             <a:ext cx="3721608" cy="1188720"/>
           </a:xfrm>
           <a:prstGeom prst="rect">
@@ -10114,7 +10189,7 @@
         </p:nvSpPr>
         <p:spPr>
           <a:xfrm>
-            <a:off x="7315200" y="3794760"/>
+            <a:off x="7315200" y="3657600"/>
             <a:ext cx="4160520" cy="1417320"/>
           </a:xfrm>
           <a:prstGeom prst="roundRect">
@@ -10162,7 +10237,7 @@
         </p:nvSpPr>
         <p:spPr>
           <a:xfrm>
-            <a:off x="7534656" y="3959352"/>
+            <a:off x="7534656" y="3822192"/>
             <a:ext cx="3721608" cy="1188720"/>
           </a:xfrm>
           <a:prstGeom prst="rect">
@@ -10476,7 +10551,7 @@
         </p:nvSpPr>
         <p:spPr>
           <a:xfrm>
-            <a:off x="685800" y="1874519"/>
+            <a:off x="685800" y="2011680"/>
             <a:ext cx="10820095" cy="4206240"/>
           </a:xfrm>
           <a:prstGeom prst="rect">
@@ -13058,7 +13133,7 @@
               </a:spcAft>
             </a:pPr>
             <a:r>
-              <a:rPr sz="1300" b="1" i="0">
+              <a:rPr sz="1350" b="1" i="0">
                 <a:solidFill>
                   <a:srgbClr val="6366F1"/>
                 </a:solidFill>
@@ -13067,7 +13142,7 @@
               <a:t>—  </a:t>
             </a:r>
             <a:r>
-              <a:rPr sz="1300" b="1" i="0">
+              <a:rPr sz="1350" b="1" i="0">
                 <a:solidFill>
                   <a:srgbClr val="EBEBEF"/>
                 </a:solidFill>
@@ -13076,7 +13151,7 @@
               <a:t>Cost-engineered extraction. </a:t>
             </a:r>
             <a:r>
-              <a:rPr sz="1300" b="0" i="0">
+              <a:rPr sz="1350" b="0" i="0">
                 <a:solidFill>
                   <a:srgbClr val="8B8D98"/>
                 </a:solidFill>
@@ -13095,7 +13170,7 @@
               </a:spcAft>
             </a:pPr>
             <a:r>
-              <a:rPr sz="1300" b="1" i="0">
+              <a:rPr sz="1350" b="1" i="0">
                 <a:solidFill>
                   <a:srgbClr val="6366F1"/>
                 </a:solidFill>
@@ -13104,7 +13179,7 @@
               <a:t>—  </a:t>
             </a:r>
             <a:r>
-              <a:rPr sz="1300" b="1" i="0">
+              <a:rPr sz="1350" b="1" i="0">
                 <a:solidFill>
                   <a:srgbClr val="EBEBEF"/>
                 </a:solidFill>
@@ -13113,7 +13188,7 @@
               <a:t>Credibility is earned, not asserted. </a:t>
             </a:r>
             <a:r>
-              <a:rPr sz="1300" b="0" i="0">
+              <a:rPr sz="1350" b="0" i="0">
                 <a:solidFill>
                   <a:srgbClr val="8B8D98"/>
                 </a:solidFill>
@@ -13132,7 +13207,7 @@
               </a:spcAft>
             </a:pPr>
             <a:r>
-              <a:rPr sz="1300" b="1" i="0">
+              <a:rPr sz="1350" b="1" i="0">
                 <a:solidFill>
                   <a:srgbClr val="6366F1"/>
                 </a:solidFill>
@@ -13141,7 +13216,7 @@
               <a:t>—  </a:t>
             </a:r>
             <a:r>
-              <a:rPr sz="1300" b="1" i="0">
+              <a:rPr sz="1350" b="1" i="0">
                 <a:solidFill>
                   <a:srgbClr val="EBEBEF"/>
                 </a:solidFill>
@@ -13150,7 +13225,7 @@
               <a:t>Liquidity-honest EV. </a:t>
             </a:r>
             <a:r>
-              <a:rPr sz="1300" b="0" i="0">
+              <a:rPr sz="1350" b="0" i="0">
                 <a:solidFill>
                   <a:srgbClr val="8B8D98"/>
                 </a:solidFill>
@@ -13374,7 +13449,7 @@
         <p:spPr>
           <a:xfrm>
             <a:off x="685800" y="2103120"/>
-            <a:ext cx="2624328" cy="1691640"/>
+            <a:ext cx="2533573" cy="1737360"/>
           </a:xfrm>
           <a:prstGeom prst="roundRect">
             <a:avLst>
@@ -13422,7 +13497,7 @@
         <p:spPr>
           <a:xfrm>
             <a:off x="886968" y="2267712"/>
-            <a:ext cx="2221992" cy="1417320"/>
+            <a:ext cx="2131237" cy="1463040"/>
           </a:xfrm>
           <a:prstGeom prst="rect">
             <a:avLst/>
@@ -13538,8 +13613,8 @@
         </p:nvSpPr>
         <p:spPr>
           <a:xfrm>
-            <a:off x="3511296" y="2103120"/>
-            <a:ext cx="2624328" cy="1691640"/>
+            <a:off x="3447973" y="2103120"/>
+            <a:ext cx="2533573" cy="1737360"/>
           </a:xfrm>
           <a:prstGeom prst="roundRect">
             <a:avLst>
@@ -13586,8 +13661,8 @@
         </p:nvSpPr>
         <p:spPr>
           <a:xfrm>
-            <a:off x="3712464" y="2267712"/>
-            <a:ext cx="2221992" cy="1417320"/>
+            <a:off x="3649141" y="2267712"/>
+            <a:ext cx="2131237" cy="1463040"/>
           </a:xfrm>
           <a:prstGeom prst="rect">
             <a:avLst/>
@@ -13657,7 +13732,7 @@
         </p:nvSpPr>
         <p:spPr>
           <a:xfrm>
-            <a:off x="3511296" y="2304288"/>
+            <a:off x="3447973" y="2304288"/>
             <a:ext cx="27432" cy="256032"/>
           </a:xfrm>
           <a:prstGeom prst="roundRect">
@@ -13703,8 +13778,8 @@
         </p:nvSpPr>
         <p:spPr>
           <a:xfrm>
-            <a:off x="6336792" y="2103120"/>
-            <a:ext cx="2624328" cy="1691640"/>
+            <a:off x="6210146" y="2103120"/>
+            <a:ext cx="2533573" cy="1737360"/>
           </a:xfrm>
           <a:prstGeom prst="roundRect">
             <a:avLst>
@@ -13751,8 +13826,8 @@
         </p:nvSpPr>
         <p:spPr>
           <a:xfrm>
-            <a:off x="6537960" y="2267712"/>
-            <a:ext cx="2221992" cy="1417320"/>
+            <a:off x="6411314" y="2267712"/>
+            <a:ext cx="2131237" cy="1463040"/>
           </a:xfrm>
           <a:prstGeom prst="rect">
             <a:avLst/>
@@ -13822,7 +13897,7 @@
         </p:nvSpPr>
         <p:spPr>
           <a:xfrm>
-            <a:off x="6336792" y="2304288"/>
+            <a:off x="6210146" y="2304288"/>
             <a:ext cx="27432" cy="256032"/>
           </a:xfrm>
           <a:prstGeom prst="roundRect">
@@ -13868,8 +13943,8 @@
         </p:nvSpPr>
         <p:spPr>
           <a:xfrm>
-            <a:off x="9162288" y="2103120"/>
-            <a:ext cx="2624328" cy="1691640"/>
+            <a:off x="8972319" y="2103120"/>
+            <a:ext cx="2533573" cy="1737360"/>
           </a:xfrm>
           <a:prstGeom prst="roundRect">
             <a:avLst>
@@ -13916,8 +13991,8 @@
         </p:nvSpPr>
         <p:spPr>
           <a:xfrm>
-            <a:off x="9363456" y="2267712"/>
-            <a:ext cx="2221992" cy="1417320"/>
+            <a:off x="9173487" y="2267712"/>
+            <a:ext cx="2131237" cy="1463040"/>
           </a:xfrm>
           <a:prstGeom prst="rect">
             <a:avLst/>
@@ -13987,7 +14062,7 @@
         </p:nvSpPr>
         <p:spPr>
           <a:xfrm>
-            <a:off x="9162288" y="2304288"/>
+            <a:off x="8972319" y="2304288"/>
             <a:ext cx="27432" cy="256032"/>
           </a:xfrm>
           <a:prstGeom prst="roundRect">
@@ -15145,7 +15220,7 @@
         </p:nvSpPr>
         <p:spPr>
           <a:xfrm>
-            <a:off x="685800" y="1965960"/>
+            <a:off x="685800" y="2011680"/>
             <a:ext cx="6035040" cy="4206240"/>
           </a:xfrm>
           <a:prstGeom prst="rect">
@@ -15316,7 +15391,7 @@
         </p:nvSpPr>
         <p:spPr>
           <a:xfrm>
-            <a:off x="7269480" y="1965960"/>
+            <a:off x="7269480" y="2011680"/>
             <a:ext cx="4206240" cy="3566160"/>
           </a:xfrm>
           <a:prstGeom prst="roundRect">
@@ -15364,7 +15439,7 @@
         </p:nvSpPr>
         <p:spPr>
           <a:xfrm>
-            <a:off x="7635240" y="4619965"/>
+            <a:off x="7635240" y="4665685"/>
             <a:ext cx="274320" cy="134915"/>
           </a:xfrm>
           <a:prstGeom prst="roundRect">
@@ -15410,7 +15485,7 @@
         </p:nvSpPr>
         <p:spPr>
           <a:xfrm>
-            <a:off x="8028432" y="4433996"/>
+            <a:off x="8028432" y="4479716"/>
             <a:ext cx="274320" cy="320884"/>
           </a:xfrm>
           <a:prstGeom prst="roundRect">
@@ -15456,7 +15531,7 @@
         </p:nvSpPr>
         <p:spPr>
           <a:xfrm>
-            <a:off x="8421624" y="4222205"/>
+            <a:off x="8421624" y="4267925"/>
             <a:ext cx="274320" cy="532675"/>
           </a:xfrm>
           <a:prstGeom prst="roundRect">
@@ -15502,7 +15577,7 @@
         </p:nvSpPr>
         <p:spPr>
           <a:xfrm>
-            <a:off x="8814816" y="3991685"/>
+            <a:off x="8814816" y="4037405"/>
             <a:ext cx="274320" cy="763195"/>
           </a:xfrm>
           <a:prstGeom prst="roundRect">
@@ -15548,7 +15623,7 @@
         </p:nvSpPr>
         <p:spPr>
           <a:xfrm>
-            <a:off x="9208008" y="3746154"/>
+            <a:off x="9208008" y="3791874"/>
             <a:ext cx="274320" cy="1008726"/>
           </a:xfrm>
           <a:prstGeom prst="roundRect">
@@ -15594,7 +15669,7 @@
         </p:nvSpPr>
         <p:spPr>
           <a:xfrm>
-            <a:off x="9601200" y="3487958"/>
+            <a:off x="9601200" y="3533678"/>
             <a:ext cx="274320" cy="1266922"/>
           </a:xfrm>
           <a:prstGeom prst="roundRect">
@@ -15640,7 +15715,7 @@
         </p:nvSpPr>
         <p:spPr>
           <a:xfrm>
-            <a:off x="9994392" y="3218731"/>
+            <a:off x="9994392" y="3264451"/>
             <a:ext cx="274320" cy="1536149"/>
           </a:xfrm>
           <a:prstGeom prst="roundRect">
@@ -15686,7 +15761,7 @@
         </p:nvSpPr>
         <p:spPr>
           <a:xfrm>
-            <a:off x="10387584" y="2939685"/>
+            <a:off x="10387584" y="2985405"/>
             <a:ext cx="274320" cy="1815195"/>
           </a:xfrm>
           <a:prstGeom prst="roundRect">
@@ -15732,7 +15807,7 @@
         </p:nvSpPr>
         <p:spPr>
           <a:xfrm>
-            <a:off x="10780776" y="2651760"/>
+            <a:off x="10780776" y="2697480"/>
             <a:ext cx="274320" cy="2103120"/>
           </a:xfrm>
           <a:prstGeom prst="roundRect">
@@ -15778,7 +15853,7 @@
         </p:nvSpPr>
         <p:spPr>
           <a:xfrm>
-            <a:off x="7635240" y="4745736"/>
+            <a:off x="7635240" y="4791456"/>
             <a:ext cx="3429000" cy="18288"/>
           </a:xfrm>
           <a:prstGeom prst="rect">
@@ -15822,7 +15897,7 @@
         </p:nvSpPr>
         <p:spPr>
           <a:xfrm>
-            <a:off x="7635240" y="2194560"/>
+            <a:off x="7635240" y="2240280"/>
             <a:ext cx="3474720" cy="548640"/>
           </a:xfrm>
           <a:prstGeom prst="rect">
@@ -15870,7 +15945,7 @@
         </p:nvSpPr>
         <p:spPr>
           <a:xfrm>
-            <a:off x="7635240" y="4864608"/>
+            <a:off x="7635240" y="4910328"/>
             <a:ext cx="3474720" cy="502920"/>
           </a:xfrm>
           <a:prstGeom prst="rect">
@@ -16122,7 +16197,7 @@
         </p:nvSpPr>
         <p:spPr>
           <a:xfrm>
-            <a:off x="685800" y="1965960"/>
+            <a:off x="685800" y="2011680"/>
             <a:ext cx="5623560" cy="4206240"/>
           </a:xfrm>
           <a:prstGeom prst="rect">
@@ -17386,7 +17461,7 @@
         <p:spPr>
           <a:xfrm>
             <a:off x="685800" y="2103120"/>
-            <a:ext cx="2624328" cy="1828800"/>
+            <a:ext cx="2533573" cy="1737360"/>
           </a:xfrm>
           <a:prstGeom prst="roundRect">
             <a:avLst>
@@ -17434,7 +17509,7 @@
         <p:spPr>
           <a:xfrm>
             <a:off x="886968" y="2304288"/>
-            <a:ext cx="2221992" cy="1554480"/>
+            <a:ext cx="2131237" cy="1371600"/>
           </a:xfrm>
           <a:prstGeom prst="rect">
             <a:avLst/>
@@ -17504,8 +17579,8 @@
         </p:nvSpPr>
         <p:spPr>
           <a:xfrm>
-            <a:off x="3511296" y="2103120"/>
-            <a:ext cx="2624328" cy="1828800"/>
+            <a:off x="3447973" y="2103120"/>
+            <a:ext cx="2533573" cy="1737360"/>
           </a:xfrm>
           <a:prstGeom prst="roundRect">
             <a:avLst>
@@ -17552,8 +17627,8 @@
         </p:nvSpPr>
         <p:spPr>
           <a:xfrm>
-            <a:off x="3712464" y="2304288"/>
-            <a:ext cx="2221992" cy="1554480"/>
+            <a:off x="3649141" y="2304288"/>
+            <a:ext cx="2131237" cy="1371600"/>
           </a:xfrm>
           <a:prstGeom prst="rect">
             <a:avLst/>
@@ -17623,8 +17698,8 @@
         </p:nvSpPr>
         <p:spPr>
           <a:xfrm>
-            <a:off x="6336792" y="2103120"/>
-            <a:ext cx="2624328" cy="1828800"/>
+            <a:off x="6210146" y="2103120"/>
+            <a:ext cx="2533573" cy="1737360"/>
           </a:xfrm>
           <a:prstGeom prst="roundRect">
             <a:avLst>
@@ -17671,8 +17746,8 @@
         </p:nvSpPr>
         <p:spPr>
           <a:xfrm>
-            <a:off x="6537960" y="2304288"/>
-            <a:ext cx="2221992" cy="1554480"/>
+            <a:off x="6411314" y="2304288"/>
+            <a:ext cx="2131237" cy="1371600"/>
           </a:xfrm>
           <a:prstGeom prst="rect">
             <a:avLst/>
@@ -17742,8 +17817,8 @@
         </p:nvSpPr>
         <p:spPr>
           <a:xfrm>
-            <a:off x="9162288" y="2103120"/>
-            <a:ext cx="2624328" cy="1828800"/>
+            <a:off x="8972319" y="2103120"/>
+            <a:ext cx="2533573" cy="1737360"/>
           </a:xfrm>
           <a:prstGeom prst="roundRect">
             <a:avLst>
@@ -17790,8 +17865,8 @@
         </p:nvSpPr>
         <p:spPr>
           <a:xfrm>
-            <a:off x="9363456" y="2304288"/>
-            <a:ext cx="2221992" cy="1554480"/>
+            <a:off x="9173487" y="2304288"/>
+            <a:ext cx="2131237" cy="1371600"/>
           </a:xfrm>
           <a:prstGeom prst="rect">
             <a:avLst/>
@@ -17861,7 +17936,7 @@
         </p:nvSpPr>
         <p:spPr>
           <a:xfrm>
-            <a:off x="685800" y="4434840"/>
+            <a:off x="685800" y="4297680"/>
             <a:ext cx="10820095" cy="4206240"/>
           </a:xfrm>
           <a:prstGeom prst="rect">

--- a/pitch-deck/narve-pitch-deck.pptx
+++ b/pitch-deck/narve-pitch-deck.pptx
@@ -865,7 +865,7 @@
           <a:lstStyle/>
           <a:p>
             <a:r>
-              <a:t>Team: Julian Habbig (CEO, julian@habbig.com) and Sho Cakarel (CTO, sho@cakarel.com). [PLACEHOLDER: one sentence of background per founder — prior companies, domain credibility in markets or ML.] What the repo already evidences: execution breadth (every service documented, tested, deployable — including a 3,903-line risk/position-sizing build with Kelly sizing, Black-Scholes Greeks, and circuit breakers), operational maturity (CI, pre-deploy snapshots, production hardening flags, partner onboarding docs), and intellectual honesty as a working style (4-agent adversarial audit that caught a backtest off-by-one; Newey-West/Bonferroni statistical discipline). [PLACEHOLDER: raise amount and terms.] Framing for the close: this is not build-risk capital — product, billing rail, tests, and deploy tooling exist; capital converts a launch-ready system into a market position while the ledger moat compounds. Natural cost lines from the known risk register: X API spend (scales linearly with coverage), scraper resilience, semantic matching, per-tenant pipeline isolation, and launch GTM. Diligence items to have clean answers for: 'betyc' brand leftover, Stripe env vars unset in production, and README growth targets being goals, not traction. Then hand over the investor key and let the product finish the pitch.</a:t>
+              <a:t>Team: Julian Habbig (CEO, julian@habbig.com) and Sho Cakarel (CTO, sho@cakarel.com). [PLACEHOLDER: one sentence of background per founder — prior companies, domain credibility in markets or ML.] The ask is $50,000 pre-seed. Framing for a small round: this is not build-risk capital — the product, billing rail, tests, and deploy tooling already exist. $50K converts a launch-ready system into a live market position: it covers the X API quota (~$100/mo Basic tier scales with coverage), LLM extraction spend, hosting, and a focused launch push, while the credibility ledger starts compounding — the asset a later entrant cannot rebuild. The use-of-funds split on the slide (~40/35/25) is a draft; adjust to actual budget before sending. What the repo already evidences: execution breadth (every service documented, tested, deployable — including a 3,903-line risk/position-sizing build with Kelly sizing, Black-Scholes Greeks, and circuit breakers), operational maturity (CI, pre-deploy snapshots, production hardening flags, partner onboarding docs), and intellectual honesty as a working style (4-agent adversarial audit that caught a backtest off-by-one; Newey-West/Bonferroni statistical discipline). [PLACEHOLDER: raise amount and terms.] Framing for the close: this is not build-risk capital — product, billing rail, tests, and deploy tooling exist; capital converts a launch-ready system into a market position while the ledger moat compounds. Natural cost lines from the known risk register: X API spend (scales linearly with coverage), scraper resilience, semantic matching, per-tenant pipeline isolation, and launch GTM. Diligence items to have clean answers for: 'betyc' brand leftover, Stripe env vars unset in production, and README growth targets being goals, not traction. Then hand over the investor key and let the product finish the pitch.</a:t>
             </a:r>
           </a:p>
         </p:txBody>
@@ -9221,13 +9221,13 @@
               </a:lnSpc>
             </a:pPr>
             <a:r>
-              <a:rPr sz="2400" b="1" i="0" spc="-30">
+              <a:rPr sz="2600" b="1" i="0" spc="-30">
                 <a:solidFill>
                   <a:srgbClr val="EBEBEF"/>
                 </a:solidFill>
                 <a:latin typeface="Inter"/>
               </a:rPr>
-              <a:t>Habbig &amp; Cakarel built the entire stack — raising [PLACEHOLDER: $X] to switch it on.</a:t>
+              <a:t>Habbig &amp; Cakarel built the entire stack — raising $50K to switch it on.</a:t>
             </a:r>
           </a:p>
         </p:txBody>
@@ -9518,13 +9518,22 @@
               </a:spcAft>
             </a:pPr>
             <a:r>
-              <a:rPr sz="2600" b="1" i="0">
+              <a:rPr sz="3000" b="1" i="0">
                 <a:solidFill>
                   <a:srgbClr val="EBEBEF"/>
                 </a:solidFill>
                 <a:latin typeface="Inter"/>
               </a:rPr>
-              <a:t>[PLACEHOLDER: $X]</a:t>
+              <a:t>$50,000</a:t>
+            </a:r>
+            <a:r>
+              <a:rPr sz="1300" b="0" i="0">
+                <a:solidFill>
+                  <a:srgbClr val="8B8D98"/>
+                </a:solidFill>
+                <a:latin typeface="Inter"/>
+              </a:rPr>
+              <a:t>  pre-seed</a:t>
             </a:r>
           </a:p>
           <a:p>
@@ -9552,7 +9561,7 @@
                 </a:solidFill>
                 <a:latin typeface="Inter"/>
               </a:rPr>
-              <a:t>[PLACEHOLDER: SAFE / priced, target close date]</a:t>
+              <a:t>SAFE — [PLACEHOLDER: cap/discount, target close date]</a:t>
             </a:r>
           </a:p>
           <a:p>
@@ -9580,7 +9589,7 @@
                 </a:solidFill>
                 <a:latin typeface="Inter"/>
               </a:rPr>
-              <a:t>[PLACEHOLDER: % data/API costs · % engineering (semantic matching, multi-tenancy) · % GTM]</a:t>
+              <a:t>~40% data &amp; API costs (X quota, LLM extraction) · ~35% engineering (semantic matching, multi-tenancy) · ~25% launch GTM</a:t>
             </a:r>
           </a:p>
           <a:p>
@@ -9599,7 +9608,7 @@
                 </a:solidFill>
                 <a:latin typeface="Inter"/>
               </a:rPr>
-              <a:t>Runway: </a:t>
+              <a:t>Buys: </a:t>
             </a:r>
             <a:r>
               <a:rPr sz="1250" b="0" i="0">
@@ -9608,7 +9617,7 @@
                 </a:solidFill>
                 <a:latin typeface="Inter"/>
               </a:rPr>
-              <a:t>[PLACEHOLDER: months + milestone commitments]</a:t>
+              <a:t>public launch + [PLACEHOLDER: X] months of ledger compounding — the dataset no later entrant can rebuild</a:t>
             </a:r>
           </a:p>
         </p:txBody>

--- a/pitch-deck/narve-pitch-deck.pptx
+++ b/pitch-deck/narve-pitch-deck.pptx
@@ -4446,27 +4446,13 @@
             <a:avLst/>
           </a:prstGeom>
           <a:solidFill>
-            <a:srgbClr val="0C0D10"/>
+            <a:srgbClr val="F5F5F5"/>
           </a:solidFill>
           <a:ln>
             <a:noFill/>
           </a:ln>
           <a:effectLst/>
         </p:spPr>
-        <p:style>
-          <a:lnRef idx="1">
-            <a:schemeClr val="accent1"/>
-          </a:lnRef>
-          <a:fillRef idx="3">
-            <a:schemeClr val="accent1"/>
-          </a:fillRef>
-          <a:effectRef idx="2">
-            <a:schemeClr val="accent1"/>
-          </a:effectRef>
-          <a:fontRef idx="minor">
-            <a:schemeClr val="lt1"/>
-          </a:fontRef>
-        </p:style>
         <p:txBody>
           <a:bodyPr rtlCol="0" anchor="ctr"/>
           <a:lstStyle/>
@@ -4483,8 +4469,8 @@
         </p:nvSpPr>
         <p:spPr>
           <a:xfrm>
-            <a:off x="0" y="1828800"/>
-            <a:ext cx="12191695" cy="822960"/>
+            <a:off x="685800" y="502920"/>
+            <a:ext cx="2286000" cy="365760"/>
           </a:xfrm>
           <a:prstGeom prst="rect">
             <a:avLst/>
@@ -4497,24 +4483,14 @@
           </a:bodyPr>
           <a:lstStyle/>
           <a:p>
-            <a:pPr algn="ctr"/>
-            <a:r>
-              <a:rPr sz="4600" b="1" i="0" spc="-80">
-                <a:solidFill>
-                  <a:srgbClr val="EBEBEF"/>
-                </a:solidFill>
-                <a:latin typeface="Inter"/>
-              </a:rPr>
-              <a:t>narve</a:t>
-            </a:r>
-            <a:r>
-              <a:rPr sz="4600" b="1" i="0" spc="-80">
-                <a:solidFill>
-                  <a:srgbClr val="6366F1"/>
-                </a:solidFill>
-                <a:latin typeface="Inter"/>
-              </a:rPr>
-              <a:t>.ai</a:t>
+            <a:r>
+              <a:rPr sz="1600" b="1" i="0" spc="-50">
+                <a:solidFill>
+                  <a:srgbClr val="0D0D0D"/>
+                </a:solidFill>
+                <a:latin typeface="Jost"/>
+              </a:rPr>
+              <a:t>narve.ai</a:t>
             </a:r>
           </a:p>
         </p:txBody>
@@ -4527,8 +4503,8 @@
         </p:nvSpPr>
         <p:spPr>
           <a:xfrm>
-            <a:off x="1645920" y="2788920"/>
-            <a:ext cx="8899855" cy="914400"/>
+            <a:off x="0" y="1965960"/>
+            <a:ext cx="12191695" cy="1737360"/>
           </a:xfrm>
           <a:prstGeom prst="rect">
             <a:avLst/>
@@ -4543,17 +4519,42 @@
           <a:p>
             <a:pPr algn="ctr">
               <a:lnSpc>
-                <a:spcPct val="115000"/>
+                <a:spcPct val="110000"/>
               </a:lnSpc>
             </a:pPr>
             <a:r>
-              <a:rPr sz="2300" b="1" i="0" spc="-20">
-                <a:solidFill>
-                  <a:srgbClr val="EBEBEF"/>
-                </a:solidFill>
-                <a:latin typeface="Inter"/>
-              </a:rPr>
-              <a:t>We find out who's actually right about the future — and trade on it.</a:t>
+              <a:rPr sz="4200" b="0" i="0" spc="-120">
+                <a:solidFill>
+                  <a:srgbClr val="0D0D0D"/>
+                </a:solidFill>
+                <a:latin typeface="Jost"/>
+              </a:rPr>
+              <a:t>Stop guessing who's right.</a:t>
+            </a:r>
+          </a:p>
+          <a:p>
+            <a:pPr algn="ctr">
+              <a:lnSpc>
+                <a:spcPct val="110000"/>
+              </a:lnSpc>
+            </a:pPr>
+            <a:r>
+              <a:rPr sz="4200" b="0" i="0" spc="-120">
+                <a:solidFill>
+                  <a:srgbClr val="0D0D0D"/>
+                </a:solidFill>
+                <a:latin typeface="Jost"/>
+              </a:rPr>
+              <a:t>Start </a:t>
+            </a:r>
+            <a:r>
+              <a:rPr sz="4200" b="0" i="1" spc="-50">
+                <a:solidFill>
+                  <a:srgbClr val="0D0D0D"/>
+                </a:solidFill>
+                <a:latin typeface="Lora"/>
+              </a:rPr>
+              <a:t>knowing.</a:t>
             </a:r>
           </a:p>
         </p:txBody>
@@ -4566,8 +4567,43 @@
         </p:nvSpPr>
         <p:spPr>
           <a:xfrm>
-            <a:off x="2011680" y="3977639"/>
-            <a:ext cx="8168335" cy="1188720"/>
+            <a:off x="0" y="3977639"/>
+            <a:ext cx="12191695" cy="365760"/>
+          </a:xfrm>
+          <a:prstGeom prst="rect">
+            <a:avLst/>
+          </a:prstGeom>
+          <a:noFill/>
+        </p:spPr>
+        <p:txBody>
+          <a:bodyPr wrap="square" anchor="t" lIns="0" rIns="0" tIns="0" bIns="0">
+            <a:spAutoFit/>
+          </a:bodyPr>
+          <a:lstStyle/>
+          <a:p>
+            <a:pPr algn="ctr"/>
+            <a:r>
+              <a:rPr sz="1300" b="0" i="1" spc="160">
+                <a:solidFill>
+                  <a:srgbClr val="9A9A9A"/>
+                </a:solidFill>
+                <a:latin typeface="Lora"/>
+              </a:rPr>
+              <a:t>prediction intelligence for event markets</a:t>
+            </a:r>
+          </a:p>
+        </p:txBody>
+      </p:sp>
+      <p:sp>
+        <p:nvSpPr>
+          <p:cNvPr id="6" name="TextBox 5"/>
+          <p:cNvSpPr txBox="1"/>
+          <p:nvPr/>
+        </p:nvSpPr>
+        <p:spPr>
+          <a:xfrm>
+            <a:off x="2011680" y="4526280"/>
+            <a:ext cx="8168335" cy="457200"/>
           </a:xfrm>
           <a:prstGeom prst="rect">
             <a:avLst/>
@@ -4584,84 +4620,16 @@
               <a:lnSpc>
                 <a:spcPct val="120000"/>
               </a:lnSpc>
-              <a:spcAft>
-                <a:spcPts val="600"/>
-              </a:spcAft>
             </a:pPr>
             <a:r>
-              <a:rPr sz="1350" b="0" i="0">
-                <a:solidFill>
-                  <a:srgbClr val="8B8D98"/>
-                </a:solidFill>
-                <a:latin typeface="Inter"/>
-              </a:rPr>
-              <a:t>Prediction intelligence for Polymarket &amp; Kalshi — lead product: truth.narve.ai</a:t>
-            </a:r>
-          </a:p>
-          <a:p>
-            <a:pPr algn="ctr">
-              <a:lnSpc>
-                <a:spcPct val="120000"/>
-              </a:lnSpc>
-              <a:spcAft>
-                <a:spcPts val="600"/>
-              </a:spcAft>
-            </a:pPr>
-            <a:r>
-              <a:rPr sz="1350" b="0" i="0">
-                <a:solidFill>
-                  <a:srgbClr val="8B8D98"/>
-                </a:solidFill>
-                <a:latin typeface="Inter"/>
-              </a:rPr>
-              <a:t>We extract public predictions, settle them against real markets, and price the edge.</a:t>
-            </a:r>
-          </a:p>
-        </p:txBody>
-      </p:sp>
-      <p:sp>
-        <p:nvSpPr>
-          <p:cNvPr id="6" name="Rounded Rectangle 5"/>
-          <p:cNvSpPr/>
-          <p:nvPr/>
-        </p:nvSpPr>
-        <p:spPr>
-          <a:xfrm>
-            <a:off x="5641848" y="5074920"/>
-            <a:ext cx="914400" cy="27432"/>
-          </a:xfrm>
-          <a:prstGeom prst="roundRect">
-            <a:avLst>
-              <a:gd name="adj" fmla="val 50000"/>
-            </a:avLst>
-          </a:prstGeom>
-          <a:solidFill>
-            <a:srgbClr val="6366F1"/>
-          </a:solidFill>
-          <a:ln>
-            <a:noFill/>
-          </a:ln>
-          <a:effectLst/>
-        </p:spPr>
-        <p:style>
-          <a:lnRef idx="1">
-            <a:schemeClr val="accent1"/>
-          </a:lnRef>
-          <a:fillRef idx="3">
-            <a:schemeClr val="accent1"/>
-          </a:fillRef>
-          <a:effectRef idx="2">
-            <a:schemeClr val="accent1"/>
-          </a:effectRef>
-          <a:fontRef idx="minor">
-            <a:schemeClr val="lt1"/>
-          </a:fontRef>
-        </p:style>
-        <p:txBody>
-          <a:bodyPr rtlCol="0" anchor="ctr"/>
-          <a:lstStyle/>
-          <a:p>
-            <a:pPr algn="ctr"/>
+              <a:rPr sz="1300" b="0" i="0">
+                <a:solidFill>
+                  <a:srgbClr val="5A5A5A"/>
+                </a:solidFill>
+                <a:latin typeface="Jost"/>
+              </a:rPr>
+              <a:t>We extract public predictions, settle them against real Polymarket &amp; Kalshi markets, and price the edge.</a:t>
+            </a:r>
           </a:p>
         </p:txBody>
       </p:sp>
@@ -4673,7 +4641,7 @@
         </p:nvSpPr>
         <p:spPr>
           <a:xfrm>
-            <a:off x="0" y="5303520"/>
+            <a:off x="0" y="5349240"/>
             <a:ext cx="12191695" cy="685800"/>
           </a:xfrm>
           <a:prstGeom prst="rect">
@@ -4695,45 +4663,45 @@
             <a:r>
               <a:rPr sz="1200" b="1" i="0">
                 <a:solidFill>
-                  <a:srgbClr val="EBEBEF"/>
-                </a:solidFill>
-                <a:latin typeface="Inter"/>
+                  <a:srgbClr val="0D0D0D"/>
+                </a:solidFill>
+                <a:latin typeface="Jost"/>
               </a:rPr>
               <a:t>Julian Habbig</a:t>
             </a:r>
             <a:r>
               <a:rPr sz="1200" b="0" i="0">
                 <a:solidFill>
-                  <a:srgbClr val="8B8D98"/>
-                </a:solidFill>
-                <a:latin typeface="Inter"/>
+                  <a:srgbClr val="5A5A5A"/>
+                </a:solidFill>
+                <a:latin typeface="Jost"/>
               </a:rPr>
               <a:t> · CEO · julian@habbig.com</a:t>
             </a:r>
             <a:r>
               <a:rPr sz="1200" b="0" i="0">
                 <a:solidFill>
-                  <a:srgbClr val="8B8D98"/>
-                </a:solidFill>
-                <a:latin typeface="Inter"/>
+                  <a:srgbClr val="5A5A5A"/>
+                </a:solidFill>
+                <a:latin typeface="Jost"/>
               </a:rPr>
               <a:t>      </a:t>
             </a:r>
             <a:r>
               <a:rPr sz="1200" b="1" i="0">
                 <a:solidFill>
-                  <a:srgbClr val="EBEBEF"/>
-                </a:solidFill>
-                <a:latin typeface="Inter"/>
+                  <a:srgbClr val="0D0D0D"/>
+                </a:solidFill>
+                <a:latin typeface="Jost"/>
               </a:rPr>
               <a:t>Sho Cakarel</a:t>
             </a:r>
             <a:r>
               <a:rPr sz="1200" b="0" i="0">
                 <a:solidFill>
-                  <a:srgbClr val="8B8D98"/>
-                </a:solidFill>
-                <a:latin typeface="Inter"/>
+                  <a:srgbClr val="5A5A5A"/>
+                </a:solidFill>
+                <a:latin typeface="Jost"/>
               </a:rPr>
               <a:t> · CTO · sho@cakarel.com</a:t>
             </a:r>
@@ -4743,9 +4711,9 @@
             <a:r>
               <a:rPr sz="1100" b="0" i="0">
                 <a:solidFill>
-                  <a:srgbClr val="5C5E6A"/>
-                </a:solidFill>
-                <a:latin typeface="Inter"/>
+                  <a:srgbClr val="9A9A9A"/>
+                </a:solidFill>
+                <a:latin typeface="Jost"/>
               </a:rPr>
               <a:t>Pre-seed   ·   July 2026</a:t>
             </a:r>
@@ -4785,27 +4753,13 @@
             <a:avLst/>
           </a:prstGeom>
           <a:solidFill>
-            <a:srgbClr val="0C0D10"/>
+            <a:srgbClr val="F5F5F5"/>
           </a:solidFill>
           <a:ln>
             <a:noFill/>
           </a:ln>
           <a:effectLst/>
         </p:spPr>
-        <p:style>
-          <a:lnRef idx="1">
-            <a:schemeClr val="accent1"/>
-          </a:lnRef>
-          <a:fillRef idx="3">
-            <a:schemeClr val="accent1"/>
-          </a:fillRef>
-          <a:effectRef idx="2">
-            <a:schemeClr val="accent1"/>
-          </a:effectRef>
-          <a:fontRef idx="minor">
-            <a:schemeClr val="lt1"/>
-          </a:fontRef>
-        </p:style>
         <p:txBody>
           <a:bodyPr rtlCol="0" anchor="ctr"/>
           <a:lstStyle/>
@@ -4837,11 +4791,11 @@
           <a:lstStyle/>
           <a:p>
             <a:r>
-              <a:rPr sz="1250" b="1" i="0" spc="220">
-                <a:solidFill>
-                  <a:srgbClr val="6366F1"/>
-                </a:solidFill>
-                <a:latin typeface="Inter"/>
+              <a:rPr sz="1100" b="0" i="0" spc="260">
+                <a:solidFill>
+                  <a:srgbClr val="9A9A9A"/>
+                </a:solidFill>
+                <a:latin typeface="Jost"/>
               </a:rPr>
               <a:t>MARKET</a:t>
             </a:r>
@@ -4873,9 +4827,9 @@
             <a:r>
               <a:rPr sz="900" b="0" i="0">
                 <a:solidFill>
-                  <a:srgbClr val="5C5E6A"/>
-                </a:solidFill>
-                <a:latin typeface="Inter"/>
+                  <a:srgbClr val="9A9A9A"/>
+                </a:solidFill>
+                <a:latin typeface="Jost"/>
               </a:rPr>
               <a:t>narve.ai — confidential</a:t>
             </a:r>
@@ -4908,9 +4862,9 @@
             <a:r>
               <a:rPr sz="900" b="0" i="0">
                 <a:solidFill>
-                  <a:srgbClr val="5C5E6A"/>
-                </a:solidFill>
-                <a:latin typeface="Inter"/>
+                  <a:srgbClr val="9A9A9A"/>
+                </a:solidFill>
+                <a:latin typeface="Jost"/>
               </a:rPr>
               <a:t>10 / 14</a:t>
             </a:r>
@@ -4945,13 +4899,22 @@
               </a:lnSpc>
             </a:pPr>
             <a:r>
-              <a:rPr sz="2400" b="1" i="0" spc="-30">
-                <a:solidFill>
-                  <a:srgbClr val="EBEBEF"/>
-                </a:solidFill>
-                <a:latin typeface="Inter"/>
-              </a:rPr>
-              <a:t>A $6.5B research-platform market — and prediction markets are its fastest-growing new category.</a:t>
+              <a:rPr sz="2500" b="0" i="0" spc="-50">
+                <a:solidFill>
+                  <a:srgbClr val="0D0D0D"/>
+                </a:solidFill>
+                <a:latin typeface="Jost"/>
+              </a:rPr>
+              <a:t>A $6.5B research-platform market — prediction markets are its </a:t>
+            </a:r>
+            <a:r>
+              <a:rPr sz="2500" b="0" i="1" spc="-30">
+                <a:solidFill>
+                  <a:srgbClr val="0D0D0D"/>
+                </a:solidFill>
+                <a:latin typeface="Lora"/>
+              </a:rPr>
+              <a:t>fastest-growing category.</a:t>
             </a:r>
           </a:p>
         </p:txBody>
@@ -4971,29 +4934,15 @@
             <a:avLst/>
           </a:prstGeom>
           <a:solidFill>
-            <a:srgbClr val="312E81"/>
+            <a:srgbClr val="E3E3E3"/>
           </a:solidFill>
           <a:ln w="25400">
             <a:solidFill>
-              <a:srgbClr val="0C0D10"/>
+              <a:srgbClr val="F5F5F5"/>
             </a:solidFill>
           </a:ln>
           <a:effectLst/>
         </p:spPr>
-        <p:style>
-          <a:lnRef idx="1">
-            <a:schemeClr val="accent1"/>
-          </a:lnRef>
-          <a:fillRef idx="3">
-            <a:schemeClr val="accent1"/>
-          </a:fillRef>
-          <a:effectRef idx="2">
-            <a:schemeClr val="accent1"/>
-          </a:effectRef>
-          <a:fontRef idx="minor">
-            <a:schemeClr val="lt1"/>
-          </a:fontRef>
-        </p:style>
         <p:txBody>
           <a:bodyPr rtlCol="0" anchor="ctr"/>
           <a:lstStyle/>
@@ -5017,29 +4966,15 @@
             <a:avLst/>
           </a:prstGeom>
           <a:solidFill>
-            <a:srgbClr val="4F46E5"/>
+            <a:srgbClr val="B0B0B0"/>
           </a:solidFill>
           <a:ln w="25400">
             <a:solidFill>
-              <a:srgbClr val="0C0D10"/>
+              <a:srgbClr val="F5F5F5"/>
             </a:solidFill>
           </a:ln>
           <a:effectLst/>
         </p:spPr>
-        <p:style>
-          <a:lnRef idx="1">
-            <a:schemeClr val="accent1"/>
-          </a:lnRef>
-          <a:fillRef idx="3">
-            <a:schemeClr val="accent1"/>
-          </a:fillRef>
-          <a:effectRef idx="2">
-            <a:schemeClr val="accent1"/>
-          </a:effectRef>
-          <a:fontRef idx="minor">
-            <a:schemeClr val="lt1"/>
-          </a:fontRef>
-        </p:style>
         <p:txBody>
           <a:bodyPr rtlCol="0" anchor="ctr"/>
           <a:lstStyle/>
@@ -5063,29 +4998,15 @@
             <a:avLst/>
           </a:prstGeom>
           <a:solidFill>
-            <a:srgbClr val="6366F1"/>
+            <a:srgbClr val="0D0D0D"/>
           </a:solidFill>
           <a:ln w="25400">
             <a:solidFill>
-              <a:srgbClr val="0C0D10"/>
+              <a:srgbClr val="F5F5F5"/>
             </a:solidFill>
           </a:ln>
           <a:effectLst/>
         </p:spPr>
-        <p:style>
-          <a:lnRef idx="1">
-            <a:schemeClr val="accent1"/>
-          </a:lnRef>
-          <a:fillRef idx="3">
-            <a:schemeClr val="accent1"/>
-          </a:fillRef>
-          <a:effectRef idx="2">
-            <a:schemeClr val="accent1"/>
-          </a:effectRef>
-          <a:fontRef idx="minor">
-            <a:schemeClr val="lt1"/>
-          </a:fontRef>
-        </p:style>
         <p:txBody>
           <a:bodyPr rtlCol="0" anchor="ctr"/>
           <a:lstStyle/>
@@ -5109,27 +5030,13 @@
             <a:avLst/>
           </a:prstGeom>
           <a:solidFill>
-            <a:srgbClr val="312E81"/>
+            <a:srgbClr val="E3E3E3"/>
           </a:solidFill>
           <a:ln>
             <a:noFill/>
           </a:ln>
           <a:effectLst/>
         </p:spPr>
-        <p:style>
-          <a:lnRef idx="1">
-            <a:schemeClr val="accent1"/>
-          </a:lnRef>
-          <a:fillRef idx="3">
-            <a:schemeClr val="accent1"/>
-          </a:fillRef>
-          <a:effectRef idx="2">
-            <a:schemeClr val="accent1"/>
-          </a:effectRef>
-          <a:fontRef idx="minor">
-            <a:schemeClr val="lt1"/>
-          </a:fontRef>
-        </p:style>
         <p:txBody>
           <a:bodyPr rtlCol="0" anchor="ctr"/>
           <a:lstStyle/>
@@ -5168,9 +5075,9 @@
             <a:r>
               <a:rPr sz="1350" b="1" i="0">
                 <a:solidFill>
-                  <a:srgbClr val="EBEBEF"/>
-                </a:solidFill>
-                <a:latin typeface="Inter"/>
+                  <a:srgbClr val="0D0D0D"/>
+                </a:solidFill>
+                <a:latin typeface="Jost"/>
               </a:rPr>
               <a:t>TAM  $6.5B → $13.25B</a:t>
             </a:r>
@@ -5184,9 +5091,9 @@
             <a:r>
               <a:rPr sz="1000" b="0" i="0">
                 <a:solidFill>
-                  <a:srgbClr val="8B8D98"/>
-                </a:solidFill>
-                <a:latin typeface="Inter"/>
+                  <a:srgbClr val="5A5A5A"/>
+                </a:solidFill>
+                <a:latin typeface="Jost"/>
               </a:rPr>
               <a:t>investment-research platforms, 2025→2030 — Research and Markets</a:t>
             </a:r>
@@ -5208,27 +5115,13 @@
             <a:avLst/>
           </a:prstGeom>
           <a:solidFill>
-            <a:srgbClr val="4F46E5"/>
+            <a:srgbClr val="B0B0B0"/>
           </a:solidFill>
           <a:ln>
             <a:noFill/>
           </a:ln>
           <a:effectLst/>
         </p:spPr>
-        <p:style>
-          <a:lnRef idx="1">
-            <a:schemeClr val="accent1"/>
-          </a:lnRef>
-          <a:fillRef idx="3">
-            <a:schemeClr val="accent1"/>
-          </a:fillRef>
-          <a:effectRef idx="2">
-            <a:schemeClr val="accent1"/>
-          </a:effectRef>
-          <a:fontRef idx="minor">
-            <a:schemeClr val="lt1"/>
-          </a:fontRef>
-        </p:style>
         <p:txBody>
           <a:bodyPr rtlCol="0" anchor="ctr"/>
           <a:lstStyle/>
@@ -5267,9 +5160,9 @@
             <a:r>
               <a:rPr sz="1350" b="1" i="0">
                 <a:solidFill>
-                  <a:srgbClr val="EBEBEF"/>
-                </a:solidFill>
-                <a:latin typeface="Inter"/>
+                  <a:srgbClr val="0D0D0D"/>
+                </a:solidFill>
+                <a:latin typeface="Jost"/>
               </a:rPr>
               <a:t>SAM  ~$0.9–2.5B / yr</a:t>
             </a:r>
@@ -5283,9 +5176,9 @@
             <a:r>
               <a:rPr sz="1000" b="0" i="0">
                 <a:solidFill>
-                  <a:srgbClr val="8B8D98"/>
-                </a:solidFill>
-                <a:latin typeface="Inter"/>
+                  <a:srgbClr val="5A5A5A"/>
+                </a:solidFill>
+                <a:latin typeface="Jost"/>
               </a:rPr>
               <a:t>by 2029–30 — company estimate from cited inputs</a:t>
             </a:r>
@@ -5307,27 +5200,13 @@
             <a:avLst/>
           </a:prstGeom>
           <a:solidFill>
-            <a:srgbClr val="6366F1"/>
+            <a:srgbClr val="0D0D0D"/>
           </a:solidFill>
           <a:ln>
             <a:noFill/>
           </a:ln>
           <a:effectLst/>
         </p:spPr>
-        <p:style>
-          <a:lnRef idx="1">
-            <a:schemeClr val="accent1"/>
-          </a:lnRef>
-          <a:fillRef idx="3">
-            <a:schemeClr val="accent1"/>
-          </a:fillRef>
-          <a:effectRef idx="2">
-            <a:schemeClr val="accent1"/>
-          </a:effectRef>
-          <a:fontRef idx="minor">
-            <a:schemeClr val="lt1"/>
-          </a:fontRef>
-        </p:style>
         <p:txBody>
           <a:bodyPr rtlCol="0" anchor="ctr"/>
           <a:lstStyle/>
@@ -5366,9 +5245,9 @@
             <a:r>
               <a:rPr sz="1350" b="1" i="0">
                 <a:solidFill>
-                  <a:srgbClr val="EBEBEF"/>
-                </a:solidFill>
-                <a:latin typeface="Inter"/>
+                  <a:srgbClr val="0D0D0D"/>
+                </a:solidFill>
+                <a:latin typeface="Jost"/>
               </a:rPr>
               <a:t>SOM  ~$5–25M ARR</a:t>
             </a:r>
@@ -5382,9 +5261,9 @@
             <a:r>
               <a:rPr sz="1000" b="0" i="0">
                 <a:solidFill>
-                  <a:srgbClr val="8B8D98"/>
-                </a:solidFill>
-                <a:latin typeface="Inter"/>
+                  <a:srgbClr val="5A5A5A"/>
+                </a:solidFill>
+                <a:latin typeface="Jost"/>
               </a:rPr>
               <a:t>within 3–4 years — company estimate</a:t>
             </a:r>
@@ -5408,29 +5287,15 @@
             </a:avLst>
           </a:prstGeom>
           <a:solidFill>
-            <a:srgbClr val="18191E"/>
+            <a:srgbClr val="FFFFFF"/>
           </a:solidFill>
           <a:ln w="9525">
             <a:solidFill>
-              <a:srgbClr val="24252C"/>
+              <a:srgbClr val="E0E0E0"/>
             </a:solidFill>
           </a:ln>
           <a:effectLst/>
         </p:spPr>
-        <p:style>
-          <a:lnRef idx="1">
-            <a:schemeClr val="accent1"/>
-          </a:lnRef>
-          <a:fillRef idx="3">
-            <a:schemeClr val="accent1"/>
-          </a:fillRef>
-          <a:effectRef idx="2">
-            <a:schemeClr val="accent1"/>
-          </a:effectRef>
-          <a:fontRef idx="minor">
-            <a:schemeClr val="lt1"/>
-          </a:fontRef>
-        </p:style>
         <p:txBody>
           <a:bodyPr rtlCol="0" anchor="ctr"/>
           <a:lstStyle/>
@@ -5469,9 +5334,9 @@
             <a:r>
               <a:rPr sz="1000" b="1" i="0" spc="120">
                 <a:solidFill>
-                  <a:srgbClr val="5C5E6A"/>
-                </a:solidFill>
-                <a:latin typeface="Inter"/>
+                  <a:srgbClr val="9A9A9A"/>
+                </a:solidFill>
+                <a:latin typeface="Jost"/>
               </a:rPr>
               <a:t>THE BOTTOM-UP MATH</a:t>
             </a:r>
@@ -5488,18 +5353,18 @@
             <a:r>
               <a:rPr sz="1250" b="1" i="0">
                 <a:solidFill>
-                  <a:srgbClr val="EBEBEF"/>
-                </a:solidFill>
-                <a:latin typeface="Inter"/>
+                  <a:srgbClr val="0D0D0D"/>
+                </a:solidFill>
+                <a:latin typeface="Jost"/>
               </a:rPr>
               <a:t>678K </a:t>
             </a:r>
             <a:r>
               <a:rPr sz="1100" b="0" i="0">
                 <a:solidFill>
-                  <a:srgbClr val="8B8D98"/>
-                </a:solidFill>
-                <a:latin typeface="Inter"/>
+                  <a:srgbClr val="5A5A5A"/>
+                </a:solidFill>
+                <a:latin typeface="Jost"/>
               </a:rPr>
               <a:t>monthly traders — Polymarket on-chain uniques, Apr 2026</a:t>
             </a:r>
@@ -5516,18 +5381,18 @@
             <a:r>
               <a:rPr sz="1250" b="1" i="0">
                 <a:solidFill>
-                  <a:srgbClr val="EBEBEF"/>
-                </a:solidFill>
-                <a:latin typeface="Inter"/>
+                  <a:srgbClr val="0D0D0D"/>
+                </a:solidFill>
+                <a:latin typeface="Jost"/>
               </a:rPr>
               <a:t>× 20–35% </a:t>
             </a:r>
             <a:r>
               <a:rPr sz="1100" b="0" i="0">
                 <a:solidFill>
-                  <a:srgbClr val="8B8D98"/>
-                </a:solidFill>
-                <a:latin typeface="Inter"/>
+                  <a:srgbClr val="5A5A5A"/>
+                </a:solidFill>
+                <a:latin typeface="Jost"/>
               </a:rPr>
               <a:t>serious-trader segment</a:t>
             </a:r>
@@ -5544,18 +5409,18 @@
             <a:r>
               <a:rPr sz="1250" b="1" i="0">
                 <a:solidFill>
-                  <a:srgbClr val="EBEBEF"/>
-                </a:solidFill>
-                <a:latin typeface="Inter"/>
+                  <a:srgbClr val="0D0D0D"/>
+                </a:solidFill>
+                <a:latin typeface="Jost"/>
               </a:rPr>
               <a:t>× $300–600/yr </a:t>
             </a:r>
             <a:r>
               <a:rPr sz="1100" b="0" i="0">
                 <a:solidFill>
-                  <a:srgbClr val="8B8D98"/>
-                </a:solidFill>
-                <a:latin typeface="Inter"/>
+                  <a:srgbClr val="5A5A5A"/>
+                </a:solidFill>
+                <a:latin typeface="Jost"/>
               </a:rPr>
               <a:t>ARPU (Finviz / Stock Rover comps)</a:t>
             </a:r>
@@ -5572,18 +5437,18 @@
             <a:r>
               <a:rPr sz="1250" b="1" i="0">
                 <a:solidFill>
-                  <a:srgbClr val="EBEBEF"/>
-                </a:solidFill>
-                <a:latin typeface="Inter"/>
+                  <a:srgbClr val="0D0D0D"/>
+                </a:solidFill>
+                <a:latin typeface="Jost"/>
               </a:rPr>
               <a:t>+ </a:t>
             </a:r>
             <a:r>
               <a:rPr sz="1100" b="0" i="0">
                 <a:solidFill>
-                  <a:srgbClr val="8B8D98"/>
-                </a:solidFill>
-                <a:latin typeface="Inter"/>
+                  <a:srgbClr val="5A5A5A"/>
+                </a:solidFill>
+                <a:latin typeface="Jost"/>
               </a:rPr>
               <a:t>institutional feed licenses ($49.2B market-data spend — Burton-Taylor FY2025)</a:t>
             </a:r>
@@ -5615,9 +5480,9 @@
             <a:r>
               <a:rPr sz="1000" b="0" i="1">
                 <a:solidFill>
-                  <a:srgbClr val="5C5E6A"/>
-                </a:solidFill>
-                <a:latin typeface="Inter"/>
+                  <a:srgbClr val="9A9A9A"/>
+                </a:solidFill>
+                <a:latin typeface="Jost"/>
               </a:rPr>
               <a:t>* SAM and SOM are company estimates derived from the cited inputs — not third-party figures.</a:t>
             </a:r>
@@ -5657,27 +5522,13 @@
             <a:avLst/>
           </a:prstGeom>
           <a:solidFill>
-            <a:srgbClr val="0C0D10"/>
+            <a:srgbClr val="F5F5F5"/>
           </a:solidFill>
           <a:ln>
             <a:noFill/>
           </a:ln>
           <a:effectLst/>
         </p:spPr>
-        <p:style>
-          <a:lnRef idx="1">
-            <a:schemeClr val="accent1"/>
-          </a:lnRef>
-          <a:fillRef idx="3">
-            <a:schemeClr val="accent1"/>
-          </a:fillRef>
-          <a:effectRef idx="2">
-            <a:schemeClr val="accent1"/>
-          </a:effectRef>
-          <a:fontRef idx="minor">
-            <a:schemeClr val="lt1"/>
-          </a:fontRef>
-        </p:style>
         <p:txBody>
           <a:bodyPr rtlCol="0" anchor="ctr"/>
           <a:lstStyle/>
@@ -5709,11 +5560,11 @@
           <a:lstStyle/>
           <a:p>
             <a:r>
-              <a:rPr sz="1250" b="1" i="0" spc="220">
-                <a:solidFill>
-                  <a:srgbClr val="6366F1"/>
-                </a:solidFill>
-                <a:latin typeface="Inter"/>
+              <a:rPr sz="1100" b="0" i="0" spc="260">
+                <a:solidFill>
+                  <a:srgbClr val="9A9A9A"/>
+                </a:solidFill>
+                <a:latin typeface="Jost"/>
               </a:rPr>
               <a:t>COMPETITION</a:t>
             </a:r>
@@ -5745,9 +5596,9 @@
             <a:r>
               <a:rPr sz="900" b="0" i="0">
                 <a:solidFill>
-                  <a:srgbClr val="5C5E6A"/>
-                </a:solidFill>
-                <a:latin typeface="Inter"/>
+                  <a:srgbClr val="9A9A9A"/>
+                </a:solidFill>
+                <a:latin typeface="Jost"/>
               </a:rPr>
               <a:t>narve.ai — confidential</a:t>
             </a:r>
@@ -5780,9 +5631,9 @@
             <a:r>
               <a:rPr sz="900" b="0" i="0">
                 <a:solidFill>
-                  <a:srgbClr val="5C5E6A"/>
-                </a:solidFill>
-                <a:latin typeface="Inter"/>
+                  <a:srgbClr val="9A9A9A"/>
+                </a:solidFill>
+                <a:latin typeface="Jost"/>
               </a:rPr>
               <a:t>11 / 14</a:t>
             </a:r>
@@ -5817,13 +5668,22 @@
               </a:lnSpc>
             </a:pPr>
             <a:r>
-              <a:rPr sz="2400" b="1" i="0" spc="-30">
-                <a:solidFill>
-                  <a:srgbClr val="EBEBEF"/>
-                </a:solidFill>
-                <a:latin typeface="Inter"/>
-              </a:rPr>
-              <a:t>Everyone analyzes the market or counts the crowd; nobody keeps score of the people.</a:t>
+              <a:rPr sz="2500" b="0" i="0" spc="-50">
+                <a:solidFill>
+                  <a:srgbClr val="0D0D0D"/>
+                </a:solidFill>
+                <a:latin typeface="Jost"/>
+              </a:rPr>
+              <a:t>Everyone analyzes the market or counts the crowd; nobody keeps score of </a:t>
+            </a:r>
+            <a:r>
+              <a:rPr sz="2500" b="0" i="1" spc="-30">
+                <a:solidFill>
+                  <a:srgbClr val="0D0D0D"/>
+                </a:solidFill>
+                <a:latin typeface="Lora"/>
+              </a:rPr>
+              <a:t>the people.</a:t>
             </a:r>
           </a:p>
         </p:txBody>
@@ -5859,29 +5719,29 @@
               </a:spcAft>
             </a:pPr>
             <a:r>
+              <a:rPr sz="1350" b="0" i="0">
+                <a:solidFill>
+                  <a:srgbClr val="B0B0B0"/>
+                </a:solidFill>
+                <a:latin typeface="Jost"/>
+              </a:rPr>
+              <a:t>—  </a:t>
+            </a:r>
+            <a:r>
               <a:rPr sz="1350" b="1" i="0">
                 <a:solidFill>
-                  <a:srgbClr val="6366F1"/>
-                </a:solidFill>
-                <a:latin typeface="Inter"/>
-              </a:rPr>
-              <a:t>—  </a:t>
-            </a:r>
-            <a:r>
-              <a:rPr sz="1350" b="1" i="0">
-                <a:solidFill>
-                  <a:srgbClr val="EBEBEF"/>
-                </a:solidFill>
-                <a:latin typeface="Inter"/>
+                  <a:srgbClr val="0D0D0D"/>
+                </a:solidFill>
+                <a:latin typeface="Jost"/>
               </a:rPr>
               <a:t>Terminals, wallet trackers, Dune: </a:t>
             </a:r>
             <a:r>
               <a:rPr sz="1350" b="0" i="0">
                 <a:solidFill>
-                  <a:srgbClr val="8B8D98"/>
-                </a:solidFill>
-                <a:latin typeface="Inter"/>
+                  <a:srgbClr val="5A5A5A"/>
+                </a:solidFill>
+                <a:latin typeface="Jost"/>
               </a:rPr>
               <a:t>only see money already inside the market — after the price moved.</a:t>
             </a:r>
@@ -5896,29 +5756,29 @@
               </a:spcAft>
             </a:pPr>
             <a:r>
+              <a:rPr sz="1350" b="0" i="0">
+                <a:solidFill>
+                  <a:srgbClr val="B0B0B0"/>
+                </a:solidFill>
+                <a:latin typeface="Jost"/>
+              </a:rPr>
+              <a:t>—  </a:t>
+            </a:r>
+            <a:r>
               <a:rPr sz="1350" b="1" i="0">
                 <a:solidFill>
-                  <a:srgbClr val="6366F1"/>
-                </a:solidFill>
-                <a:latin typeface="Inter"/>
-              </a:rPr>
-              <a:t>—  </a:t>
-            </a:r>
-            <a:r>
-              <a:rPr sz="1350" b="1" i="0">
-                <a:solidFill>
-                  <a:srgbClr val="EBEBEF"/>
-                </a:solidFill>
-                <a:latin typeface="Inter"/>
+                  <a:srgbClr val="0D0D0D"/>
+                </a:solidFill>
+                <a:latin typeface="Jost"/>
               </a:rPr>
               <a:t>LunarCrush, Santiment: </a:t>
             </a:r>
             <a:r>
               <a:rPr sz="1350" b="0" i="0">
                 <a:solidFill>
-                  <a:srgbClr val="8B8D98"/>
-                </a:solidFill>
-                <a:latin typeface="Inter"/>
+                  <a:srgbClr val="5A5A5A"/>
+                </a:solidFill>
+                <a:latin typeface="Jost"/>
               </a:rPr>
               <a:t>crowd volume and mood — never falsifiable, never settled.</a:t>
             </a:r>
@@ -5933,29 +5793,29 @@
               </a:spcAft>
             </a:pPr>
             <a:r>
+              <a:rPr sz="1350" b="0" i="0">
+                <a:solidFill>
+                  <a:srgbClr val="B0B0B0"/>
+                </a:solidFill>
+                <a:latin typeface="Jost"/>
+              </a:rPr>
+              <a:t>—  </a:t>
+            </a:r>
+            <a:r>
               <a:rPr sz="1350" b="1" i="0">
                 <a:solidFill>
-                  <a:srgbClr val="6366F1"/>
-                </a:solidFill>
-                <a:latin typeface="Inter"/>
-              </a:rPr>
-              <a:t>—  </a:t>
-            </a:r>
-            <a:r>
-              <a:rPr sz="1350" b="1" i="0">
-                <a:solidFill>
-                  <a:srgbClr val="EBEBEF"/>
-                </a:solidFill>
-                <a:latin typeface="Inter"/>
+                  <a:srgbClr val="0D0D0D"/>
+                </a:solidFill>
+                <a:latin typeface="Jost"/>
               </a:rPr>
               <a:t>Metaculus, FutureSearch: </a:t>
             </a:r>
             <a:r>
               <a:rPr sz="1350" b="0" i="0">
                 <a:solidFill>
-                  <a:srgbClr val="8B8D98"/>
-                </a:solidFill>
-                <a:latin typeface="Inter"/>
+                  <a:srgbClr val="5A5A5A"/>
+                </a:solidFill>
+                <a:latin typeface="Jost"/>
               </a:rPr>
               <a:t>rigorous, but score only their own or on-platform forecasts.</a:t>
             </a:r>
@@ -5970,29 +5830,29 @@
               </a:spcAft>
             </a:pPr>
             <a:r>
+              <a:rPr sz="1350" b="0" i="0">
+                <a:solidFill>
+                  <a:srgbClr val="B0B0B0"/>
+                </a:solidFill>
+                <a:latin typeface="Jost"/>
+              </a:rPr>
+              <a:t>—  </a:t>
+            </a:r>
+            <a:r>
               <a:rPr sz="1350" b="1" i="0">
                 <a:solidFill>
-                  <a:srgbClr val="6366F1"/>
-                </a:solidFill>
-                <a:latin typeface="Inter"/>
-              </a:rPr>
-              <a:t>—  </a:t>
-            </a:r>
-            <a:r>
-              <a:rPr sz="1350" b="1" i="0">
-                <a:solidFill>
-                  <a:srgbClr val="EBEBEF"/>
-                </a:solidFill>
-                <a:latin typeface="Inter"/>
+                  <a:srgbClr val="0D0D0D"/>
+                </a:solidFill>
+                <a:latin typeface="Jost"/>
               </a:rPr>
               <a:t>narve.ai alone: </a:t>
             </a:r>
             <a:r>
               <a:rPr sz="1350" b="0" i="0">
                 <a:solidFill>
-                  <a:srgbClr val="8B8D98"/>
-                </a:solidFill>
-                <a:latin typeface="Inter"/>
+                  <a:srgbClr val="5A5A5A"/>
+                </a:solidFill>
+                <a:latin typeface="Jost"/>
               </a:rPr>
               <a:t>off-market authored claims → outcome-settled, EV-ranked signals across both venues.</a:t>
             </a:r>
@@ -6016,29 +5876,15 @@
             </a:avLst>
           </a:prstGeom>
           <a:solidFill>
-            <a:srgbClr val="18191E"/>
+            <a:srgbClr val="FFFFFF"/>
           </a:solidFill>
           <a:ln w="9525">
             <a:solidFill>
-              <a:srgbClr val="24252C"/>
+              <a:srgbClr val="E0E0E0"/>
             </a:solidFill>
           </a:ln>
           <a:effectLst/>
         </p:spPr>
-        <p:style>
-          <a:lnRef idx="1">
-            <a:schemeClr val="accent1"/>
-          </a:lnRef>
-          <a:fillRef idx="3">
-            <a:schemeClr val="accent1"/>
-          </a:fillRef>
-          <a:effectRef idx="2">
-            <a:schemeClr val="accent1"/>
-          </a:effectRef>
-          <a:fontRef idx="minor">
-            <a:schemeClr val="lt1"/>
-          </a:fontRef>
-        </p:style>
         <p:txBody>
           <a:bodyPr rtlCol="0" anchor="ctr"/>
           <a:lstStyle/>
@@ -6062,27 +5908,13 @@
             <a:avLst/>
           </a:prstGeom>
           <a:solidFill>
-            <a:srgbClr val="24252C"/>
+            <a:srgbClr val="E0E0E0"/>
           </a:solidFill>
           <a:ln>
             <a:noFill/>
           </a:ln>
           <a:effectLst/>
         </p:spPr>
-        <p:style>
-          <a:lnRef idx="1">
-            <a:schemeClr val="accent1"/>
-          </a:lnRef>
-          <a:fillRef idx="3">
-            <a:schemeClr val="accent1"/>
-          </a:fillRef>
-          <a:effectRef idx="2">
-            <a:schemeClr val="accent1"/>
-          </a:effectRef>
-          <a:fontRef idx="minor">
-            <a:schemeClr val="lt1"/>
-          </a:fontRef>
-        </p:style>
         <p:txBody>
           <a:bodyPr rtlCol="0" anchor="ctr"/>
           <a:lstStyle/>
@@ -6106,27 +5938,13 @@
             <a:avLst/>
           </a:prstGeom>
           <a:solidFill>
-            <a:srgbClr val="24252C"/>
+            <a:srgbClr val="E0E0E0"/>
           </a:solidFill>
           <a:ln>
             <a:noFill/>
           </a:ln>
           <a:effectLst/>
         </p:spPr>
-        <p:style>
-          <a:lnRef idx="1">
-            <a:schemeClr val="accent1"/>
-          </a:lnRef>
-          <a:fillRef idx="3">
-            <a:schemeClr val="accent1"/>
-          </a:fillRef>
-          <a:effectRef idx="2">
-            <a:schemeClr val="accent1"/>
-          </a:effectRef>
-          <a:fontRef idx="minor">
-            <a:schemeClr val="lt1"/>
-          </a:fontRef>
-        </p:style>
         <p:txBody>
           <a:bodyPr rtlCol="0" anchor="ctr"/>
           <a:lstStyle/>
@@ -6161,9 +5979,9 @@
             <a:r>
               <a:rPr sz="850" b="1" i="0" spc="120">
                 <a:solidFill>
-                  <a:srgbClr val="5C5E6A"/>
-                </a:solidFill>
-                <a:latin typeface="Inter"/>
+                  <a:srgbClr val="9A9A9A"/>
+                </a:solidFill>
+                <a:latin typeface="Jost"/>
               </a:rPr>
               <a:t>MARKET-NATIVE DATA</a:t>
             </a:r>
@@ -6196,9 +6014,9 @@
             <a:r>
               <a:rPr sz="850" b="1" i="0" spc="120">
                 <a:solidFill>
-                  <a:srgbClr val="5C5E6A"/>
-                </a:solidFill>
-                <a:latin typeface="Inter"/>
+                  <a:srgbClr val="9A9A9A"/>
+                </a:solidFill>
+                <a:latin typeface="Jost"/>
               </a:rPr>
               <a:t>OFF-MARKET HUMAN CLAIMS</a:t>
             </a:r>
@@ -6231,9 +6049,9 @@
             <a:r>
               <a:rPr sz="850" b="1" i="0" spc="120">
                 <a:solidFill>
-                  <a:srgbClr val="5C5E6A"/>
-                </a:solidFill>
-                <a:latin typeface="Inter"/>
+                  <a:srgbClr val="9A9A9A"/>
+                </a:solidFill>
+                <a:latin typeface="Jost"/>
               </a:rPr>
               <a:t>SETTLED, EV-RANKED</a:t>
             </a:r>
@@ -6266,9 +6084,9 @@
             <a:r>
               <a:rPr sz="850" b="1" i="0" spc="120">
                 <a:solidFill>
-                  <a:srgbClr val="5C5E6A"/>
-                </a:solidFill>
-                <a:latin typeface="Inter"/>
+                  <a:srgbClr val="9A9A9A"/>
+                </a:solidFill>
+                <a:latin typeface="Jost"/>
               </a:rPr>
               <a:t>RAW / UNSCORED</a:t>
             </a:r>
@@ -6290,29 +6108,15 @@
             <a:avLst/>
           </a:prstGeom>
           <a:solidFill>
-            <a:srgbClr val="5C5E6A"/>
+            <a:srgbClr val="9A9A9A"/>
           </a:solidFill>
           <a:ln w="25400">
             <a:solidFill>
-              <a:srgbClr val="18191E"/>
+              <a:srgbClr val="FFFFFF"/>
             </a:solidFill>
           </a:ln>
           <a:effectLst/>
         </p:spPr>
-        <p:style>
-          <a:lnRef idx="1">
-            <a:schemeClr val="accent1"/>
-          </a:lnRef>
-          <a:fillRef idx="3">
-            <a:schemeClr val="accent1"/>
-          </a:fillRef>
-          <a:effectRef idx="2">
-            <a:schemeClr val="accent1"/>
-          </a:effectRef>
-          <a:fontRef idx="minor">
-            <a:schemeClr val="lt1"/>
-          </a:fontRef>
-        </p:style>
         <p:txBody>
           <a:bodyPr rtlCol="0" anchor="ctr"/>
           <a:lstStyle/>
@@ -6346,9 +6150,9 @@
             <a:r>
               <a:rPr sz="950" b="0" i="0">
                 <a:solidFill>
-                  <a:srgbClr val="8B8D98"/>
-                </a:solidFill>
-                <a:latin typeface="Inter"/>
+                  <a:srgbClr val="5A5A5A"/>
+                </a:solidFill>
+                <a:latin typeface="Jost"/>
               </a:rPr>
               <a:t>Dune · venue APIs</a:t>
             </a:r>
@@ -6370,29 +6174,15 @@
             <a:avLst/>
           </a:prstGeom>
           <a:solidFill>
-            <a:srgbClr val="5C5E6A"/>
+            <a:srgbClr val="9A9A9A"/>
           </a:solidFill>
           <a:ln w="25400">
             <a:solidFill>
-              <a:srgbClr val="18191E"/>
+              <a:srgbClr val="FFFFFF"/>
             </a:solidFill>
           </a:ln>
           <a:effectLst/>
         </p:spPr>
-        <p:style>
-          <a:lnRef idx="1">
-            <a:schemeClr val="accent1"/>
-          </a:lnRef>
-          <a:fillRef idx="3">
-            <a:schemeClr val="accent1"/>
-          </a:fillRef>
-          <a:effectRef idx="2">
-            <a:schemeClr val="accent1"/>
-          </a:effectRef>
-          <a:fontRef idx="minor">
-            <a:schemeClr val="lt1"/>
-          </a:fontRef>
-        </p:style>
         <p:txBody>
           <a:bodyPr rtlCol="0" anchor="ctr"/>
           <a:lstStyle/>
@@ -6426,9 +6216,9 @@
             <a:r>
               <a:rPr sz="950" b="0" i="0">
                 <a:solidFill>
-                  <a:srgbClr val="8B8D98"/>
-                </a:solidFill>
-                <a:latin typeface="Inter"/>
+                  <a:srgbClr val="5A5A5A"/>
+                </a:solidFill>
+                <a:latin typeface="Jost"/>
               </a:rPr>
               <a:t>Polymarket Analytics</a:t>
             </a:r>
@@ -6450,29 +6240,15 @@
             <a:avLst/>
           </a:prstGeom>
           <a:solidFill>
-            <a:srgbClr val="5C5E6A"/>
+            <a:srgbClr val="9A9A9A"/>
           </a:solidFill>
           <a:ln w="25400">
             <a:solidFill>
-              <a:srgbClr val="18191E"/>
+              <a:srgbClr val="FFFFFF"/>
             </a:solidFill>
           </a:ln>
           <a:effectLst/>
         </p:spPr>
-        <p:style>
-          <a:lnRef idx="1">
-            <a:schemeClr val="accent1"/>
-          </a:lnRef>
-          <a:fillRef idx="3">
-            <a:schemeClr val="accent1"/>
-          </a:fillRef>
-          <a:effectRef idx="2">
-            <a:schemeClr val="accent1"/>
-          </a:effectRef>
-          <a:fontRef idx="minor">
-            <a:schemeClr val="lt1"/>
-          </a:fontRef>
-        </p:style>
         <p:txBody>
           <a:bodyPr rtlCol="0" anchor="ctr"/>
           <a:lstStyle/>
@@ -6506,9 +6282,9 @@
             <a:r>
               <a:rPr sz="950" b="0" i="0">
                 <a:solidFill>
-                  <a:srgbClr val="8B8D98"/>
-                </a:solidFill>
-                <a:latin typeface="Inter"/>
+                  <a:srgbClr val="5A5A5A"/>
+                </a:solidFill>
+                <a:latin typeface="Jost"/>
               </a:rPr>
               <a:t>Polysights</a:t>
             </a:r>
@@ -6530,29 +6306,15 @@
             <a:avLst/>
           </a:prstGeom>
           <a:solidFill>
-            <a:srgbClr val="5C5E6A"/>
+            <a:srgbClr val="9A9A9A"/>
           </a:solidFill>
           <a:ln w="25400">
             <a:solidFill>
-              <a:srgbClr val="18191E"/>
+              <a:srgbClr val="FFFFFF"/>
             </a:solidFill>
           </a:ln>
           <a:effectLst/>
         </p:spPr>
-        <p:style>
-          <a:lnRef idx="1">
-            <a:schemeClr val="accent1"/>
-          </a:lnRef>
-          <a:fillRef idx="3">
-            <a:schemeClr val="accent1"/>
-          </a:fillRef>
-          <a:effectRef idx="2">
-            <a:schemeClr val="accent1"/>
-          </a:effectRef>
-          <a:fontRef idx="minor">
-            <a:schemeClr val="lt1"/>
-          </a:fontRef>
-        </p:style>
         <p:txBody>
           <a:bodyPr rtlCol="0" anchor="ctr"/>
           <a:lstStyle/>
@@ -6586,9 +6348,9 @@
             <a:r>
               <a:rPr sz="950" b="0" i="0">
                 <a:solidFill>
-                  <a:srgbClr val="8B8D98"/>
-                </a:solidFill>
-                <a:latin typeface="Inter"/>
+                  <a:srgbClr val="5A5A5A"/>
+                </a:solidFill>
+                <a:latin typeface="Jost"/>
               </a:rPr>
               <a:t>Verso</a:t>
             </a:r>
@@ -6610,29 +6372,15 @@
             <a:avLst/>
           </a:prstGeom>
           <a:solidFill>
-            <a:srgbClr val="5C5E6A"/>
+            <a:srgbClr val="9A9A9A"/>
           </a:solidFill>
           <a:ln w="25400">
             <a:solidFill>
-              <a:srgbClr val="18191E"/>
+              <a:srgbClr val="FFFFFF"/>
             </a:solidFill>
           </a:ln>
           <a:effectLst/>
         </p:spPr>
-        <p:style>
-          <a:lnRef idx="1">
-            <a:schemeClr val="accent1"/>
-          </a:lnRef>
-          <a:fillRef idx="3">
-            <a:schemeClr val="accent1"/>
-          </a:fillRef>
-          <a:effectRef idx="2">
-            <a:schemeClr val="accent1"/>
-          </a:effectRef>
-          <a:fontRef idx="minor">
-            <a:schemeClr val="lt1"/>
-          </a:fontRef>
-        </p:style>
         <p:txBody>
           <a:bodyPr rtlCol="0" anchor="ctr"/>
           <a:lstStyle/>
@@ -6666,9 +6414,9 @@
             <a:r>
               <a:rPr sz="950" b="0" i="0">
                 <a:solidFill>
-                  <a:srgbClr val="8B8D98"/>
-                </a:solidFill>
-                <a:latin typeface="Inter"/>
+                  <a:srgbClr val="5A5A5A"/>
+                </a:solidFill>
+                <a:latin typeface="Jost"/>
               </a:rPr>
               <a:t>LunarCrush</a:t>
             </a:r>
@@ -6690,29 +6438,15 @@
             <a:avLst/>
           </a:prstGeom>
           <a:solidFill>
-            <a:srgbClr val="5C5E6A"/>
+            <a:srgbClr val="9A9A9A"/>
           </a:solidFill>
           <a:ln w="25400">
             <a:solidFill>
-              <a:srgbClr val="18191E"/>
+              <a:srgbClr val="FFFFFF"/>
             </a:solidFill>
           </a:ln>
           <a:effectLst/>
         </p:spPr>
-        <p:style>
-          <a:lnRef idx="1">
-            <a:schemeClr val="accent1"/>
-          </a:lnRef>
-          <a:fillRef idx="3">
-            <a:schemeClr val="accent1"/>
-          </a:fillRef>
-          <a:effectRef idx="2">
-            <a:schemeClr val="accent1"/>
-          </a:effectRef>
-          <a:fontRef idx="minor">
-            <a:schemeClr val="lt1"/>
-          </a:fontRef>
-        </p:style>
         <p:txBody>
           <a:bodyPr rtlCol="0" anchor="ctr"/>
           <a:lstStyle/>
@@ -6746,9 +6480,9 @@
             <a:r>
               <a:rPr sz="950" b="0" i="0">
                 <a:solidFill>
-                  <a:srgbClr val="8B8D98"/>
-                </a:solidFill>
-                <a:latin typeface="Inter"/>
+                  <a:srgbClr val="5A5A5A"/>
+                </a:solidFill>
+                <a:latin typeface="Jost"/>
               </a:rPr>
               <a:t>Santiment</a:t>
             </a:r>
@@ -6770,29 +6504,15 @@
             <a:avLst/>
           </a:prstGeom>
           <a:solidFill>
-            <a:srgbClr val="5C5E6A"/>
+            <a:srgbClr val="9A9A9A"/>
           </a:solidFill>
           <a:ln w="25400">
             <a:solidFill>
-              <a:srgbClr val="18191E"/>
+              <a:srgbClr val="FFFFFF"/>
             </a:solidFill>
           </a:ln>
           <a:effectLst/>
         </p:spPr>
-        <p:style>
-          <a:lnRef idx="1">
-            <a:schemeClr val="accent1"/>
-          </a:lnRef>
-          <a:fillRef idx="3">
-            <a:schemeClr val="accent1"/>
-          </a:fillRef>
-          <a:effectRef idx="2">
-            <a:schemeClr val="accent1"/>
-          </a:effectRef>
-          <a:fontRef idx="minor">
-            <a:schemeClr val="lt1"/>
-          </a:fontRef>
-        </p:style>
         <p:txBody>
           <a:bodyPr rtlCol="0" anchor="ctr"/>
           <a:lstStyle/>
@@ -6826,9 +6546,9 @@
             <a:r>
               <a:rPr sz="950" b="0" i="0">
                 <a:solidFill>
-                  <a:srgbClr val="8B8D98"/>
-                </a:solidFill>
-                <a:latin typeface="Inter"/>
+                  <a:srgbClr val="5A5A5A"/>
+                </a:solidFill>
+                <a:latin typeface="Jost"/>
               </a:rPr>
               <a:t>Metaculus</a:t>
             </a:r>
@@ -6850,29 +6570,15 @@
             <a:avLst/>
           </a:prstGeom>
           <a:solidFill>
-            <a:srgbClr val="5C5E6A"/>
+            <a:srgbClr val="9A9A9A"/>
           </a:solidFill>
           <a:ln w="25400">
             <a:solidFill>
-              <a:srgbClr val="18191E"/>
+              <a:srgbClr val="FFFFFF"/>
             </a:solidFill>
           </a:ln>
           <a:effectLst/>
         </p:spPr>
-        <p:style>
-          <a:lnRef idx="1">
-            <a:schemeClr val="accent1"/>
-          </a:lnRef>
-          <a:fillRef idx="3">
-            <a:schemeClr val="accent1"/>
-          </a:fillRef>
-          <a:effectRef idx="2">
-            <a:schemeClr val="accent1"/>
-          </a:effectRef>
-          <a:fontRef idx="minor">
-            <a:schemeClr val="lt1"/>
-          </a:fontRef>
-        </p:style>
         <p:txBody>
           <a:bodyPr rtlCol="0" anchor="ctr"/>
           <a:lstStyle/>
@@ -6906,9 +6612,9 @@
             <a:r>
               <a:rPr sz="950" b="0" i="0">
                 <a:solidFill>
-                  <a:srgbClr val="8B8D98"/>
-                </a:solidFill>
-                <a:latin typeface="Inter"/>
+                  <a:srgbClr val="5A5A5A"/>
+                </a:solidFill>
+                <a:latin typeface="Jost"/>
               </a:rPr>
               <a:t>FutureSearch</a:t>
             </a:r>
@@ -6930,29 +6636,15 @@
             <a:avLst/>
           </a:prstGeom>
           <a:solidFill>
-            <a:srgbClr val="6366F1"/>
+            <a:srgbClr val="0D0D0D"/>
           </a:solidFill>
           <a:ln w="25400">
             <a:solidFill>
-              <a:srgbClr val="18191E"/>
+              <a:srgbClr val="FFFFFF"/>
             </a:solidFill>
           </a:ln>
           <a:effectLst/>
         </p:spPr>
-        <p:style>
-          <a:lnRef idx="1">
-            <a:schemeClr val="accent1"/>
-          </a:lnRef>
-          <a:fillRef idx="3">
-            <a:schemeClr val="accent1"/>
-          </a:fillRef>
-          <a:effectRef idx="2">
-            <a:schemeClr val="accent1"/>
-          </a:effectRef>
-          <a:fontRef idx="minor">
-            <a:schemeClr val="lt1"/>
-          </a:fontRef>
-        </p:style>
         <p:txBody>
           <a:bodyPr rtlCol="0" anchor="ctr"/>
           <a:lstStyle/>
@@ -6986,9 +6678,9 @@
             <a:r>
               <a:rPr sz="1050" b="1" i="0">
                 <a:solidFill>
-                  <a:srgbClr val="EBEBEF"/>
-                </a:solidFill>
-                <a:latin typeface="Inter"/>
+                  <a:srgbClr val="0D0D0D"/>
+                </a:solidFill>
+                <a:latin typeface="Jost"/>
               </a:rPr>
               <a:t>narve.ai</a:t>
             </a:r>
@@ -7028,27 +6720,13 @@
             <a:avLst/>
           </a:prstGeom>
           <a:solidFill>
-            <a:srgbClr val="0C0D10"/>
+            <a:srgbClr val="F5F5F5"/>
           </a:solidFill>
           <a:ln>
             <a:noFill/>
           </a:ln>
           <a:effectLst/>
         </p:spPr>
-        <p:style>
-          <a:lnRef idx="1">
-            <a:schemeClr val="accent1"/>
-          </a:lnRef>
-          <a:fillRef idx="3">
-            <a:schemeClr val="accent1"/>
-          </a:fillRef>
-          <a:effectRef idx="2">
-            <a:schemeClr val="accent1"/>
-          </a:effectRef>
-          <a:fontRef idx="minor">
-            <a:schemeClr val="lt1"/>
-          </a:fontRef>
-        </p:style>
         <p:txBody>
           <a:bodyPr rtlCol="0" anchor="ctr"/>
           <a:lstStyle/>
@@ -7080,11 +6758,11 @@
           <a:lstStyle/>
           <a:p>
             <a:r>
-              <a:rPr sz="1250" b="1" i="0" spc="220">
-                <a:solidFill>
-                  <a:srgbClr val="6366F1"/>
-                </a:solidFill>
-                <a:latin typeface="Inter"/>
+              <a:rPr sz="1100" b="0" i="0" spc="260">
+                <a:solidFill>
+                  <a:srgbClr val="9A9A9A"/>
+                </a:solidFill>
+                <a:latin typeface="Jost"/>
               </a:rPr>
               <a:t>EXECUTION IS THE TRACTION</a:t>
             </a:r>
@@ -7116,9 +6794,9 @@
             <a:r>
               <a:rPr sz="900" b="0" i="0">
                 <a:solidFill>
-                  <a:srgbClr val="5C5E6A"/>
-                </a:solidFill>
-                <a:latin typeface="Inter"/>
+                  <a:srgbClr val="9A9A9A"/>
+                </a:solidFill>
+                <a:latin typeface="Jost"/>
               </a:rPr>
               <a:t>narve.ai — confidential</a:t>
             </a:r>
@@ -7151,9 +6829,9 @@
             <a:r>
               <a:rPr sz="900" b="0" i="0">
                 <a:solidFill>
-                  <a:srgbClr val="5C5E6A"/>
-                </a:solidFill>
-                <a:latin typeface="Inter"/>
+                  <a:srgbClr val="9A9A9A"/>
+                </a:solidFill>
+                <a:latin typeface="Jost"/>
               </a:rPr>
               <a:t>12 / 14</a:t>
             </a:r>
@@ -7188,13 +6866,22 @@
               </a:lnSpc>
             </a:pPr>
             <a:r>
-              <a:rPr sz="2400" b="1" i="0" spc="-30">
-                <a:solidFill>
-                  <a:srgbClr val="EBEBEF"/>
-                </a:solidFill>
-                <a:latin typeface="Inter"/>
-              </a:rPr>
-              <a:t>Pre-launch by choice — the machine is built, tested, billable, and self-auditing.</a:t>
+              <a:rPr sz="2500" b="0" i="0" spc="-50">
+                <a:solidFill>
+                  <a:srgbClr val="0D0D0D"/>
+                </a:solidFill>
+                <a:latin typeface="Jost"/>
+              </a:rPr>
+              <a:t>Pre-launch by choice — the machine is built, tested, billable, and </a:t>
+            </a:r>
+            <a:r>
+              <a:rPr sz="2500" b="0" i="1" spc="-30">
+                <a:solidFill>
+                  <a:srgbClr val="0D0D0D"/>
+                </a:solidFill>
+                <a:latin typeface="Lora"/>
+              </a:rPr>
+              <a:t>self-auditing.</a:t>
             </a:r>
           </a:p>
         </p:txBody>
@@ -7216,29 +6903,15 @@
             </a:avLst>
           </a:prstGeom>
           <a:solidFill>
-            <a:srgbClr val="18191E"/>
+            <a:srgbClr val="FFFFFF"/>
           </a:solidFill>
           <a:ln w="9525">
             <a:solidFill>
-              <a:srgbClr val="24252C"/>
+              <a:srgbClr val="E0E0E0"/>
             </a:solidFill>
           </a:ln>
           <a:effectLst/>
         </p:spPr>
-        <p:style>
-          <a:lnRef idx="1">
-            <a:schemeClr val="accent1"/>
-          </a:lnRef>
-          <a:fillRef idx="3">
-            <a:schemeClr val="accent1"/>
-          </a:fillRef>
-          <a:effectRef idx="2">
-            <a:schemeClr val="accent1"/>
-          </a:effectRef>
-          <a:fontRef idx="minor">
-            <a:schemeClr val="lt1"/>
-          </a:fontRef>
-        </p:style>
         <p:txBody>
           <a:bodyPr rtlCol="0" anchor="ctr"/>
           <a:lstStyle/>
@@ -7255,8 +6928,8 @@
         </p:nvSpPr>
         <p:spPr>
           <a:xfrm>
-            <a:off x="886968" y="2267712"/>
-            <a:ext cx="2131237" cy="1463040"/>
+            <a:off x="905256" y="2286000"/>
+            <a:ext cx="2094661" cy="1426464"/>
           </a:xfrm>
           <a:prstGeom prst="rect">
             <a:avLst/>
@@ -7271,17 +6944,17 @@
           <a:p>
             <a:pPr>
               <a:spcAft>
-                <a:spcPts val="700"/>
+                <a:spcPts val="800"/>
               </a:spcAft>
             </a:pPr>
             <a:r>
-              <a:rPr sz="1150" b="1" i="0" spc="80">
-                <a:solidFill>
-                  <a:srgbClr val="5C5E6A"/>
-                </a:solidFill>
-                <a:latin typeface="Inter"/>
-              </a:rPr>
-              <a:t>Tests</a:t>
+              <a:rPr sz="950" b="0" i="0" spc="160">
+                <a:solidFill>
+                  <a:srgbClr val="9A9A9A"/>
+                </a:solidFill>
+                <a:latin typeface="Jost"/>
+              </a:rPr>
+              <a:t>TESTS</a:t>
             </a:r>
           </a:p>
           <a:p>
@@ -7291,11 +6964,11 @@
               </a:spcAft>
             </a:pPr>
             <a:r>
-              <a:rPr sz="2600" b="1" i="0" spc="-40">
-                <a:solidFill>
-                  <a:srgbClr val="EBEBEF"/>
-                </a:solidFill>
-                <a:latin typeface="Inter"/>
+              <a:rPr sz="2600" b="0" i="1" spc="-40">
+                <a:solidFill>
+                  <a:srgbClr val="0D0D0D"/>
+                </a:solidFill>
+                <a:latin typeface="Fraunces"/>
               </a:rPr>
               <a:t>211</a:t>
             </a:r>
@@ -7309,9 +6982,9 @@
             <a:r>
               <a:rPr sz="1050" b="0" i="0">
                 <a:solidFill>
-                  <a:srgbClr val="8B8D98"/>
-                </a:solidFill>
-                <a:latin typeface="Inter"/>
+                  <a:srgbClr val="5A5A5A"/>
+                </a:solidFill>
+                <a:latin typeface="Jost"/>
               </a:rPr>
               <a:t>test functions · 16 pytest files (repo-verified)</a:t>
             </a:r>
@@ -7321,52 +6994,6 @@
       <p:sp>
         <p:nvSpPr>
           <p:cNvPr id="9" name="Rounded Rectangle 8"/>
-          <p:cNvSpPr/>
-          <p:nvPr/>
-        </p:nvSpPr>
-        <p:spPr>
-          <a:xfrm>
-            <a:off x="685800" y="2304288"/>
-            <a:ext cx="27432" cy="256032"/>
-          </a:xfrm>
-          <a:prstGeom prst="roundRect">
-            <a:avLst>
-              <a:gd name="adj" fmla="val 50000"/>
-            </a:avLst>
-          </a:prstGeom>
-          <a:solidFill>
-            <a:srgbClr val="6366F1"/>
-          </a:solidFill>
-          <a:ln>
-            <a:noFill/>
-          </a:ln>
-          <a:effectLst/>
-        </p:spPr>
-        <p:style>
-          <a:lnRef idx="1">
-            <a:schemeClr val="accent1"/>
-          </a:lnRef>
-          <a:fillRef idx="3">
-            <a:schemeClr val="accent1"/>
-          </a:fillRef>
-          <a:effectRef idx="2">
-            <a:schemeClr val="accent1"/>
-          </a:effectRef>
-          <a:fontRef idx="minor">
-            <a:schemeClr val="lt1"/>
-          </a:fontRef>
-        </p:style>
-        <p:txBody>
-          <a:bodyPr rtlCol="0" anchor="ctr"/>
-          <a:lstStyle/>
-          <a:p>
-            <a:pPr algn="ctr"/>
-          </a:p>
-        </p:txBody>
-      </p:sp>
-      <p:sp>
-        <p:nvSpPr>
-          <p:cNvPr id="10" name="Rounded Rectangle 9"/>
           <p:cNvSpPr/>
           <p:nvPr/>
         </p:nvSpPr>
@@ -7381,29 +7008,15 @@
             </a:avLst>
           </a:prstGeom>
           <a:solidFill>
-            <a:srgbClr val="18191E"/>
+            <a:srgbClr val="FFFFFF"/>
           </a:solidFill>
           <a:ln w="9525">
             <a:solidFill>
-              <a:srgbClr val="24252C"/>
+              <a:srgbClr val="E0E0E0"/>
             </a:solidFill>
           </a:ln>
           <a:effectLst/>
         </p:spPr>
-        <p:style>
-          <a:lnRef idx="1">
-            <a:schemeClr val="accent1"/>
-          </a:lnRef>
-          <a:fillRef idx="3">
-            <a:schemeClr val="accent1"/>
-          </a:fillRef>
-          <a:effectRef idx="2">
-            <a:schemeClr val="accent1"/>
-          </a:effectRef>
-          <a:fontRef idx="minor">
-            <a:schemeClr val="lt1"/>
-          </a:fontRef>
-        </p:style>
         <p:txBody>
           <a:bodyPr rtlCol="0" anchor="ctr"/>
           <a:lstStyle/>
@@ -7414,14 +7027,14 @@
       </p:sp>
       <p:sp>
         <p:nvSpPr>
-          <p:cNvPr id="11" name="TextBox 10"/>
+          <p:cNvPr id="10" name="TextBox 9"/>
           <p:cNvSpPr txBox="1"/>
           <p:nvPr/>
         </p:nvSpPr>
         <p:spPr>
           <a:xfrm>
-            <a:off x="3649141" y="2267712"/>
-            <a:ext cx="2131237" cy="1463040"/>
+            <a:off x="3667429" y="2286000"/>
+            <a:ext cx="2094661" cy="1426464"/>
           </a:xfrm>
           <a:prstGeom prst="rect">
             <a:avLst/>
@@ -7436,17 +7049,17 @@
           <a:p>
             <a:pPr>
               <a:spcAft>
-                <a:spcPts val="700"/>
+                <a:spcPts val="800"/>
               </a:spcAft>
             </a:pPr>
             <a:r>
-              <a:rPr sz="1150" b="1" i="0" spc="80">
-                <a:solidFill>
-                  <a:srgbClr val="5C5E6A"/>
-                </a:solidFill>
-                <a:latin typeface="Inter"/>
-              </a:rPr>
-              <a:t>Dashboard SKUs</a:t>
+              <a:rPr sz="950" b="0" i="0" spc="160">
+                <a:solidFill>
+                  <a:srgbClr val="9A9A9A"/>
+                </a:solidFill>
+                <a:latin typeface="Jost"/>
+              </a:rPr>
+              <a:t>DASHBOARD SKUS</a:t>
             </a:r>
           </a:p>
           <a:p>
@@ -7456,11 +7069,11 @@
               </a:spcAft>
             </a:pPr>
             <a:r>
-              <a:rPr sz="2600" b="1" i="0" spc="-40">
-                <a:solidFill>
-                  <a:srgbClr val="EBEBEF"/>
-                </a:solidFill>
-                <a:latin typeface="Inter"/>
+              <a:rPr sz="2600" b="0" i="1" spc="-40">
+                <a:solidFill>
+                  <a:srgbClr val="0D0D0D"/>
+                </a:solidFill>
+                <a:latin typeface="Fraunces"/>
               </a:rPr>
               <a:t>15</a:t>
             </a:r>
@@ -7474,9 +7087,9 @@
             <a:r>
               <a:rPr sz="1050" b="0" i="0">
                 <a:solidFill>
-                  <a:srgbClr val="8B8D98"/>
-                </a:solidFill>
-                <a:latin typeface="Inter"/>
+                  <a:srgbClr val="5A5A5A"/>
+                </a:solidFill>
+                <a:latin typeface="Jost"/>
               </a:rPr>
               <a:t>wired into one auth + billing gateway</a:t>
             </a:r>
@@ -7485,53 +7098,7 @@
       </p:sp>
       <p:sp>
         <p:nvSpPr>
-          <p:cNvPr id="12" name="Rounded Rectangle 11"/>
-          <p:cNvSpPr/>
-          <p:nvPr/>
-        </p:nvSpPr>
-        <p:spPr>
-          <a:xfrm>
-            <a:off x="3447973" y="2304288"/>
-            <a:ext cx="27432" cy="256032"/>
-          </a:xfrm>
-          <a:prstGeom prst="roundRect">
-            <a:avLst>
-              <a:gd name="adj" fmla="val 50000"/>
-            </a:avLst>
-          </a:prstGeom>
-          <a:solidFill>
-            <a:srgbClr val="059669"/>
-          </a:solidFill>
-          <a:ln>
-            <a:noFill/>
-          </a:ln>
-          <a:effectLst/>
-        </p:spPr>
-        <p:style>
-          <a:lnRef idx="1">
-            <a:schemeClr val="accent1"/>
-          </a:lnRef>
-          <a:fillRef idx="3">
-            <a:schemeClr val="accent1"/>
-          </a:fillRef>
-          <a:effectRef idx="2">
-            <a:schemeClr val="accent1"/>
-          </a:effectRef>
-          <a:fontRef idx="minor">
-            <a:schemeClr val="lt1"/>
-          </a:fontRef>
-        </p:style>
-        <p:txBody>
-          <a:bodyPr rtlCol="0" anchor="ctr"/>
-          <a:lstStyle/>
-          <a:p>
-            <a:pPr algn="ctr"/>
-          </a:p>
-        </p:txBody>
-      </p:sp>
-      <p:sp>
-        <p:nvSpPr>
-          <p:cNvPr id="13" name="Rounded Rectangle 12"/>
+          <p:cNvPr id="11" name="Rounded Rectangle 10"/>
           <p:cNvSpPr/>
           <p:nvPr/>
         </p:nvSpPr>
@@ -7546,29 +7113,15 @@
             </a:avLst>
           </a:prstGeom>
           <a:solidFill>
-            <a:srgbClr val="18191E"/>
+            <a:srgbClr val="FFFFFF"/>
           </a:solidFill>
           <a:ln w="9525">
             <a:solidFill>
-              <a:srgbClr val="24252C"/>
+              <a:srgbClr val="E0E0E0"/>
             </a:solidFill>
           </a:ln>
           <a:effectLst/>
         </p:spPr>
-        <p:style>
-          <a:lnRef idx="1">
-            <a:schemeClr val="accent1"/>
-          </a:lnRef>
-          <a:fillRef idx="3">
-            <a:schemeClr val="accent1"/>
-          </a:fillRef>
-          <a:effectRef idx="2">
-            <a:schemeClr val="accent1"/>
-          </a:effectRef>
-          <a:fontRef idx="minor">
-            <a:schemeClr val="lt1"/>
-          </a:fontRef>
-        </p:style>
         <p:txBody>
           <a:bodyPr rtlCol="0" anchor="ctr"/>
           <a:lstStyle/>
@@ -7579,14 +7132,14 @@
       </p:sp>
       <p:sp>
         <p:nvSpPr>
-          <p:cNvPr id="14" name="TextBox 13"/>
+          <p:cNvPr id="12" name="TextBox 11"/>
           <p:cNvSpPr txBox="1"/>
           <p:nvPr/>
         </p:nvSpPr>
         <p:spPr>
           <a:xfrm>
-            <a:off x="6411314" y="2267712"/>
-            <a:ext cx="2131237" cy="1463040"/>
+            <a:off x="6429602" y="2286000"/>
+            <a:ext cx="2094661" cy="1426464"/>
           </a:xfrm>
           <a:prstGeom prst="rect">
             <a:avLst/>
@@ -7601,17 +7154,17 @@
           <a:p>
             <a:pPr>
               <a:spcAft>
-                <a:spcPts val="700"/>
+                <a:spcPts val="800"/>
               </a:spcAft>
             </a:pPr>
             <a:r>
-              <a:rPr sz="1150" b="1" i="0" spc="80">
-                <a:solidFill>
-                  <a:srgbClr val="5C5E6A"/>
-                </a:solidFill>
-                <a:latin typeface="Inter"/>
-              </a:rPr>
-              <a:t>Trading bots</a:t>
+              <a:rPr sz="950" b="0" i="0" spc="160">
+                <a:solidFill>
+                  <a:srgbClr val="9A9A9A"/>
+                </a:solidFill>
+                <a:latin typeface="Jost"/>
+              </a:rPr>
+              <a:t>TRADING BOTS</a:t>
             </a:r>
           </a:p>
           <a:p>
@@ -7621,11 +7174,11 @@
               </a:spcAft>
             </a:pPr>
             <a:r>
-              <a:rPr sz="2600" b="1" i="0" spc="-40">
-                <a:solidFill>
-                  <a:srgbClr val="EBEBEF"/>
-                </a:solidFill>
-                <a:latin typeface="Inter"/>
+              <a:rPr sz="2600" b="0" i="1" spc="-40">
+                <a:solidFill>
+                  <a:srgbClr val="0D0D0D"/>
+                </a:solidFill>
+                <a:latin typeface="Fraunces"/>
               </a:rPr>
               <a:t>2</a:t>
             </a:r>
@@ -7639,9 +7192,9 @@
             <a:r>
               <a:rPr sz="1050" b="0" i="0">
                 <a:solidFill>
-                  <a:srgbClr val="8B8D98"/>
-                </a:solidFill>
-                <a:latin typeface="Inter"/>
+                  <a:srgbClr val="5A5A5A"/>
+                </a:solidFill>
+                <a:latin typeface="Jost"/>
               </a:rPr>
               <a:t>headless Polymarket bots — non-storefront IP</a:t>
             </a:r>
@@ -7650,53 +7203,7 @@
       </p:sp>
       <p:sp>
         <p:nvSpPr>
-          <p:cNvPr id="15" name="Rounded Rectangle 14"/>
-          <p:cNvSpPr/>
-          <p:nvPr/>
-        </p:nvSpPr>
-        <p:spPr>
-          <a:xfrm>
-            <a:off x="6210146" y="2304288"/>
-            <a:ext cx="27432" cy="256032"/>
-          </a:xfrm>
-          <a:prstGeom prst="roundRect">
-            <a:avLst>
-              <a:gd name="adj" fmla="val 50000"/>
-            </a:avLst>
-          </a:prstGeom>
-          <a:solidFill>
-            <a:srgbClr val="D97706"/>
-          </a:solidFill>
-          <a:ln>
-            <a:noFill/>
-          </a:ln>
-          <a:effectLst/>
-        </p:spPr>
-        <p:style>
-          <a:lnRef idx="1">
-            <a:schemeClr val="accent1"/>
-          </a:lnRef>
-          <a:fillRef idx="3">
-            <a:schemeClr val="accent1"/>
-          </a:fillRef>
-          <a:effectRef idx="2">
-            <a:schemeClr val="accent1"/>
-          </a:effectRef>
-          <a:fontRef idx="minor">
-            <a:schemeClr val="lt1"/>
-          </a:fontRef>
-        </p:style>
-        <p:txBody>
-          <a:bodyPr rtlCol="0" anchor="ctr"/>
-          <a:lstStyle/>
-          <a:p>
-            <a:pPr algn="ctr"/>
-          </a:p>
-        </p:txBody>
-      </p:sp>
-      <p:sp>
-        <p:nvSpPr>
-          <p:cNvPr id="16" name="Rounded Rectangle 15"/>
+          <p:cNvPr id="13" name="Rounded Rectangle 12"/>
           <p:cNvSpPr/>
           <p:nvPr/>
         </p:nvSpPr>
@@ -7711,29 +7218,15 @@
             </a:avLst>
           </a:prstGeom>
           <a:solidFill>
-            <a:srgbClr val="18191E"/>
+            <a:srgbClr val="FFFFFF"/>
           </a:solidFill>
           <a:ln w="9525">
             <a:solidFill>
-              <a:srgbClr val="24252C"/>
+              <a:srgbClr val="E0E0E0"/>
             </a:solidFill>
           </a:ln>
           <a:effectLst/>
         </p:spPr>
-        <p:style>
-          <a:lnRef idx="1">
-            <a:schemeClr val="accent1"/>
-          </a:lnRef>
-          <a:fillRef idx="3">
-            <a:schemeClr val="accent1"/>
-          </a:fillRef>
-          <a:effectRef idx="2">
-            <a:schemeClr val="accent1"/>
-          </a:effectRef>
-          <a:fontRef idx="minor">
-            <a:schemeClr val="lt1"/>
-          </a:fontRef>
-        </p:style>
         <p:txBody>
           <a:bodyPr rtlCol="0" anchor="ctr"/>
           <a:lstStyle/>
@@ -7744,14 +7237,14 @@
       </p:sp>
       <p:sp>
         <p:nvSpPr>
-          <p:cNvPr id="17" name="TextBox 16"/>
+          <p:cNvPr id="14" name="TextBox 13"/>
           <p:cNvSpPr txBox="1"/>
           <p:nvPr/>
         </p:nvSpPr>
         <p:spPr>
           <a:xfrm>
-            <a:off x="9173487" y="2267712"/>
-            <a:ext cx="2131237" cy="1463040"/>
+            <a:off x="9191775" y="2286000"/>
+            <a:ext cx="2094661" cy="1426464"/>
           </a:xfrm>
           <a:prstGeom prst="rect">
             <a:avLst/>
@@ -7766,17 +7259,17 @@
           <a:p>
             <a:pPr>
               <a:spcAft>
-                <a:spcPts val="700"/>
+                <a:spcPts val="800"/>
               </a:spcAft>
             </a:pPr>
             <a:r>
-              <a:rPr sz="1150" b="1" i="0" spc="80">
-                <a:solidFill>
-                  <a:srgbClr val="5C5E6A"/>
-                </a:solidFill>
-                <a:latin typeface="Inter"/>
-              </a:rPr>
-              <a:t>Quant models</a:t>
+              <a:rPr sz="950" b="0" i="0" spc="160">
+                <a:solidFill>
+                  <a:srgbClr val="9A9A9A"/>
+                </a:solidFill>
+                <a:latin typeface="Jost"/>
+              </a:rPr>
+              <a:t>QUANT MODELS</a:t>
             </a:r>
           </a:p>
           <a:p>
@@ -7786,11 +7279,11 @@
               </a:spcAft>
             </a:pPr>
             <a:r>
-              <a:rPr sz="2600" b="1" i="0" spc="-40">
-                <a:solidFill>
-                  <a:srgbClr val="EBEBEF"/>
-                </a:solidFill>
-                <a:latin typeface="Inter"/>
+              <a:rPr sz="2600" b="0" i="1" spc="-40">
+                <a:solidFill>
+                  <a:srgbClr val="0D0D0D"/>
+                </a:solidFill>
+                <a:latin typeface="Fraunces"/>
               </a:rPr>
               <a:t>20</a:t>
             </a:r>
@@ -7804,9 +7297,9 @@
             <a:r>
               <a:rPr sz="1050" b="0" i="0">
                 <a:solidFill>
-                  <a:srgbClr val="8B8D98"/>
-                </a:solidFill>
-                <a:latin typeface="Inter"/>
+                  <a:srgbClr val="5A5A5A"/>
+                </a:solidFill>
+                <a:latin typeface="Jost"/>
               </a:rPr>
               <a:t>walk-forward, null-benchmarked, after-cost</a:t>
             </a:r>
@@ -7815,53 +7308,7 @@
       </p:sp>
       <p:sp>
         <p:nvSpPr>
-          <p:cNvPr id="18" name="Rounded Rectangle 17"/>
-          <p:cNvSpPr/>
-          <p:nvPr/>
-        </p:nvSpPr>
-        <p:spPr>
-          <a:xfrm>
-            <a:off x="8972319" y="2304288"/>
-            <a:ext cx="27432" cy="256032"/>
-          </a:xfrm>
-          <a:prstGeom prst="roundRect">
-            <a:avLst>
-              <a:gd name="adj" fmla="val 50000"/>
-            </a:avLst>
-          </a:prstGeom>
-          <a:solidFill>
-            <a:srgbClr val="F43F5E"/>
-          </a:solidFill>
-          <a:ln>
-            <a:noFill/>
-          </a:ln>
-          <a:effectLst/>
-        </p:spPr>
-        <p:style>
-          <a:lnRef idx="1">
-            <a:schemeClr val="accent1"/>
-          </a:lnRef>
-          <a:fillRef idx="3">
-            <a:schemeClr val="accent1"/>
-          </a:fillRef>
-          <a:effectRef idx="2">
-            <a:schemeClr val="accent1"/>
-          </a:effectRef>
-          <a:fontRef idx="minor">
-            <a:schemeClr val="lt1"/>
-          </a:fontRef>
-        </p:style>
-        <p:txBody>
-          <a:bodyPr rtlCol="0" anchor="ctr"/>
-          <a:lstStyle/>
-          <a:p>
-            <a:pPr algn="ctr"/>
-          </a:p>
-        </p:txBody>
-      </p:sp>
-      <p:sp>
-        <p:nvSpPr>
-          <p:cNvPr id="19" name="Rounded Rectangle 18"/>
+          <p:cNvPr id="15" name="Rounded Rectangle 14"/>
           <p:cNvSpPr/>
           <p:nvPr/>
         </p:nvSpPr>
@@ -7876,29 +7323,15 @@
             </a:avLst>
           </a:prstGeom>
           <a:solidFill>
-            <a:srgbClr val="1F2027"/>
+            <a:srgbClr val="FFFFFF"/>
           </a:solidFill>
           <a:ln w="9525">
             <a:solidFill>
-              <a:srgbClr val="24252C"/>
+              <a:srgbClr val="E0E0E0"/>
             </a:solidFill>
           </a:ln>
           <a:effectLst/>
         </p:spPr>
-        <p:style>
-          <a:lnRef idx="1">
-            <a:schemeClr val="accent1"/>
-          </a:lnRef>
-          <a:fillRef idx="3">
-            <a:schemeClr val="accent1"/>
-          </a:fillRef>
-          <a:effectRef idx="2">
-            <a:schemeClr val="accent1"/>
-          </a:effectRef>
-          <a:fontRef idx="minor">
-            <a:schemeClr val="lt1"/>
-          </a:fontRef>
-        </p:style>
         <p:txBody>
           <a:bodyPr rtlCol="0" anchor="ctr"/>
           <a:lstStyle/>
@@ -7909,7 +7342,7 @@
       </p:sp>
       <p:sp>
         <p:nvSpPr>
-          <p:cNvPr id="20" name="TextBox 19"/>
+          <p:cNvPr id="16" name="TextBox 15"/>
           <p:cNvSpPr txBox="1"/>
           <p:nvPr/>
         </p:nvSpPr>
@@ -7935,20 +7368,20 @@
               </a:lnSpc>
             </a:pPr>
             <a:r>
-              <a:rPr sz="1600" b="1" i="1">
-                <a:solidFill>
-                  <a:srgbClr val="EBEBEF"/>
-                </a:solidFill>
-                <a:latin typeface="Inter"/>
+              <a:rPr sz="1700" b="0" i="1">
+                <a:solidFill>
+                  <a:srgbClr val="0D0D0D"/>
+                </a:solidFill>
+                <a:latin typeface="Lora"/>
               </a:rPr>
               <a:t>“An edge smaller than costs is not an edge.”</a:t>
             </a:r>
             <a:r>
               <a:rPr sz="1200" b="0" i="0">
                 <a:solidFill>
-                  <a:srgbClr val="8B8D98"/>
-                </a:solidFill>
-                <a:latin typeface="Inter"/>
+                  <a:srgbClr val="5A5A5A"/>
+                </a:solidFill>
+                <a:latin typeface="Jost"/>
               </a:rPr>
               <a:t>   — the 20-model quant toolkit refuses to manufacture an edge, even in its own backtest.</a:t>
             </a:r>
@@ -7957,7 +7390,7 @@
       </p:sp>
       <p:sp>
         <p:nvSpPr>
-          <p:cNvPr id="21" name="TextBox 20"/>
+          <p:cNvPr id="17" name="TextBox 16"/>
           <p:cNvSpPr txBox="1"/>
           <p:nvPr/>
         </p:nvSpPr>
@@ -7986,29 +7419,29 @@
               </a:spcAft>
             </a:pPr>
             <a:r>
+              <a:rPr sz="1250" b="0" i="0">
+                <a:solidFill>
+                  <a:srgbClr val="B0B0B0"/>
+                </a:solidFill>
+                <a:latin typeface="Jost"/>
+              </a:rPr>
+              <a:t>—  </a:t>
+            </a:r>
+            <a:r>
               <a:rPr sz="1250" b="1" i="0">
                 <a:solidFill>
-                  <a:srgbClr val="6366F1"/>
-                </a:solidFill>
-                <a:latin typeface="Inter"/>
-              </a:rPr>
-              <a:t>—  </a:t>
-            </a:r>
-            <a:r>
-              <a:rPr sz="1250" b="1" i="0">
-                <a:solidFill>
-                  <a:srgbClr val="EBEBEF"/>
-                </a:solidFill>
-                <a:latin typeface="Inter"/>
+                  <a:srgbClr val="0D0D0D"/>
+                </a:solidFill>
+                <a:latin typeface="Jost"/>
               </a:rPr>
               <a:t>Gateway running: </a:t>
             </a:r>
             <a:r>
               <a:rPr sz="1250" b="0" i="0">
                 <a:solidFill>
-                  <a:srgbClr val="8B8D98"/>
-                </a:solidFill>
-                <a:latin typeface="Inter"/>
+                  <a:srgbClr val="5A5A5A"/>
+                </a:solidFill>
+                <a:latin typeface="Jost"/>
               </a:rPr>
               <a:t>SSO, Stripe checkout, WebSocket proxying, admin fleet ops across 15 SKUs. CI, Docker deploys, snapshot-before-deploy, macOS desktop build.</a:t>
             </a:r>
@@ -8023,29 +7456,29 @@
               </a:spcAft>
             </a:pPr>
             <a:r>
+              <a:rPr sz="1250" b="0" i="0">
+                <a:solidFill>
+                  <a:srgbClr val="B0B0B0"/>
+                </a:solidFill>
+                <a:latin typeface="Jost"/>
+              </a:rPr>
+              <a:t>—  </a:t>
+            </a:r>
+            <a:r>
               <a:rPr sz="1250" b="1" i="0">
                 <a:solidFill>
-                  <a:srgbClr val="6366F1"/>
-                </a:solidFill>
-                <a:latin typeface="Inter"/>
-              </a:rPr>
-              <a:t>—  </a:t>
-            </a:r>
-            <a:r>
-              <a:rPr sz="1250" b="1" i="0">
-                <a:solidFill>
-                  <a:srgbClr val="EBEBEF"/>
-                </a:solidFill>
-                <a:latin typeface="Inter"/>
+                  <a:srgbClr val="0D0D0D"/>
+                </a:solidFill>
+                <a:latin typeface="Jost"/>
               </a:rPr>
               <a:t>Self-proving by design: </a:t>
             </a:r>
             <a:r>
               <a:rPr sz="1250" b="0" i="0">
                 <a:solidFill>
-                  <a:srgbClr val="8B8D98"/>
-                </a:solidFill>
-                <a:latin typeface="Inter"/>
+                  <a:srgbClr val="5A5A5A"/>
+                </a:solidFill>
+                <a:latin typeface="Jost"/>
               </a:rPr>
               <a:t>every signal paper-traded and force-settled; public backtest harness (Sharpe, drawdown).</a:t>
             </a:r>
@@ -8085,27 +7518,13 @@
             <a:avLst/>
           </a:prstGeom>
           <a:solidFill>
-            <a:srgbClr val="0C0D10"/>
+            <a:srgbClr val="F5F5F5"/>
           </a:solidFill>
           <a:ln>
             <a:noFill/>
           </a:ln>
           <a:effectLst/>
         </p:spPr>
-        <p:style>
-          <a:lnRef idx="1">
-            <a:schemeClr val="accent1"/>
-          </a:lnRef>
-          <a:fillRef idx="3">
-            <a:schemeClr val="accent1"/>
-          </a:fillRef>
-          <a:effectRef idx="2">
-            <a:schemeClr val="accent1"/>
-          </a:effectRef>
-          <a:fontRef idx="minor">
-            <a:schemeClr val="lt1"/>
-          </a:fontRef>
-        </p:style>
         <p:txBody>
           <a:bodyPr rtlCol="0" anchor="ctr"/>
           <a:lstStyle/>
@@ -8137,11 +7556,11 @@
           <a:lstStyle/>
           <a:p>
             <a:r>
-              <a:rPr sz="1250" b="1" i="0" spc="220">
-                <a:solidFill>
-                  <a:srgbClr val="6366F1"/>
-                </a:solidFill>
-                <a:latin typeface="Inter"/>
+              <a:rPr sz="1100" b="0" i="0" spc="260">
+                <a:solidFill>
+                  <a:srgbClr val="9A9A9A"/>
+                </a:solidFill>
+                <a:latin typeface="Jost"/>
               </a:rPr>
               <a:t>ROADMAP</a:t>
             </a:r>
@@ -8173,9 +7592,9 @@
             <a:r>
               <a:rPr sz="900" b="0" i="0">
                 <a:solidFill>
-                  <a:srgbClr val="5C5E6A"/>
-                </a:solidFill>
-                <a:latin typeface="Inter"/>
+                  <a:srgbClr val="9A9A9A"/>
+                </a:solidFill>
+                <a:latin typeface="Jost"/>
               </a:rPr>
               <a:t>narve.ai — confidential</a:t>
             </a:r>
@@ -8208,9 +7627,9 @@
             <a:r>
               <a:rPr sz="900" b="0" i="0">
                 <a:solidFill>
-                  <a:srgbClr val="5C5E6A"/>
-                </a:solidFill>
-                <a:latin typeface="Inter"/>
+                  <a:srgbClr val="9A9A9A"/>
+                </a:solidFill>
+                <a:latin typeface="Jost"/>
               </a:rPr>
               <a:t>13 / 14</a:t>
             </a:r>
@@ -8245,13 +7664,22 @@
               </a:lnSpc>
             </a:pPr>
             <a:r>
-              <a:rPr sz="2900" b="1" i="0" spc="-30">
-                <a:solidFill>
-                  <a:srgbClr val="EBEBEF"/>
-                </a:solidFill>
-                <a:latin typeface="Inter"/>
-              </a:rPr>
-              <a:t>Launch, compound the ledger in public, then sell the feed.</a:t>
+              <a:rPr sz="3000" b="0" i="0" spc="-50">
+                <a:solidFill>
+                  <a:srgbClr val="0D0D0D"/>
+                </a:solidFill>
+                <a:latin typeface="Jost"/>
+              </a:rPr>
+              <a:t>Launch, compound the ledger in public, then </a:t>
+            </a:r>
+            <a:r>
+              <a:rPr sz="3000" b="0" i="1" spc="-30">
+                <a:solidFill>
+                  <a:srgbClr val="0D0D0D"/>
+                </a:solidFill>
+                <a:latin typeface="Lora"/>
+              </a:rPr>
+              <a:t>sell the feed.</a:t>
             </a:r>
           </a:p>
         </p:txBody>
@@ -8271,27 +7699,13 @@
             <a:avLst/>
           </a:prstGeom>
           <a:solidFill>
-            <a:srgbClr val="24252C"/>
+            <a:srgbClr val="E0E0E0"/>
           </a:solidFill>
           <a:ln>
             <a:noFill/>
           </a:ln>
           <a:effectLst/>
         </p:spPr>
-        <p:style>
-          <a:lnRef idx="1">
-            <a:schemeClr val="accent1"/>
-          </a:lnRef>
-          <a:fillRef idx="3">
-            <a:schemeClr val="accent1"/>
-          </a:fillRef>
-          <a:effectRef idx="2">
-            <a:schemeClr val="accent1"/>
-          </a:effectRef>
-          <a:fontRef idx="minor">
-            <a:schemeClr val="lt1"/>
-          </a:fontRef>
-        </p:style>
         <p:txBody>
           <a:bodyPr rtlCol="0" anchor="ctr"/>
           <a:lstStyle/>
@@ -8315,27 +7729,13 @@
             <a:avLst/>
           </a:prstGeom>
           <a:solidFill>
-            <a:srgbClr val="6366F1"/>
+            <a:srgbClr val="0D0D0D"/>
           </a:solidFill>
           <a:ln>
             <a:noFill/>
           </a:ln>
           <a:effectLst/>
         </p:spPr>
-        <p:style>
-          <a:lnRef idx="1">
-            <a:schemeClr val="accent1"/>
-          </a:lnRef>
-          <a:fillRef idx="3">
-            <a:schemeClr val="accent1"/>
-          </a:fillRef>
-          <a:effectRef idx="2">
-            <a:schemeClr val="accent1"/>
-          </a:effectRef>
-          <a:fontRef idx="minor">
-            <a:schemeClr val="lt1"/>
-          </a:fontRef>
-        </p:style>
         <p:txBody>
           <a:bodyPr rtlCol="0" anchor="ctr"/>
           <a:lstStyle/>
@@ -8361,29 +7761,15 @@
             </a:avLst>
           </a:prstGeom>
           <a:solidFill>
-            <a:srgbClr val="18191E"/>
+            <a:srgbClr val="FFFFFF"/>
           </a:solidFill>
           <a:ln w="9525">
             <a:solidFill>
-              <a:srgbClr val="24252C"/>
+              <a:srgbClr val="E0E0E0"/>
             </a:solidFill>
           </a:ln>
           <a:effectLst/>
         </p:spPr>
-        <p:style>
-          <a:lnRef idx="1">
-            <a:schemeClr val="accent1"/>
-          </a:lnRef>
-          <a:fillRef idx="3">
-            <a:schemeClr val="accent1"/>
-          </a:fillRef>
-          <a:effectRef idx="2">
-            <a:schemeClr val="accent1"/>
-          </a:effectRef>
-          <a:fontRef idx="minor">
-            <a:schemeClr val="lt1"/>
-          </a:fontRef>
-        </p:style>
         <p:txBody>
           <a:bodyPr rtlCol="0" anchor="ctr"/>
           <a:lstStyle/>
@@ -8422,9 +7808,9 @@
             <a:r>
               <a:rPr sz="950" b="1" i="0" spc="140">
                 <a:solidFill>
-                  <a:srgbClr val="6366F1"/>
-                </a:solidFill>
-                <a:latin typeface="Inter"/>
+                  <a:srgbClr val="0D0D0D"/>
+                </a:solidFill>
+                <a:latin typeface="Jost"/>
               </a:rPr>
               <a:t>PHASE 1 — LAUNCH</a:t>
             </a:r>
@@ -8438,9 +7824,9 @@
             <a:r>
               <a:rPr sz="1300" b="1" i="0">
                 <a:solidFill>
-                  <a:srgbClr val="EBEBEF"/>
-                </a:solidFill>
-                <a:latin typeface="Inter"/>
+                  <a:srgbClr val="0D0D0D"/>
+                </a:solidFill>
+                <a:latin typeface="Jost"/>
               </a:rPr>
               <a:t>Switch the machine on</a:t>
             </a:r>
@@ -8457,18 +7843,18 @@
             <a:r>
               <a:rPr sz="1050" b="1" i="0">
                 <a:solidFill>
-                  <a:srgbClr val="5C5E6A"/>
-                </a:solidFill>
-                <a:latin typeface="Inter"/>
+                  <a:srgbClr val="9A9A9A"/>
+                </a:solidFill>
+                <a:latin typeface="Jost"/>
               </a:rPr>
               <a:t>—  </a:t>
             </a:r>
             <a:r>
               <a:rPr sz="1050" b="0" i="0">
                 <a:solidFill>
-                  <a:srgbClr val="8B8D98"/>
-                </a:solidFill>
-                <a:latin typeface="Inter"/>
+                  <a:srgbClr val="5A5A5A"/>
+                </a:solidFill>
+                <a:latin typeface="Jost"/>
               </a:rPr>
               <a:t>Flip Stripe live (documented ~30-min checklist)</a:t>
             </a:r>
@@ -8485,18 +7871,18 @@
             <a:r>
               <a:rPr sz="1050" b="1" i="0">
                 <a:solidFill>
-                  <a:srgbClr val="5C5E6A"/>
-                </a:solidFill>
-                <a:latin typeface="Inter"/>
+                  <a:srgbClr val="9A9A9A"/>
+                </a:solidFill>
+                <a:latin typeface="Jost"/>
               </a:rPr>
               <a:t>—  </a:t>
             </a:r>
             <a:r>
               <a:rPr sz="1050" b="0" i="0">
                 <a:solidFill>
-                  <a:srgbClr val="8B8D98"/>
-                </a:solidFill>
-                <a:latin typeface="Inter"/>
+                  <a:srgbClr val="5A5A5A"/>
+                </a:solidFill>
+                <a:latin typeface="Jost"/>
               </a:rPr>
               <a:t>Unhide truth.narve.ai in the storefront</a:t>
             </a:r>
@@ -8513,18 +7899,18 @@
             <a:r>
               <a:rPr sz="1050" b="1" i="0">
                 <a:solidFill>
-                  <a:srgbClr val="5C5E6A"/>
-                </a:solidFill>
-                <a:latin typeface="Inter"/>
+                  <a:srgbClr val="9A9A9A"/>
+                </a:solidFill>
+                <a:latin typeface="Jost"/>
               </a:rPr>
               <a:t>—  </a:t>
             </a:r>
             <a:r>
               <a:rPr sz="1050" b="0" i="0">
                 <a:solidFill>
-                  <a:srgbClr val="8B8D98"/>
-                </a:solidFill>
-                <a:latin typeface="Inter"/>
+                  <a:srgbClr val="5A5A5A"/>
+                </a:solidFill>
+                <a:latin typeface="Jost"/>
               </a:rPr>
               <a:t>Publish the public credibility leaderboard</a:t>
             </a:r>
@@ -8546,27 +7932,13 @@
             <a:avLst/>
           </a:prstGeom>
           <a:solidFill>
-            <a:srgbClr val="059669"/>
+            <a:srgbClr val="0D0D0D"/>
           </a:solidFill>
           <a:ln>
             <a:noFill/>
           </a:ln>
           <a:effectLst/>
         </p:spPr>
-        <p:style>
-          <a:lnRef idx="1">
-            <a:schemeClr val="accent1"/>
-          </a:lnRef>
-          <a:fillRef idx="3">
-            <a:schemeClr val="accent1"/>
-          </a:fillRef>
-          <a:effectRef idx="2">
-            <a:schemeClr val="accent1"/>
-          </a:effectRef>
-          <a:fontRef idx="minor">
-            <a:schemeClr val="lt1"/>
-          </a:fontRef>
-        </p:style>
         <p:txBody>
           <a:bodyPr rtlCol="0" anchor="ctr"/>
           <a:lstStyle/>
@@ -8592,29 +7964,15 @@
             </a:avLst>
           </a:prstGeom>
           <a:solidFill>
-            <a:srgbClr val="18191E"/>
+            <a:srgbClr val="FFFFFF"/>
           </a:solidFill>
           <a:ln w="9525">
             <a:solidFill>
-              <a:srgbClr val="24252C"/>
+              <a:srgbClr val="E0E0E0"/>
             </a:solidFill>
           </a:ln>
           <a:effectLst/>
         </p:spPr>
-        <p:style>
-          <a:lnRef idx="1">
-            <a:schemeClr val="accent1"/>
-          </a:lnRef>
-          <a:fillRef idx="3">
-            <a:schemeClr val="accent1"/>
-          </a:fillRef>
-          <a:effectRef idx="2">
-            <a:schemeClr val="accent1"/>
-          </a:effectRef>
-          <a:fontRef idx="minor">
-            <a:schemeClr val="lt1"/>
-          </a:fontRef>
-        </p:style>
         <p:txBody>
           <a:bodyPr rtlCol="0" anchor="ctr"/>
           <a:lstStyle/>
@@ -8653,9 +8011,9 @@
             <a:r>
               <a:rPr sz="950" b="1" i="0" spc="140">
                 <a:solidFill>
-                  <a:srgbClr val="059669"/>
-                </a:solidFill>
-                <a:latin typeface="Inter"/>
+                  <a:srgbClr val="0D0D0D"/>
+                </a:solidFill>
+                <a:latin typeface="Jost"/>
               </a:rPr>
               <a:t>PHASE 2 — COMPOUND</a:t>
             </a:r>
@@ -8669,9 +8027,9 @@
             <a:r>
               <a:rPr sz="1300" b="1" i="0">
                 <a:solidFill>
-                  <a:srgbClr val="EBEBEF"/>
-                </a:solidFill>
-                <a:latin typeface="Inter"/>
+                  <a:srgbClr val="0D0D0D"/>
+                </a:solidFill>
+                <a:latin typeface="Jost"/>
               </a:rPr>
               <a:t>Grow the ledger in public</a:t>
             </a:r>
@@ -8688,18 +8046,18 @@
             <a:r>
               <a:rPr sz="1050" b="1" i="0">
                 <a:solidFill>
-                  <a:srgbClr val="5C5E6A"/>
-                </a:solidFill>
-                <a:latin typeface="Inter"/>
+                  <a:srgbClr val="9A9A9A"/>
+                </a:solidFill>
+                <a:latin typeface="Jost"/>
               </a:rPr>
               <a:t>—  </a:t>
             </a:r>
             <a:r>
               <a:rPr sz="1050" b="0" i="0">
                 <a:solidFill>
-                  <a:srgbClr val="8B8D98"/>
-                </a:solidFill>
-                <a:latin typeface="Inter"/>
+                  <a:srgbClr val="5A5A5A"/>
+                </a:solidFill>
+                <a:latin typeface="Jost"/>
               </a:rPr>
               <a:t>SVG share cards + user calibration as growth loops</a:t>
             </a:r>
@@ -8716,18 +8074,18 @@
             <a:r>
               <a:rPr sz="1050" b="1" i="0">
                 <a:solidFill>
-                  <a:srgbClr val="5C5E6A"/>
-                </a:solidFill>
-                <a:latin typeface="Inter"/>
+                  <a:srgbClr val="9A9A9A"/>
+                </a:solidFill>
+                <a:latin typeface="Jost"/>
               </a:rPr>
               <a:t>—  </a:t>
             </a:r>
             <a:r>
               <a:rPr sz="1050" b="0" i="0">
                 <a:solidFill>
-                  <a:srgbClr val="8B8D98"/>
-                </a:solidFill>
-                <a:latin typeface="Inter"/>
+                  <a:srgbClr val="5A5A5A"/>
+                </a:solidFill>
+                <a:latin typeface="Jost"/>
               </a:rPr>
               <a:t>Widen sources; lift X API quota caps</a:t>
             </a:r>
@@ -8744,18 +8102,18 @@
             <a:r>
               <a:rPr sz="1050" b="1" i="0">
                 <a:solidFill>
-                  <a:srgbClr val="5C5E6A"/>
-                </a:solidFill>
-                <a:latin typeface="Inter"/>
+                  <a:srgbClr val="9A9A9A"/>
+                </a:solidFill>
+                <a:latin typeface="Jost"/>
               </a:rPr>
               <a:t>—  </a:t>
             </a:r>
             <a:r>
               <a:rPr sz="1050" b="0" i="0">
                 <a:solidFill>
-                  <a:srgbClr val="8B8D98"/>
-                </a:solidFill>
-                <a:latin typeface="Inter"/>
+                  <a:srgbClr val="5A5A5A"/>
+                </a:solidFill>
+                <a:latin typeface="Jost"/>
               </a:rPr>
               <a:t>Upgrade Jaccard matching to semantic</a:t>
             </a:r>
@@ -8777,27 +8135,13 @@
             <a:avLst/>
           </a:prstGeom>
           <a:solidFill>
-            <a:srgbClr val="D97706"/>
+            <a:srgbClr val="0D0D0D"/>
           </a:solidFill>
           <a:ln>
             <a:noFill/>
           </a:ln>
           <a:effectLst/>
         </p:spPr>
-        <p:style>
-          <a:lnRef idx="1">
-            <a:schemeClr val="accent1"/>
-          </a:lnRef>
-          <a:fillRef idx="3">
-            <a:schemeClr val="accent1"/>
-          </a:fillRef>
-          <a:effectRef idx="2">
-            <a:schemeClr val="accent1"/>
-          </a:effectRef>
-          <a:fontRef idx="minor">
-            <a:schemeClr val="lt1"/>
-          </a:fontRef>
-        </p:style>
         <p:txBody>
           <a:bodyPr rtlCol="0" anchor="ctr"/>
           <a:lstStyle/>
@@ -8823,29 +8167,15 @@
             </a:avLst>
           </a:prstGeom>
           <a:solidFill>
-            <a:srgbClr val="18191E"/>
+            <a:srgbClr val="FFFFFF"/>
           </a:solidFill>
           <a:ln w="9525">
             <a:solidFill>
-              <a:srgbClr val="24252C"/>
+              <a:srgbClr val="E0E0E0"/>
             </a:solidFill>
           </a:ln>
           <a:effectLst/>
         </p:spPr>
-        <p:style>
-          <a:lnRef idx="1">
-            <a:schemeClr val="accent1"/>
-          </a:lnRef>
-          <a:fillRef idx="3">
-            <a:schemeClr val="accent1"/>
-          </a:fillRef>
-          <a:effectRef idx="2">
-            <a:schemeClr val="accent1"/>
-          </a:effectRef>
-          <a:fontRef idx="minor">
-            <a:schemeClr val="lt1"/>
-          </a:fontRef>
-        </p:style>
         <p:txBody>
           <a:bodyPr rtlCol="0" anchor="ctr"/>
           <a:lstStyle/>
@@ -8884,9 +8214,9 @@
             <a:r>
               <a:rPr sz="950" b="1" i="0" spc="140">
                 <a:solidFill>
-                  <a:srgbClr val="D97706"/>
-                </a:solidFill>
-                <a:latin typeface="Inter"/>
+                  <a:srgbClr val="0D0D0D"/>
+                </a:solidFill>
+                <a:latin typeface="Jost"/>
               </a:rPr>
               <a:t>PHASE 3 — MONETIZE DATA</a:t>
             </a:r>
@@ -8900,9 +8230,9 @@
             <a:r>
               <a:rPr sz="1300" b="1" i="0">
                 <a:solidFill>
-                  <a:srgbClr val="EBEBEF"/>
-                </a:solidFill>
-                <a:latin typeface="Inter"/>
+                  <a:srgbClr val="0D0D0D"/>
+                </a:solidFill>
+                <a:latin typeface="Jost"/>
               </a:rPr>
               <a:t>Sell the feed</a:t>
             </a:r>
@@ -8919,18 +8249,18 @@
             <a:r>
               <a:rPr sz="1050" b="1" i="0">
                 <a:solidFill>
-                  <a:srgbClr val="5C5E6A"/>
-                </a:solidFill>
-                <a:latin typeface="Inter"/>
+                  <a:srgbClr val="9A9A9A"/>
+                </a:solidFill>
+                <a:latin typeface="Jost"/>
               </a:rPr>
               <a:t>—  </a:t>
             </a:r>
             <a:r>
               <a:rPr sz="1050" b="0" i="0">
                 <a:solidFill>
-                  <a:srgbClr val="8B8D98"/>
-                </a:solidFill>
-                <a:latin typeface="Inter"/>
+                  <a:srgbClr val="5A5A5A"/>
+                </a:solidFill>
+                <a:latin typeface="Jost"/>
               </a:rPr>
               <a:t>Quant API tiers on the existing /api/v1</a:t>
             </a:r>
@@ -8947,18 +8277,18 @@
             <a:r>
               <a:rPr sz="1050" b="1" i="0">
                 <a:solidFill>
-                  <a:srgbClr val="5C5E6A"/>
-                </a:solidFill>
-                <a:latin typeface="Inter"/>
+                  <a:srgbClr val="9A9A9A"/>
+                </a:solidFill>
+                <a:latin typeface="Jost"/>
               </a:rPr>
               <a:t>—  </a:t>
             </a:r>
             <a:r>
               <a:rPr sz="1050" b="0" i="0">
                 <a:solidFill>
-                  <a:srgbClr val="8B8D98"/>
-                </a:solidFill>
-                <a:latin typeface="Inter"/>
+                  <a:srgbClr val="5A5A5A"/>
+                </a:solidFill>
+                <a:latin typeface="Jost"/>
               </a:rPr>
               <a:t>Institutional feed pilot — the ICE playbook, one tier down</a:t>
             </a:r>
@@ -8975,18 +8305,18 @@
             <a:r>
               <a:rPr sz="1050" b="1" i="0">
                 <a:solidFill>
-                  <a:srgbClr val="5C5E6A"/>
-                </a:solidFill>
-                <a:latin typeface="Inter"/>
+                  <a:srgbClr val="9A9A9A"/>
+                </a:solidFill>
+                <a:latin typeface="Jost"/>
               </a:rPr>
               <a:t>—  </a:t>
             </a:r>
             <a:r>
               <a:rPr sz="1050" b="0" i="0">
                 <a:solidFill>
-                  <a:srgbClr val="8B8D98"/>
-                </a:solidFill>
-                <a:latin typeface="Inter"/>
+                  <a:srgbClr val="5A5A5A"/>
+                </a:solidFill>
+                <a:latin typeface="Jost"/>
               </a:rPr>
               <a:t>Unpark bench dashboards behind demonstrated demand</a:t>
             </a:r>
@@ -9019,9 +8349,9 @@
             <a:r>
               <a:rPr sz="1150" b="1" i="0">
                 <a:solidFill>
-                  <a:srgbClr val="5C5E6A"/>
-                </a:solidFill>
-                <a:latin typeface="Inter"/>
+                  <a:srgbClr val="9A9A9A"/>
+                </a:solidFill>
+                <a:latin typeface="Jost"/>
               </a:rPr>
               <a:t>North-star KPI until scale: ledger depth — settled, timestamped predictions per week. The moat grows every 5 minutes, regardless of phase.</a:t>
             </a:r>
@@ -9061,27 +8391,13 @@
             <a:avLst/>
           </a:prstGeom>
           <a:solidFill>
-            <a:srgbClr val="0C0D10"/>
+            <a:srgbClr val="F5F5F5"/>
           </a:solidFill>
           <a:ln>
             <a:noFill/>
           </a:ln>
           <a:effectLst/>
         </p:spPr>
-        <p:style>
-          <a:lnRef idx="1">
-            <a:schemeClr val="accent1"/>
-          </a:lnRef>
-          <a:fillRef idx="3">
-            <a:schemeClr val="accent1"/>
-          </a:fillRef>
-          <a:effectRef idx="2">
-            <a:schemeClr val="accent1"/>
-          </a:effectRef>
-          <a:fontRef idx="minor">
-            <a:schemeClr val="lt1"/>
-          </a:fontRef>
-        </p:style>
         <p:txBody>
           <a:bodyPr rtlCol="0" anchor="ctr"/>
           <a:lstStyle/>
@@ -9113,11 +8429,11 @@
           <a:lstStyle/>
           <a:p>
             <a:r>
-              <a:rPr sz="1250" b="1" i="0" spc="220">
-                <a:solidFill>
-                  <a:srgbClr val="6366F1"/>
-                </a:solidFill>
-                <a:latin typeface="Inter"/>
+              <a:rPr sz="1100" b="0" i="0" spc="260">
+                <a:solidFill>
+                  <a:srgbClr val="9A9A9A"/>
+                </a:solidFill>
+                <a:latin typeface="Jost"/>
               </a:rPr>
               <a:t>TEAM &amp; THE ASK</a:t>
             </a:r>
@@ -9149,9 +8465,9 @@
             <a:r>
               <a:rPr sz="900" b="0" i="0">
                 <a:solidFill>
-                  <a:srgbClr val="5C5E6A"/>
-                </a:solidFill>
-                <a:latin typeface="Inter"/>
+                  <a:srgbClr val="9A9A9A"/>
+                </a:solidFill>
+                <a:latin typeface="Jost"/>
               </a:rPr>
               <a:t>narve.ai — confidential</a:t>
             </a:r>
@@ -9184,9 +8500,9 @@
             <a:r>
               <a:rPr sz="900" b="0" i="0">
                 <a:solidFill>
-                  <a:srgbClr val="5C5E6A"/>
-                </a:solidFill>
-                <a:latin typeface="Inter"/>
+                  <a:srgbClr val="9A9A9A"/>
+                </a:solidFill>
+                <a:latin typeface="Jost"/>
               </a:rPr>
               <a:t>14 / 14</a:t>
             </a:r>
@@ -9221,13 +8537,22 @@
               </a:lnSpc>
             </a:pPr>
             <a:r>
-              <a:rPr sz="2600" b="1" i="0" spc="-30">
-                <a:solidFill>
-                  <a:srgbClr val="EBEBEF"/>
-                </a:solidFill>
-                <a:latin typeface="Inter"/>
-              </a:rPr>
-              <a:t>Habbig &amp; Cakarel built the entire stack — raising $50K to switch it on.</a:t>
+              <a:rPr sz="2600" b="0" i="0" spc="-50">
+                <a:solidFill>
+                  <a:srgbClr val="0D0D0D"/>
+                </a:solidFill>
+                <a:latin typeface="Jost"/>
+              </a:rPr>
+              <a:t>Habbig &amp; Cakarel built the entire stack — $50K </a:t>
+            </a:r>
+            <a:r>
+              <a:rPr sz="2600" b="0" i="1" spc="-30">
+                <a:solidFill>
+                  <a:srgbClr val="0D0D0D"/>
+                </a:solidFill>
+                <a:latin typeface="Lora"/>
+              </a:rPr>
+              <a:t>switches it on.</a:t>
             </a:r>
           </a:p>
         </p:txBody>
@@ -9249,29 +8574,15 @@
             </a:avLst>
           </a:prstGeom>
           <a:solidFill>
-            <a:srgbClr val="18191E"/>
+            <a:srgbClr val="FFFFFF"/>
           </a:solidFill>
           <a:ln w="9525">
             <a:solidFill>
-              <a:srgbClr val="24252C"/>
+              <a:srgbClr val="E0E0E0"/>
             </a:solidFill>
           </a:ln>
           <a:effectLst/>
         </p:spPr>
-        <p:style>
-          <a:lnRef idx="1">
-            <a:schemeClr val="accent1"/>
-          </a:lnRef>
-          <a:fillRef idx="3">
-            <a:schemeClr val="accent1"/>
-          </a:fillRef>
-          <a:effectRef idx="2">
-            <a:schemeClr val="accent1"/>
-          </a:effectRef>
-          <a:fontRef idx="minor">
-            <a:schemeClr val="lt1"/>
-          </a:fontRef>
-        </p:style>
         <p:txBody>
           <a:bodyPr rtlCol="0" anchor="ctr"/>
           <a:lstStyle/>
@@ -9310,9 +8621,9 @@
             <a:r>
               <a:rPr sz="1050" b="1" i="0" spc="140">
                 <a:solidFill>
-                  <a:srgbClr val="6366F1"/>
-                </a:solidFill>
-                <a:latin typeface="Inter"/>
+                  <a:srgbClr val="0D0D0D"/>
+                </a:solidFill>
+                <a:latin typeface="Jost"/>
               </a:rPr>
               <a:t>TEAM</a:t>
             </a:r>
@@ -9326,18 +8637,18 @@
             <a:r>
               <a:rPr sz="1500" b="1" i="0">
                 <a:solidFill>
-                  <a:srgbClr val="EBEBEF"/>
-                </a:solidFill>
-                <a:latin typeface="Inter"/>
+                  <a:srgbClr val="0D0D0D"/>
+                </a:solidFill>
+                <a:latin typeface="Jost"/>
               </a:rPr>
               <a:t>Julian Habbig</a:t>
             </a:r>
             <a:r>
               <a:rPr sz="1250" b="1" i="0">
                 <a:solidFill>
-                  <a:srgbClr val="6366F1"/>
-                </a:solidFill>
-                <a:latin typeface="Inter"/>
+                  <a:srgbClr val="0D0D0D"/>
+                </a:solidFill>
+                <a:latin typeface="Jost"/>
               </a:rPr>
               <a:t>  ·  CEO</a:t>
             </a:r>
@@ -9351,9 +8662,9 @@
             <a:r>
               <a:rPr sz="1150" b="0" i="0">
                 <a:solidFill>
-                  <a:srgbClr val="8B8D98"/>
-                </a:solidFill>
-                <a:latin typeface="Inter"/>
+                  <a:srgbClr val="5A5A5A"/>
+                </a:solidFill>
+                <a:latin typeface="Jost"/>
               </a:rPr>
               <a:t>julian@habbig.com · [PLACEHOLDER: background, prior roles, relevant wins]</a:t>
             </a:r>
@@ -9367,18 +8678,18 @@
             <a:r>
               <a:rPr sz="1500" b="1" i="0">
                 <a:solidFill>
-                  <a:srgbClr val="EBEBEF"/>
-                </a:solidFill>
-                <a:latin typeface="Inter"/>
+                  <a:srgbClr val="0D0D0D"/>
+                </a:solidFill>
+                <a:latin typeface="Jost"/>
               </a:rPr>
               <a:t>Sho Cakarel</a:t>
             </a:r>
             <a:r>
               <a:rPr sz="1250" b="1" i="0">
                 <a:solidFill>
-                  <a:srgbClr val="6366F1"/>
-                </a:solidFill>
-                <a:latin typeface="Inter"/>
+                  <a:srgbClr val="0D0D0D"/>
+                </a:solidFill>
+                <a:latin typeface="Jost"/>
               </a:rPr>
               <a:t>  ·  CTO</a:t>
             </a:r>
@@ -9392,9 +8703,9 @@
             <a:r>
               <a:rPr sz="1150" b="0" i="0">
                 <a:solidFill>
-                  <a:srgbClr val="8B8D98"/>
-                </a:solidFill>
-                <a:latin typeface="Inter"/>
+                  <a:srgbClr val="5A5A5A"/>
+                </a:solidFill>
+                <a:latin typeface="Jost"/>
               </a:rPr>
               <a:t>sho@cakarel.com · [PLACEHOLDER: background, prior roles, relevant wins]</a:t>
             </a:r>
@@ -9408,18 +8719,18 @@
             <a:r>
               <a:rPr sz="1250" b="1" i="0">
                 <a:solidFill>
-                  <a:srgbClr val="EBEBEF"/>
-                </a:solidFill>
-                <a:latin typeface="Inter"/>
+                  <a:srgbClr val="0D0D0D"/>
+                </a:solidFill>
+                <a:latin typeface="Jost"/>
               </a:rPr>
               <a:t>The repo is the résumé: </a:t>
             </a:r>
             <a:r>
               <a:rPr sz="1250" b="0" i="0">
                 <a:solidFill>
-                  <a:srgbClr val="8B8D98"/>
-                </a:solidFill>
-                <a:latin typeface="Inter"/>
+                  <a:srgbClr val="5A5A5A"/>
+                </a:solidFill>
+                <a:latin typeface="Jost"/>
               </a:rPr>
               <a:t>15 dashboards, 2 trading bots, one auth/billing gateway, one 20-model quant toolkit — documented, tested, deployable.</a:t>
             </a:r>
@@ -9443,29 +8754,15 @@
             </a:avLst>
           </a:prstGeom>
           <a:solidFill>
-            <a:srgbClr val="1F2027"/>
+            <a:srgbClr val="FFFFFF"/>
           </a:solidFill>
           <a:ln w="9525">
             <a:solidFill>
-              <a:srgbClr val="6366F1"/>
+              <a:srgbClr val="0D0D0D"/>
             </a:solidFill>
           </a:ln>
           <a:effectLst/>
         </p:spPr>
-        <p:style>
-          <a:lnRef idx="1">
-            <a:schemeClr val="accent1"/>
-          </a:lnRef>
-          <a:fillRef idx="3">
-            <a:schemeClr val="accent1"/>
-          </a:fillRef>
-          <a:effectRef idx="2">
-            <a:schemeClr val="accent1"/>
-          </a:effectRef>
-          <a:fontRef idx="minor">
-            <a:schemeClr val="lt1"/>
-          </a:fontRef>
-        </p:style>
         <p:txBody>
           <a:bodyPr rtlCol="0" anchor="ctr"/>
           <a:lstStyle/>
@@ -9504,9 +8801,9 @@
             <a:r>
               <a:rPr sz="1050" b="1" i="0" spc="140">
                 <a:solidFill>
-                  <a:srgbClr val="6366F1"/>
-                </a:solidFill>
-                <a:latin typeface="Inter"/>
+                  <a:srgbClr val="0D0D0D"/>
+                </a:solidFill>
+                <a:latin typeface="Jost"/>
               </a:rPr>
               <a:t>THE ASK</a:t>
             </a:r>
@@ -9518,20 +8815,20 @@
               </a:spcAft>
             </a:pPr>
             <a:r>
-              <a:rPr sz="3000" b="1" i="0">
-                <a:solidFill>
-                  <a:srgbClr val="EBEBEF"/>
-                </a:solidFill>
-                <a:latin typeface="Inter"/>
+              <a:rPr sz="3200" b="0" i="1">
+                <a:solidFill>
+                  <a:srgbClr val="0D0D0D"/>
+                </a:solidFill>
+                <a:latin typeface="Fraunces"/>
               </a:rPr>
               <a:t>$50,000</a:t>
             </a:r>
             <a:r>
               <a:rPr sz="1300" b="0" i="0">
                 <a:solidFill>
-                  <a:srgbClr val="8B8D98"/>
-                </a:solidFill>
-                <a:latin typeface="Inter"/>
+                  <a:srgbClr val="5A5A5A"/>
+                </a:solidFill>
+                <a:latin typeface="Jost"/>
               </a:rPr>
               <a:t>  pre-seed</a:t>
             </a:r>
@@ -9548,18 +8845,18 @@
             <a:r>
               <a:rPr sz="1250" b="1" i="0">
                 <a:solidFill>
-                  <a:srgbClr val="EBEBEF"/>
-                </a:solidFill>
-                <a:latin typeface="Inter"/>
+                  <a:srgbClr val="0D0D0D"/>
+                </a:solidFill>
+                <a:latin typeface="Jost"/>
               </a:rPr>
               <a:t>Instrument: </a:t>
             </a:r>
             <a:r>
               <a:rPr sz="1250" b="0" i="0">
                 <a:solidFill>
-                  <a:srgbClr val="8B8D98"/>
-                </a:solidFill>
-                <a:latin typeface="Inter"/>
+                  <a:srgbClr val="5A5A5A"/>
+                </a:solidFill>
+                <a:latin typeface="Jost"/>
               </a:rPr>
               <a:t>SAFE — [PLACEHOLDER: cap/discount, target close date]</a:t>
             </a:r>
@@ -9576,18 +8873,18 @@
             <a:r>
               <a:rPr sz="1250" b="1" i="0">
                 <a:solidFill>
-                  <a:srgbClr val="EBEBEF"/>
-                </a:solidFill>
-                <a:latin typeface="Inter"/>
+                  <a:srgbClr val="0D0D0D"/>
+                </a:solidFill>
+                <a:latin typeface="Jost"/>
               </a:rPr>
               <a:t>Use of funds: </a:t>
             </a:r>
             <a:r>
               <a:rPr sz="1250" b="0" i="0">
                 <a:solidFill>
-                  <a:srgbClr val="8B8D98"/>
-                </a:solidFill>
-                <a:latin typeface="Inter"/>
+                  <a:srgbClr val="5A5A5A"/>
+                </a:solidFill>
+                <a:latin typeface="Jost"/>
               </a:rPr>
               <a:t>~40% data &amp; API costs (X quota, LLM extraction) · ~35% engineering (semantic matching, multi-tenancy) · ~25% launch GTM</a:t>
             </a:r>
@@ -9604,18 +8901,18 @@
             <a:r>
               <a:rPr sz="1250" b="1" i="0">
                 <a:solidFill>
-                  <a:srgbClr val="EBEBEF"/>
-                </a:solidFill>
-                <a:latin typeface="Inter"/>
+                  <a:srgbClr val="0D0D0D"/>
+                </a:solidFill>
+                <a:latin typeface="Jost"/>
               </a:rPr>
               <a:t>Buys: </a:t>
             </a:r>
             <a:r>
               <a:rPr sz="1250" b="0" i="0">
                 <a:solidFill>
-                  <a:srgbClr val="8B8D98"/>
-                </a:solidFill>
-                <a:latin typeface="Inter"/>
+                  <a:srgbClr val="5A5A5A"/>
+                </a:solidFill>
+                <a:latin typeface="Jost"/>
               </a:rPr>
               <a:t>public launch + [PLACEHOLDER: X] months of ledger compounding — the dataset no later entrant can rebuild</a:t>
             </a:r>
@@ -9648,9 +8945,9 @@
             <a:r>
               <a:rPr sz="1250" b="1" i="0">
                 <a:solidFill>
-                  <a:srgbClr val="EBEBEF"/>
-                </a:solidFill>
-                <a:latin typeface="Inter"/>
+                  <a:srgbClr val="0D0D0D"/>
+                </a:solidFill>
+                <a:latin typeface="Jost"/>
               </a:rPr>
               <a:t>Live demo today: investor access keys — instant, scoped, no signup.</a:t>
             </a:r>
@@ -9690,27 +8987,13 @@
             <a:avLst/>
           </a:prstGeom>
           <a:solidFill>
-            <a:srgbClr val="0C0D10"/>
+            <a:srgbClr val="F5F5F5"/>
           </a:solidFill>
           <a:ln>
             <a:noFill/>
           </a:ln>
           <a:effectLst/>
         </p:spPr>
-        <p:style>
-          <a:lnRef idx="1">
-            <a:schemeClr val="accent1"/>
-          </a:lnRef>
-          <a:fillRef idx="3">
-            <a:schemeClr val="accent1"/>
-          </a:fillRef>
-          <a:effectRef idx="2">
-            <a:schemeClr val="accent1"/>
-          </a:effectRef>
-          <a:fontRef idx="minor">
-            <a:schemeClr val="lt1"/>
-          </a:fontRef>
-        </p:style>
         <p:txBody>
           <a:bodyPr rtlCol="0" anchor="ctr"/>
           <a:lstStyle/>
@@ -9742,11 +9025,11 @@
           <a:lstStyle/>
           <a:p>
             <a:r>
-              <a:rPr sz="1250" b="1" i="0" spc="220">
-                <a:solidFill>
-                  <a:srgbClr val="6366F1"/>
-                </a:solidFill>
-                <a:latin typeface="Inter"/>
+              <a:rPr sz="1100" b="0" i="0" spc="260">
+                <a:solidFill>
+                  <a:srgbClr val="9A9A9A"/>
+                </a:solidFill>
+                <a:latin typeface="Jost"/>
               </a:rPr>
               <a:t>PROBLEM</a:t>
             </a:r>
@@ -9778,9 +9061,9 @@
             <a:r>
               <a:rPr sz="900" b="0" i="0">
                 <a:solidFill>
-                  <a:srgbClr val="5C5E6A"/>
-                </a:solidFill>
-                <a:latin typeface="Inter"/>
+                  <a:srgbClr val="9A9A9A"/>
+                </a:solidFill>
+                <a:latin typeface="Jost"/>
               </a:rPr>
               <a:t>narve.ai — confidential</a:t>
             </a:r>
@@ -9813,9 +9096,9 @@
             <a:r>
               <a:rPr sz="900" b="0" i="0">
                 <a:solidFill>
-                  <a:srgbClr val="5C5E6A"/>
-                </a:solidFill>
-                <a:latin typeface="Inter"/>
+                  <a:srgbClr val="9A9A9A"/>
+                </a:solidFill>
+                <a:latin typeface="Jost"/>
               </a:rPr>
               <a:t>02 / 14</a:t>
             </a:r>
@@ -9850,13 +9133,22 @@
               </a:lnSpc>
             </a:pPr>
             <a:r>
-              <a:rPr sz="2900" b="1" i="0" spc="-30">
-                <a:solidFill>
-                  <a:srgbClr val="EBEBEF"/>
-                </a:solidFill>
-                <a:latin typeface="Inter"/>
-              </a:rPr>
-              <a:t>Nobody keeps score of who is right.</a:t>
+              <a:rPr sz="3000" b="0" i="0" spc="-50">
+                <a:solidFill>
+                  <a:srgbClr val="0D0D0D"/>
+                </a:solidFill>
+                <a:latin typeface="Jost"/>
+              </a:rPr>
+              <a:t>Nobody keeps score of </a:t>
+            </a:r>
+            <a:r>
+              <a:rPr sz="3000" b="0" i="1" spc="-30">
+                <a:solidFill>
+                  <a:srgbClr val="0D0D0D"/>
+                </a:solidFill>
+                <a:latin typeface="Lora"/>
+              </a:rPr>
+              <a:t>who is right.</a:t>
             </a:r>
           </a:p>
         </p:txBody>
@@ -9892,29 +9184,29 @@
               </a:spcAft>
             </a:pPr>
             <a:r>
+              <a:rPr sz="1350" b="0" i="0">
+                <a:solidFill>
+                  <a:srgbClr val="B0B0B0"/>
+                </a:solidFill>
+                <a:latin typeface="Jost"/>
+              </a:rPr>
+              <a:t>—  </a:t>
+            </a:r>
+            <a:r>
               <a:rPr sz="1350" b="1" i="0">
                 <a:solidFill>
-                  <a:srgbClr val="6366F1"/>
-                </a:solidFill>
-                <a:latin typeface="Inter"/>
-              </a:rPr>
-              <a:t>—  </a:t>
-            </a:r>
-            <a:r>
-              <a:rPr sz="1350" b="1" i="0">
-                <a:solidFill>
-                  <a:srgbClr val="EBEBEF"/>
-                </a:solidFill>
-                <a:latin typeface="Inter"/>
+                  <a:srgbClr val="0D0D0D"/>
+                </a:solidFill>
+                <a:latin typeface="Jost"/>
               </a:rPr>
               <a:t>Zero accountability. </a:t>
             </a:r>
             <a:r>
               <a:rPr sz="1350" b="0" i="0">
                 <a:solidFill>
-                  <a:srgbClr val="8B8D98"/>
-                </a:solidFill>
-                <a:latin typeface="Inter"/>
+                  <a:srgbClr val="5A5A5A"/>
+                </a:solidFill>
+                <a:latin typeface="Jost"/>
               </a:rPr>
               <a:t>Politicians, pundits, and insiders publish market-moving predictions daily. Right gets amplified; wrong gets memory-holed.</a:t>
             </a:r>
@@ -9929,29 +9221,29 @@
               </a:spcAft>
             </a:pPr>
             <a:r>
+              <a:rPr sz="1350" b="0" i="0">
+                <a:solidFill>
+                  <a:srgbClr val="B0B0B0"/>
+                </a:solidFill>
+                <a:latin typeface="Jost"/>
+              </a:rPr>
+              <a:t>—  </a:t>
+            </a:r>
+            <a:r>
               <a:rPr sz="1350" b="1" i="0">
                 <a:solidFill>
-                  <a:srgbClr val="6366F1"/>
-                </a:solidFill>
-                <a:latin typeface="Inter"/>
-              </a:rPr>
-              <a:t>—  </a:t>
-            </a:r>
-            <a:r>
-              <a:rPr sz="1350" b="1" i="0">
-                <a:solidFill>
-                  <a:srgbClr val="EBEBEF"/>
-                </a:solidFill>
-                <a:latin typeface="Inter"/>
+                  <a:srgbClr val="0D0D0D"/>
+                </a:solidFill>
+                <a:latin typeface="Jost"/>
               </a:rPr>
               <a:t>Markets price outcomes, never people. </a:t>
             </a:r>
             <a:r>
               <a:rPr sz="1350" b="0" i="0">
                 <a:solidFill>
-                  <a:srgbClr val="8B8D98"/>
-                </a:solidFill>
-                <a:latin typeface="Inter"/>
+                  <a:srgbClr val="5A5A5A"/>
+                </a:solidFill>
+                <a:latin typeface="Jost"/>
               </a:rPr>
               <a:t>Prediction markets just hit ~$24B/month (Apr 2026 — Pew Research).</a:t>
             </a:r>
@@ -9966,29 +9258,29 @@
               </a:spcAft>
             </a:pPr>
             <a:r>
+              <a:rPr sz="1350" b="0" i="0">
+                <a:solidFill>
+                  <a:srgbClr val="B0B0B0"/>
+                </a:solidFill>
+                <a:latin typeface="Jost"/>
+              </a:rPr>
+              <a:t>—  </a:t>
+            </a:r>
+            <a:r>
               <a:rPr sz="1350" b="1" i="0">
                 <a:solidFill>
-                  <a:srgbClr val="6366F1"/>
-                </a:solidFill>
-                <a:latin typeface="Inter"/>
-              </a:rPr>
-              <a:t>—  </a:t>
-            </a:r>
-            <a:r>
-              <a:rPr sz="1350" b="1" i="0">
-                <a:solidFill>
-                  <a:srgbClr val="EBEBEF"/>
-                </a:solidFill>
-                <a:latin typeface="Inter"/>
+                  <a:srgbClr val="0D0D0D"/>
+                </a:solidFill>
+                <a:latin typeface="Jost"/>
               </a:rPr>
               <a:t>Sentiment tools count crowd volume. </a:t>
             </a:r>
             <a:r>
               <a:rPr sz="1350" b="0" i="0">
                 <a:solidFill>
-                  <a:srgbClr val="8B8D98"/>
-                </a:solidFill>
-                <a:latin typeface="Inter"/>
+                  <a:srgbClr val="5A5A5A"/>
+                </a:solidFill>
+                <a:latin typeface="Jost"/>
               </a:rPr>
               <a:t>A serially wrong loudmouth weighs the same as a proven forecaster.</a:t>
             </a:r>
@@ -10003,29 +9295,29 @@
               </a:spcAft>
             </a:pPr>
             <a:r>
+              <a:rPr sz="1350" b="0" i="0">
+                <a:solidFill>
+                  <a:srgbClr val="B0B0B0"/>
+                </a:solidFill>
+                <a:latin typeface="Jost"/>
+              </a:rPr>
+              <a:t>—  </a:t>
+            </a:r>
+            <a:r>
               <a:rPr sz="1350" b="1" i="0">
                 <a:solidFill>
-                  <a:srgbClr val="6366F1"/>
-                </a:solidFill>
-                <a:latin typeface="Inter"/>
-              </a:rPr>
-              <a:t>—  </a:t>
-            </a:r>
-            <a:r>
-              <a:rPr sz="1350" b="1" i="0">
-                <a:solidFill>
-                  <a:srgbClr val="EBEBEF"/>
-                </a:solidFill>
-                <a:latin typeface="Inter"/>
+                  <a:srgbClr val="0D0D0D"/>
+                </a:solidFill>
+                <a:latin typeface="Jost"/>
               </a:rPr>
               <a:t>Execution without research. </a:t>
             </a:r>
             <a:r>
               <a:rPr sz="1350" b="0" i="0">
                 <a:solidFill>
-                  <a:srgbClr val="8B8D98"/>
-                </a:solidFill>
-                <a:latin typeface="Inter"/>
+                  <a:srgbClr val="5A5A5A"/>
+                </a:solidFill>
+                <a:latin typeface="Jost"/>
               </a:rPr>
               <a:t>$3.7B went into venues in 2025; ~$91M into tooling (Forbes / Seedtable).</a:t>
             </a:r>
@@ -10049,29 +9341,15 @@
             </a:avLst>
           </a:prstGeom>
           <a:solidFill>
-            <a:srgbClr val="18191E"/>
+            <a:srgbClr val="FFFFFF"/>
           </a:solidFill>
           <a:ln w="9525">
             <a:solidFill>
-              <a:srgbClr val="24252C"/>
+              <a:srgbClr val="E0E0E0"/>
             </a:solidFill>
           </a:ln>
           <a:effectLst/>
         </p:spPr>
-        <p:style>
-          <a:lnRef idx="1">
-            <a:schemeClr val="accent1"/>
-          </a:lnRef>
-          <a:fillRef idx="3">
-            <a:schemeClr val="accent1"/>
-          </a:fillRef>
-          <a:effectRef idx="2">
-            <a:schemeClr val="accent1"/>
-          </a:effectRef>
-          <a:fontRef idx="minor">
-            <a:schemeClr val="lt1"/>
-          </a:fontRef>
-        </p:style>
         <p:txBody>
           <a:bodyPr rtlCol="0" anchor="ctr"/>
           <a:lstStyle/>
@@ -10110,9 +9388,9 @@
             <a:r>
               <a:rPr sz="1100" b="1" i="0" spc="160">
                 <a:solidFill>
-                  <a:srgbClr val="5C5E6A"/>
-                </a:solidFill>
-                <a:latin typeface="Inter"/>
+                  <a:srgbClr val="9A9A9A"/>
+                </a:solidFill>
+                <a:latin typeface="Jost"/>
               </a:rPr>
               <a:t>EQUITIES</a:t>
             </a:r>
@@ -10127,29 +9405,29 @@
               </a:spcAft>
             </a:pPr>
             <a:r>
+              <a:rPr sz="1250" b="0" i="0">
+                <a:solidFill>
+                  <a:srgbClr val="5A5A5A"/>
+                </a:solidFill>
+                <a:latin typeface="Jost"/>
+              </a:rPr>
+              <a:t>✓  </a:t>
+            </a:r>
+            <a:r>
               <a:rPr sz="1250" b="1" i="0">
                 <a:solidFill>
-                  <a:srgbClr val="059669"/>
-                </a:solidFill>
-                <a:latin typeface="Inter"/>
-              </a:rPr>
-              <a:t>✓  </a:t>
-            </a:r>
-            <a:r>
-              <a:rPr sz="1250" b="1" i="0">
-                <a:solidFill>
-                  <a:srgbClr val="EBEBEF"/>
-                </a:solidFill>
-                <a:latin typeface="Inter"/>
+                  <a:srgbClr val="0D0D0D"/>
+                </a:solidFill>
+                <a:latin typeface="Jost"/>
               </a:rPr>
               <a:t>Execution   </a:t>
             </a:r>
             <a:r>
               <a:rPr sz="1150" b="0" i="0">
                 <a:solidFill>
-                  <a:srgbClr val="8B8D98"/>
-                </a:solidFill>
-                <a:latin typeface="Inter"/>
+                  <a:srgbClr val="5A5A5A"/>
+                </a:solidFill>
+                <a:latin typeface="Jost"/>
               </a:rPr>
               <a:t>Schwab, Robinhood, IBKR</a:t>
             </a:r>
@@ -10161,29 +9439,29 @@
               </a:lnSpc>
             </a:pPr>
             <a:r>
+              <a:rPr sz="1250" b="0" i="0">
+                <a:solidFill>
+                  <a:srgbClr val="5A5A5A"/>
+                </a:solidFill>
+                <a:latin typeface="Jost"/>
+              </a:rPr>
+              <a:t>✓  </a:t>
+            </a:r>
+            <a:r>
               <a:rPr sz="1250" b="1" i="0">
                 <a:solidFill>
-                  <a:srgbClr val="059669"/>
-                </a:solidFill>
-                <a:latin typeface="Inter"/>
-              </a:rPr>
-              <a:t>✓  </a:t>
-            </a:r>
-            <a:r>
-              <a:rPr sz="1250" b="1" i="0">
-                <a:solidFill>
-                  <a:srgbClr val="EBEBEF"/>
-                </a:solidFill>
-                <a:latin typeface="Inter"/>
+                  <a:srgbClr val="0D0D0D"/>
+                </a:solidFill>
+                <a:latin typeface="Jost"/>
               </a:rPr>
               <a:t>Research   </a:t>
             </a:r>
             <a:r>
               <a:rPr sz="1150" b="0" i="0">
                 <a:solidFill>
-                  <a:srgbClr val="8B8D98"/>
-                </a:solidFill>
-                <a:latin typeface="Inter"/>
+                  <a:srgbClr val="5A5A5A"/>
+                </a:solidFill>
+                <a:latin typeface="Jost"/>
               </a:rPr>
               <a:t>Morningstar, Zacks, Finviz…</a:t>
             </a:r>
@@ -10207,29 +9485,15 @@
             </a:avLst>
           </a:prstGeom>
           <a:solidFill>
-            <a:srgbClr val="18191E"/>
+            <a:srgbClr val="FFFFFF"/>
           </a:solidFill>
           <a:ln w="9525">
             <a:solidFill>
-              <a:srgbClr val="24252C"/>
+              <a:srgbClr val="E0E0E0"/>
             </a:solidFill>
           </a:ln>
           <a:effectLst/>
         </p:spPr>
-        <p:style>
-          <a:lnRef idx="1">
-            <a:schemeClr val="accent1"/>
-          </a:lnRef>
-          <a:fillRef idx="3">
-            <a:schemeClr val="accent1"/>
-          </a:fillRef>
-          <a:effectRef idx="2">
-            <a:schemeClr val="accent1"/>
-          </a:effectRef>
-          <a:fontRef idx="minor">
-            <a:schemeClr val="lt1"/>
-          </a:fontRef>
-        </p:style>
         <p:txBody>
           <a:bodyPr rtlCol="0" anchor="ctr"/>
           <a:lstStyle/>
@@ -10268,9 +9532,9 @@
             <a:r>
               <a:rPr sz="1100" b="1" i="0" spc="160">
                 <a:solidFill>
-                  <a:srgbClr val="5C5E6A"/>
-                </a:solidFill>
-                <a:latin typeface="Inter"/>
+                  <a:srgbClr val="9A9A9A"/>
+                </a:solidFill>
+                <a:latin typeface="Jost"/>
               </a:rPr>
               <a:t>EVENT MARKETS</a:t>
             </a:r>
@@ -10285,29 +9549,29 @@
               </a:spcAft>
             </a:pPr>
             <a:r>
+              <a:rPr sz="1250" b="0" i="0">
+                <a:solidFill>
+                  <a:srgbClr val="5A5A5A"/>
+                </a:solidFill>
+                <a:latin typeface="Jost"/>
+              </a:rPr>
+              <a:t>✓  </a:t>
+            </a:r>
+            <a:r>
               <a:rPr sz="1250" b="1" i="0">
                 <a:solidFill>
-                  <a:srgbClr val="059669"/>
-                </a:solidFill>
-                <a:latin typeface="Inter"/>
-              </a:rPr>
-              <a:t>✓  </a:t>
-            </a:r>
-            <a:r>
-              <a:rPr sz="1250" b="1" i="0">
-                <a:solidFill>
-                  <a:srgbClr val="EBEBEF"/>
-                </a:solidFill>
-                <a:latin typeface="Inter"/>
+                  <a:srgbClr val="0D0D0D"/>
+                </a:solidFill>
+                <a:latin typeface="Jost"/>
               </a:rPr>
               <a:t>Execution   </a:t>
             </a:r>
             <a:r>
               <a:rPr sz="1150" b="0" i="0">
                 <a:solidFill>
-                  <a:srgbClr val="8B8D98"/>
-                </a:solidFill>
-                <a:latin typeface="Inter"/>
+                  <a:srgbClr val="5A5A5A"/>
+                </a:solidFill>
+                <a:latin typeface="Jost"/>
               </a:rPr>
               <a:t>Polymarket, Kalshi, Robinhood</a:t>
             </a:r>
@@ -10321,27 +9585,27 @@
             <a:r>
               <a:rPr sz="1250" b="1" i="0">
                 <a:solidFill>
-                  <a:srgbClr val="F43F5E"/>
-                </a:solidFill>
-                <a:latin typeface="Inter"/>
+                  <a:srgbClr val="0D0D0D"/>
+                </a:solidFill>
+                <a:latin typeface="Jost"/>
               </a:rPr>
               <a:t>✗  </a:t>
             </a:r>
             <a:r>
               <a:rPr sz="1250" b="1" i="0">
                 <a:solidFill>
-                  <a:srgbClr val="EBEBEF"/>
-                </a:solidFill>
-                <a:latin typeface="Inter"/>
+                  <a:srgbClr val="0D0D0D"/>
+                </a:solidFill>
+                <a:latin typeface="Jost"/>
               </a:rPr>
               <a:t>Research   </a:t>
             </a:r>
             <a:r>
-              <a:rPr sz="1150" b="1" i="0">
-                <a:solidFill>
-                  <a:srgbClr val="F43F5E"/>
-                </a:solidFill>
-                <a:latin typeface="Inter"/>
+              <a:rPr sz="1300" b="1" i="1">
+                <a:solidFill>
+                  <a:srgbClr val="0D0D0D"/>
+                </a:solidFill>
+                <a:latin typeface="Lora"/>
               </a:rPr>
               <a:t>nobody.</a:t>
             </a:r>
@@ -10381,27 +9645,13 @@
             <a:avLst/>
           </a:prstGeom>
           <a:solidFill>
-            <a:srgbClr val="0C0D10"/>
+            <a:srgbClr val="F5F5F5"/>
           </a:solidFill>
           <a:ln>
             <a:noFill/>
           </a:ln>
           <a:effectLst/>
         </p:spPr>
-        <p:style>
-          <a:lnRef idx="1">
-            <a:schemeClr val="accent1"/>
-          </a:lnRef>
-          <a:fillRef idx="3">
-            <a:schemeClr val="accent1"/>
-          </a:fillRef>
-          <a:effectRef idx="2">
-            <a:schemeClr val="accent1"/>
-          </a:effectRef>
-          <a:fontRef idx="minor">
-            <a:schemeClr val="lt1"/>
-          </a:fontRef>
-        </p:style>
         <p:txBody>
           <a:bodyPr rtlCol="0" anchor="ctr"/>
           <a:lstStyle/>
@@ -10433,11 +9683,11 @@
           <a:lstStyle/>
           <a:p>
             <a:r>
-              <a:rPr sz="1250" b="1" i="0" spc="220">
-                <a:solidFill>
-                  <a:srgbClr val="6366F1"/>
-                </a:solidFill>
-                <a:latin typeface="Inter"/>
+              <a:rPr sz="1100" b="0" i="0" spc="260">
+                <a:solidFill>
+                  <a:srgbClr val="9A9A9A"/>
+                </a:solidFill>
+                <a:latin typeface="Jost"/>
               </a:rPr>
               <a:t>SOLUTION</a:t>
             </a:r>
@@ -10469,9 +9719,9 @@
             <a:r>
               <a:rPr sz="900" b="0" i="0">
                 <a:solidFill>
-                  <a:srgbClr val="5C5E6A"/>
-                </a:solidFill>
-                <a:latin typeface="Inter"/>
+                  <a:srgbClr val="9A9A9A"/>
+                </a:solidFill>
+                <a:latin typeface="Jost"/>
               </a:rPr>
               <a:t>narve.ai — confidential</a:t>
             </a:r>
@@ -10504,9 +9754,9 @@
             <a:r>
               <a:rPr sz="900" b="0" i="0">
                 <a:solidFill>
-                  <a:srgbClr val="5C5E6A"/>
-                </a:solidFill>
-                <a:latin typeface="Inter"/>
+                  <a:srgbClr val="9A9A9A"/>
+                </a:solidFill>
+                <a:latin typeface="Jost"/>
               </a:rPr>
               <a:t>03 / 14</a:t>
             </a:r>
@@ -10541,13 +9791,22 @@
               </a:lnSpc>
             </a:pPr>
             <a:r>
-              <a:rPr sz="2600" b="1" i="0" spc="-30">
-                <a:solidFill>
-                  <a:srgbClr val="EBEBEF"/>
-                </a:solidFill>
-                <a:latin typeface="Inter"/>
-              </a:rPr>
-              <a:t>We turn social media into a market-settled credibility ledger.</a:t>
+              <a:rPr sz="2700" b="0" i="0" spc="-50">
+                <a:solidFill>
+                  <a:srgbClr val="0D0D0D"/>
+                </a:solidFill>
+                <a:latin typeface="Jost"/>
+              </a:rPr>
+              <a:t>We turn social media into a </a:t>
+            </a:r>
+            <a:r>
+              <a:rPr sz="2700" b="0" i="1" spc="-30">
+                <a:solidFill>
+                  <a:srgbClr val="0D0D0D"/>
+                </a:solidFill>
+                <a:latin typeface="Lora"/>
+              </a:rPr>
+              <a:t>market-settled credibility ledger.</a:t>
             </a:r>
           </a:p>
         </p:txBody>
@@ -10583,29 +9842,29 @@
               </a:spcAft>
             </a:pPr>
             <a:r>
+              <a:rPr sz="1350" b="0" i="0">
+                <a:solidFill>
+                  <a:srgbClr val="B0B0B0"/>
+                </a:solidFill>
+                <a:latin typeface="Jost"/>
+              </a:rPr>
+              <a:t>—  </a:t>
+            </a:r>
+            <a:r>
               <a:rPr sz="1350" b="1" i="0">
                 <a:solidFill>
-                  <a:srgbClr val="6366F1"/>
-                </a:solidFill>
-                <a:latin typeface="Inter"/>
-              </a:rPr>
-              <a:t>—  </a:t>
-            </a:r>
-            <a:r>
-              <a:rPr sz="1350" b="1" i="0">
-                <a:solidFill>
-                  <a:srgbClr val="EBEBEF"/>
-                </a:solidFill>
-                <a:latin typeface="Inter"/>
+                  <a:srgbClr val="0D0D0D"/>
+                </a:solidFill>
+                <a:latin typeface="Jost"/>
               </a:rPr>
               <a:t>Extract </a:t>
             </a:r>
             <a:r>
               <a:rPr sz="1350" b="0" i="0">
                 <a:solidFill>
-                  <a:srgbClr val="8B8D98"/>
-                </a:solidFill>
-                <a:latin typeface="Inter"/>
+                  <a:srgbClr val="5A5A5A"/>
+                </a:solidFill>
+                <a:latin typeface="Jost"/>
               </a:rPr>
               <a:t>falsifiable predictions from X, TruthSocial, Reddit &amp; RSS every 5 minutes — two-stage regex + Claude pipeline.</a:t>
             </a:r>
@@ -10620,29 +9879,29 @@
               </a:spcAft>
             </a:pPr>
             <a:r>
+              <a:rPr sz="1350" b="0" i="0">
+                <a:solidFill>
+                  <a:srgbClr val="B0B0B0"/>
+                </a:solidFill>
+                <a:latin typeface="Jost"/>
+              </a:rPr>
+              <a:t>—  </a:t>
+            </a:r>
+            <a:r>
               <a:rPr sz="1350" b="1" i="0">
                 <a:solidFill>
-                  <a:srgbClr val="6366F1"/>
-                </a:solidFill>
-                <a:latin typeface="Inter"/>
-              </a:rPr>
-              <a:t>—  </a:t>
-            </a:r>
-            <a:r>
-              <a:rPr sz="1350" b="1" i="0">
-                <a:solidFill>
-                  <a:srgbClr val="EBEBEF"/>
-                </a:solidFill>
-                <a:latin typeface="Inter"/>
+                  <a:srgbClr val="0D0D0D"/>
+                </a:solidFill>
+                <a:latin typeface="Jost"/>
               </a:rPr>
               <a:t>Match &amp; price </a:t>
             </a:r>
             <a:r>
               <a:rPr sz="1350" b="0" i="0">
                 <a:solidFill>
-                  <a:srgbClr val="8B8D98"/>
-                </a:solidFill>
-                <a:latin typeface="Inter"/>
+                  <a:srgbClr val="5A5A5A"/>
+                </a:solidFill>
+                <a:latin typeface="Jost"/>
               </a:rPr>
               <a:t>each claim against live Polymarket/Kalshi markets — best-side EV (BUY YES vs BUY NO) at the live price.</a:t>
             </a:r>
@@ -10657,29 +9916,29 @@
               </a:spcAft>
             </a:pPr>
             <a:r>
+              <a:rPr sz="1350" b="0" i="0">
+                <a:solidFill>
+                  <a:srgbClr val="B0B0B0"/>
+                </a:solidFill>
+                <a:latin typeface="Jost"/>
+              </a:rPr>
+              <a:t>—  </a:t>
+            </a:r>
+            <a:r>
               <a:rPr sz="1350" b="1" i="0">
                 <a:solidFill>
-                  <a:srgbClr val="6366F1"/>
-                </a:solidFill>
-                <a:latin typeface="Inter"/>
-              </a:rPr>
-              <a:t>—  </a:t>
-            </a:r>
-            <a:r>
-              <a:rPr sz="1350" b="1" i="0">
-                <a:solidFill>
-                  <a:srgbClr val="EBEBEF"/>
-                </a:solidFill>
-                <a:latin typeface="Inter"/>
+                  <a:srgbClr val="0D0D0D"/>
+                </a:solidFill>
+                <a:latin typeface="Jost"/>
               </a:rPr>
               <a:t>Settle &amp; score </a:t>
             </a:r>
             <a:r>
               <a:rPr sz="1350" b="0" i="0">
                 <a:solidFill>
-                  <a:srgbClr val="8B8D98"/>
-                </a:solidFill>
-                <a:latin typeface="Inter"/>
+                  <a:srgbClr val="5A5A5A"/>
+                </a:solidFill>
+                <a:latin typeface="Jost"/>
               </a:rPr>
               <a:t>every claim at market resolution — Bayesian accuracy + Brier calibration: a forecaster FICO score per handle.</a:t>
             </a:r>
@@ -10694,29 +9953,29 @@
               </a:spcAft>
             </a:pPr>
             <a:r>
+              <a:rPr sz="1350" b="0" i="0">
+                <a:solidFill>
+                  <a:srgbClr val="B0B0B0"/>
+                </a:solidFill>
+                <a:latin typeface="Jost"/>
+              </a:rPr>
+              <a:t>—  </a:t>
+            </a:r>
+            <a:r>
               <a:rPr sz="1350" b="1" i="0">
                 <a:solidFill>
-                  <a:srgbClr val="6366F1"/>
-                </a:solidFill>
-                <a:latin typeface="Inter"/>
-              </a:rPr>
-              <a:t>—  </a:t>
-            </a:r>
-            <a:r>
-              <a:rPr sz="1350" b="1" i="0">
-                <a:solidFill>
-                  <a:srgbClr val="EBEBEF"/>
-                </a:solidFill>
-                <a:latin typeface="Inter"/>
+                  <a:srgbClr val="0D0D0D"/>
+                </a:solidFill>
+                <a:latin typeface="Jost"/>
               </a:rPr>
               <a:t>Self-audit: </a:t>
             </a:r>
             <a:r>
               <a:rPr sz="1350" b="0" i="0">
                 <a:solidFill>
-                  <a:srgbClr val="8B8D98"/>
-                </a:solidFill>
-                <a:latin typeface="Inter"/>
+                  <a:srgbClr val="5A5A5A"/>
+                </a:solidFill>
+                <a:latin typeface="Jost"/>
               </a:rPr>
               <a:t>$1 paper trade on every qualifying signal — the product ships with its own falsifiable track record.</a:t>
             </a:r>
@@ -10740,29 +9999,15 @@
             </a:avLst>
           </a:prstGeom>
           <a:solidFill>
-            <a:srgbClr val="18191E"/>
+            <a:srgbClr val="FFFFFF"/>
           </a:solidFill>
           <a:ln w="9525">
             <a:solidFill>
-              <a:srgbClr val="24252C"/>
+              <a:srgbClr val="E0E0E0"/>
             </a:solidFill>
           </a:ln>
           <a:effectLst/>
         </p:spPr>
-        <p:style>
-          <a:lnRef idx="1">
-            <a:schemeClr val="accent1"/>
-          </a:lnRef>
-          <a:fillRef idx="3">
-            <a:schemeClr val="accent1"/>
-          </a:fillRef>
-          <a:effectRef idx="2">
-            <a:schemeClr val="accent1"/>
-          </a:effectRef>
-          <a:fontRef idx="minor">
-            <a:schemeClr val="lt1"/>
-          </a:fontRef>
-        </p:style>
         <p:txBody>
           <a:bodyPr rtlCol="0" anchor="ctr"/>
           <a:lstStyle/>
@@ -10786,27 +10031,13 @@
             <a:avLst/>
           </a:prstGeom>
           <a:solidFill>
-            <a:srgbClr val="6366F1"/>
+            <a:srgbClr val="0D0D0D"/>
           </a:solidFill>
           <a:ln>
             <a:noFill/>
           </a:ln>
           <a:effectLst/>
         </p:spPr>
-        <p:style>
-          <a:lnRef idx="1">
-            <a:schemeClr val="accent1"/>
-          </a:lnRef>
-          <a:fillRef idx="3">
-            <a:schemeClr val="accent1"/>
-          </a:fillRef>
-          <a:effectRef idx="2">
-            <a:schemeClr val="accent1"/>
-          </a:effectRef>
-          <a:fontRef idx="minor">
-            <a:schemeClr val="lt1"/>
-          </a:fontRef>
-        </p:style>
         <p:txBody>
           <a:bodyPr rtlCol="0" anchor="ctr" lIns="0" rIns="0" tIns="0" bIns="0"/>
           <a:lstStyle/>
@@ -10815,9 +10046,9 @@
             <a:r>
               <a:rPr sz="1000" b="1" i="0">
                 <a:solidFill>
-                  <a:srgbClr val="0C0D10"/>
-                </a:solidFill>
-                <a:latin typeface="Inter"/>
+                  <a:srgbClr val="F5F5F5"/>
+                </a:solidFill>
+                <a:latin typeface="Jost"/>
               </a:rPr>
               <a:t>1</a:t>
             </a:r>
@@ -10854,9 +10085,9 @@
             <a:r>
               <a:rPr sz="1250" b="1" i="0">
                 <a:solidFill>
-                  <a:srgbClr val="EBEBEF"/>
-                </a:solidFill>
-                <a:latin typeface="Inter"/>
+                  <a:srgbClr val="0D0D0D"/>
+                </a:solidFill>
+                <a:latin typeface="Jost"/>
               </a:rPr>
               <a:t>Social post</a:t>
             </a:r>
@@ -10870,9 +10101,9 @@
             <a:r>
               <a:rPr sz="950" b="0" i="0">
                 <a:solidFill>
-                  <a:srgbClr val="8B8D98"/>
-                </a:solidFill>
-                <a:latin typeface="Inter"/>
+                  <a:srgbClr val="5A5A5A"/>
+                </a:solidFill>
+                <a:latin typeface="Jost"/>
               </a:rPr>
               <a:t>"Fed cuts in September, book it." — @macro_anon</a:t>
             </a:r>
@@ -10905,9 +10136,9 @@
             <a:r>
               <a:rPr sz="1300" b="1" i="0">
                 <a:solidFill>
-                  <a:srgbClr val="5C5E6A"/>
-                </a:solidFill>
-                <a:latin typeface="Inter"/>
+                  <a:srgbClr val="9A9A9A"/>
+                </a:solidFill>
+                <a:latin typeface="Jost"/>
               </a:rPr>
               <a:t>→</a:t>
             </a:r>
@@ -10931,29 +10162,15 @@
             </a:avLst>
           </a:prstGeom>
           <a:solidFill>
-            <a:srgbClr val="18191E"/>
+            <a:srgbClr val="FFFFFF"/>
           </a:solidFill>
           <a:ln w="9525">
             <a:solidFill>
-              <a:srgbClr val="24252C"/>
+              <a:srgbClr val="E0E0E0"/>
             </a:solidFill>
           </a:ln>
           <a:effectLst/>
         </p:spPr>
-        <p:style>
-          <a:lnRef idx="1">
-            <a:schemeClr val="accent1"/>
-          </a:lnRef>
-          <a:fillRef idx="3">
-            <a:schemeClr val="accent1"/>
-          </a:fillRef>
-          <a:effectRef idx="2">
-            <a:schemeClr val="accent1"/>
-          </a:effectRef>
-          <a:fontRef idx="minor">
-            <a:schemeClr val="lt1"/>
-          </a:fontRef>
-        </p:style>
         <p:txBody>
           <a:bodyPr rtlCol="0" anchor="ctr"/>
           <a:lstStyle/>
@@ -10977,27 +10194,13 @@
             <a:avLst/>
           </a:prstGeom>
           <a:solidFill>
-            <a:srgbClr val="059669"/>
+            <a:srgbClr val="0D0D0D"/>
           </a:solidFill>
           <a:ln>
             <a:noFill/>
           </a:ln>
           <a:effectLst/>
         </p:spPr>
-        <p:style>
-          <a:lnRef idx="1">
-            <a:schemeClr val="accent1"/>
-          </a:lnRef>
-          <a:fillRef idx="3">
-            <a:schemeClr val="accent1"/>
-          </a:fillRef>
-          <a:effectRef idx="2">
-            <a:schemeClr val="accent1"/>
-          </a:effectRef>
-          <a:fontRef idx="minor">
-            <a:schemeClr val="lt1"/>
-          </a:fontRef>
-        </p:style>
         <p:txBody>
           <a:bodyPr rtlCol="0" anchor="ctr" lIns="0" rIns="0" tIns="0" bIns="0"/>
           <a:lstStyle/>
@@ -11006,9 +10209,9 @@
             <a:r>
               <a:rPr sz="1000" b="1" i="0">
                 <a:solidFill>
-                  <a:srgbClr val="0C0D10"/>
-                </a:solidFill>
-                <a:latin typeface="Inter"/>
+                  <a:srgbClr val="F5F5F5"/>
+                </a:solidFill>
+                <a:latin typeface="Jost"/>
               </a:rPr>
               <a:t>2</a:t>
             </a:r>
@@ -11045,9 +10248,9 @@
             <a:r>
               <a:rPr sz="1250" b="1" i="0">
                 <a:solidFill>
-                  <a:srgbClr val="EBEBEF"/>
-                </a:solidFill>
-                <a:latin typeface="Inter"/>
+                  <a:srgbClr val="0D0D0D"/>
+                </a:solidFill>
+                <a:latin typeface="Jost"/>
               </a:rPr>
               <a:t>Structured claim</a:t>
             </a:r>
@@ -11061,9 +10264,9 @@
             <a:r>
               <a:rPr sz="950" b="0" i="0">
                 <a:solidFill>
-                  <a:srgbClr val="8B8D98"/>
-                </a:solidFill>
-                <a:latin typeface="Inter"/>
+                  <a:srgbClr val="5A5A5A"/>
+                </a:solidFill>
+                <a:latin typeface="Jost"/>
               </a:rPr>
               <a:t>entity: Fed · direction: cut · deadline: Sep FOMC</a:t>
             </a:r>
@@ -11096,9 +10299,9 @@
             <a:r>
               <a:rPr sz="1300" b="1" i="0">
                 <a:solidFill>
-                  <a:srgbClr val="5C5E6A"/>
-                </a:solidFill>
-                <a:latin typeface="Inter"/>
+                  <a:srgbClr val="9A9A9A"/>
+                </a:solidFill>
+                <a:latin typeface="Jost"/>
               </a:rPr>
               <a:t>→</a:t>
             </a:r>
@@ -11122,29 +10325,15 @@
             </a:avLst>
           </a:prstGeom>
           <a:solidFill>
-            <a:srgbClr val="18191E"/>
+            <a:srgbClr val="FFFFFF"/>
           </a:solidFill>
           <a:ln w="9525">
             <a:solidFill>
-              <a:srgbClr val="24252C"/>
+              <a:srgbClr val="E0E0E0"/>
             </a:solidFill>
           </a:ln>
           <a:effectLst/>
         </p:spPr>
-        <p:style>
-          <a:lnRef idx="1">
-            <a:schemeClr val="accent1"/>
-          </a:lnRef>
-          <a:fillRef idx="3">
-            <a:schemeClr val="accent1"/>
-          </a:fillRef>
-          <a:effectRef idx="2">
-            <a:schemeClr val="accent1"/>
-          </a:effectRef>
-          <a:fontRef idx="minor">
-            <a:schemeClr val="lt1"/>
-          </a:fontRef>
-        </p:style>
         <p:txBody>
           <a:bodyPr rtlCol="0" anchor="ctr"/>
           <a:lstStyle/>
@@ -11168,27 +10357,13 @@
             <a:avLst/>
           </a:prstGeom>
           <a:solidFill>
-            <a:srgbClr val="D97706"/>
+            <a:srgbClr val="0D0D0D"/>
           </a:solidFill>
           <a:ln>
             <a:noFill/>
           </a:ln>
           <a:effectLst/>
         </p:spPr>
-        <p:style>
-          <a:lnRef idx="1">
-            <a:schemeClr val="accent1"/>
-          </a:lnRef>
-          <a:fillRef idx="3">
-            <a:schemeClr val="accent1"/>
-          </a:fillRef>
-          <a:effectRef idx="2">
-            <a:schemeClr val="accent1"/>
-          </a:effectRef>
-          <a:fontRef idx="minor">
-            <a:schemeClr val="lt1"/>
-          </a:fontRef>
-        </p:style>
         <p:txBody>
           <a:bodyPr rtlCol="0" anchor="ctr" lIns="0" rIns="0" tIns="0" bIns="0"/>
           <a:lstStyle/>
@@ -11197,9 +10372,9 @@
             <a:r>
               <a:rPr sz="1000" b="1" i="0">
                 <a:solidFill>
-                  <a:srgbClr val="0C0D10"/>
-                </a:solidFill>
-                <a:latin typeface="Inter"/>
+                  <a:srgbClr val="F5F5F5"/>
+                </a:solidFill>
+                <a:latin typeface="Jost"/>
               </a:rPr>
               <a:t>3</a:t>
             </a:r>
@@ -11236,9 +10411,9 @@
             <a:r>
               <a:rPr sz="1250" b="1" i="0">
                 <a:solidFill>
-                  <a:srgbClr val="EBEBEF"/>
-                </a:solidFill>
-                <a:latin typeface="Inter"/>
+                  <a:srgbClr val="0D0D0D"/>
+                </a:solidFill>
+                <a:latin typeface="Jost"/>
               </a:rPr>
               <a:t>Matched market</a:t>
             </a:r>
@@ -11252,9 +10427,9 @@
             <a:r>
               <a:rPr sz="950" b="0" i="0">
                 <a:solidFill>
-                  <a:srgbClr val="8B8D98"/>
-                </a:solidFill>
-                <a:latin typeface="Inter"/>
+                  <a:srgbClr val="5A5A5A"/>
+                </a:solidFill>
+                <a:latin typeface="Jost"/>
               </a:rPr>
               <a:t>Kalshi 'Fed cut by Sept?' YES 38¢ → BUY YES · EV +0.14</a:t>
             </a:r>
@@ -11287,9 +10462,9 @@
             <a:r>
               <a:rPr sz="1300" b="1" i="0">
                 <a:solidFill>
-                  <a:srgbClr val="5C5E6A"/>
-                </a:solidFill>
-                <a:latin typeface="Inter"/>
+                  <a:srgbClr val="9A9A9A"/>
+                </a:solidFill>
+                <a:latin typeface="Jost"/>
               </a:rPr>
               <a:t>→</a:t>
             </a:r>
@@ -11313,29 +10488,15 @@
             </a:avLst>
           </a:prstGeom>
           <a:solidFill>
-            <a:srgbClr val="18191E"/>
+            <a:srgbClr val="FFFFFF"/>
           </a:solidFill>
           <a:ln w="9525">
             <a:solidFill>
-              <a:srgbClr val="24252C"/>
+              <a:srgbClr val="E0E0E0"/>
             </a:solidFill>
           </a:ln>
           <a:effectLst/>
         </p:spPr>
-        <p:style>
-          <a:lnRef idx="1">
-            <a:schemeClr val="accent1"/>
-          </a:lnRef>
-          <a:fillRef idx="3">
-            <a:schemeClr val="accent1"/>
-          </a:fillRef>
-          <a:effectRef idx="2">
-            <a:schemeClr val="accent1"/>
-          </a:effectRef>
-          <a:fontRef idx="minor">
-            <a:schemeClr val="lt1"/>
-          </a:fontRef>
-        </p:style>
         <p:txBody>
           <a:bodyPr rtlCol="0" anchor="ctr"/>
           <a:lstStyle/>
@@ -11359,27 +10520,13 @@
             <a:avLst/>
           </a:prstGeom>
           <a:solidFill>
-            <a:srgbClr val="F43F5E"/>
+            <a:srgbClr val="0D0D0D"/>
           </a:solidFill>
           <a:ln>
             <a:noFill/>
           </a:ln>
           <a:effectLst/>
         </p:spPr>
-        <p:style>
-          <a:lnRef idx="1">
-            <a:schemeClr val="accent1"/>
-          </a:lnRef>
-          <a:fillRef idx="3">
-            <a:schemeClr val="accent1"/>
-          </a:fillRef>
-          <a:effectRef idx="2">
-            <a:schemeClr val="accent1"/>
-          </a:effectRef>
-          <a:fontRef idx="minor">
-            <a:schemeClr val="lt1"/>
-          </a:fontRef>
-        </p:style>
         <p:txBody>
           <a:bodyPr rtlCol="0" anchor="ctr" lIns="0" rIns="0" tIns="0" bIns="0"/>
           <a:lstStyle/>
@@ -11388,9 +10535,9 @@
             <a:r>
               <a:rPr sz="1000" b="1" i="0">
                 <a:solidFill>
-                  <a:srgbClr val="0C0D10"/>
-                </a:solidFill>
-                <a:latin typeface="Inter"/>
+                  <a:srgbClr val="F5F5F5"/>
+                </a:solidFill>
+                <a:latin typeface="Jost"/>
               </a:rPr>
               <a:t>4</a:t>
             </a:r>
@@ -11427,9 +10574,9 @@
             <a:r>
               <a:rPr sz="1250" b="1" i="0">
                 <a:solidFill>
-                  <a:srgbClr val="EBEBEF"/>
-                </a:solidFill>
-                <a:latin typeface="Inter"/>
+                  <a:srgbClr val="0D0D0D"/>
+                </a:solidFill>
+                <a:latin typeface="Jost"/>
               </a:rPr>
               <a:t>Settled + scored</a:t>
             </a:r>
@@ -11443,9 +10590,9 @@
             <a:r>
               <a:rPr sz="950" b="0" i="0">
                 <a:solidFill>
-                  <a:srgbClr val="8B8D98"/>
-                </a:solidFill>
-                <a:latin typeface="Inter"/>
+                  <a:srgbClr val="5A5A5A"/>
+                </a:solidFill>
+                <a:latin typeface="Jost"/>
               </a:rPr>
               <a:t>CORRECT · credibility ↑ · +$1.63 paper P&amp;L</a:t>
             </a:r>
@@ -11476,13 +10623,13 @@
           <a:p>
             <a:pPr algn="ctr"/>
             <a:r>
-              <a:rPr sz="1200" b="1" i="0" spc="80">
-                <a:solidFill>
-                  <a:srgbClr val="5C5E6A"/>
-                </a:solidFill>
-                <a:latin typeface="Inter"/>
-              </a:rPr>
-              <a:t>Claim  →  Market  →  Settled truth.</a:t>
+              <a:rPr sz="1300" b="0" i="1" spc="120">
+                <a:solidFill>
+                  <a:srgbClr val="9A9A9A"/>
+                </a:solidFill>
+                <a:latin typeface="Lora"/>
+              </a:rPr>
+              <a:t>claim  →  market  →  settled truth.</a:t>
             </a:r>
           </a:p>
         </p:txBody>
@@ -11520,27 +10667,13 @@
             <a:avLst/>
           </a:prstGeom>
           <a:solidFill>
-            <a:srgbClr val="0C0D10"/>
+            <a:srgbClr val="F5F5F5"/>
           </a:solidFill>
           <a:ln>
             <a:noFill/>
           </a:ln>
           <a:effectLst/>
         </p:spPr>
-        <p:style>
-          <a:lnRef idx="1">
-            <a:schemeClr val="accent1"/>
-          </a:lnRef>
-          <a:fillRef idx="3">
-            <a:schemeClr val="accent1"/>
-          </a:fillRef>
-          <a:effectRef idx="2">
-            <a:schemeClr val="accent1"/>
-          </a:effectRef>
-          <a:fontRef idx="minor">
-            <a:schemeClr val="lt1"/>
-          </a:fontRef>
-        </p:style>
         <p:txBody>
           <a:bodyPr rtlCol="0" anchor="ctr"/>
           <a:lstStyle/>
@@ -11572,11 +10705,11 @@
           <a:lstStyle/>
           <a:p>
             <a:r>
-              <a:rPr sz="1250" b="1" i="0" spc="220">
-                <a:solidFill>
-                  <a:srgbClr val="6366F1"/>
-                </a:solidFill>
-                <a:latin typeface="Inter"/>
+              <a:rPr sz="1100" b="0" i="0" spc="260">
+                <a:solidFill>
+                  <a:srgbClr val="9A9A9A"/>
+                </a:solidFill>
+                <a:latin typeface="Jost"/>
               </a:rPr>
               <a:t>HOW IT WORKS</a:t>
             </a:r>
@@ -11608,9 +10741,9 @@
             <a:r>
               <a:rPr sz="900" b="0" i="0">
                 <a:solidFill>
-                  <a:srgbClr val="5C5E6A"/>
-                </a:solidFill>
-                <a:latin typeface="Inter"/>
+                  <a:srgbClr val="9A9A9A"/>
+                </a:solidFill>
+                <a:latin typeface="Jost"/>
               </a:rPr>
               <a:t>narve.ai — confidential</a:t>
             </a:r>
@@ -11643,9 +10776,9 @@
             <a:r>
               <a:rPr sz="900" b="0" i="0">
                 <a:solidFill>
-                  <a:srgbClr val="5C5E6A"/>
-                </a:solidFill>
-                <a:latin typeface="Inter"/>
+                  <a:srgbClr val="9A9A9A"/>
+                </a:solidFill>
+                <a:latin typeface="Jost"/>
               </a:rPr>
               <a:t>04 / 14</a:t>
             </a:r>
@@ -11680,13 +10813,22 @@
               </a:lnSpc>
             </a:pPr>
             <a:r>
-              <a:rPr sz="2600" b="1" i="0" spc="-30">
-                <a:solidFill>
-                  <a:srgbClr val="EBEBEF"/>
-                </a:solidFill>
-                <a:latin typeface="Inter"/>
-              </a:rPr>
-              <a:t>An 11-stage pipeline closes the loop everyone else skips: claim → settlement.</a:t>
+              <a:rPr sz="2700" b="0" i="0" spc="-50">
+                <a:solidFill>
+                  <a:srgbClr val="0D0D0D"/>
+                </a:solidFill>
+                <a:latin typeface="Jost"/>
+              </a:rPr>
+              <a:t>An 11-stage pipeline closes the loop everyone else skips: </a:t>
+            </a:r>
+            <a:r>
+              <a:rPr sz="2700" b="0" i="1" spc="-30">
+                <a:solidFill>
+                  <a:srgbClr val="0D0D0D"/>
+                </a:solidFill>
+                <a:latin typeface="Lora"/>
+              </a:rPr>
+              <a:t>claim → settlement.</a:t>
             </a:r>
           </a:p>
         </p:txBody>
@@ -11708,29 +10850,15 @@
             </a:avLst>
           </a:prstGeom>
           <a:solidFill>
-            <a:srgbClr val="18191E"/>
+            <a:srgbClr val="FFFFFF"/>
           </a:solidFill>
           <a:ln w="9525">
             <a:solidFill>
-              <a:srgbClr val="24252C"/>
+              <a:srgbClr val="E0E0E0"/>
             </a:solidFill>
           </a:ln>
           <a:effectLst/>
         </p:spPr>
-        <p:style>
-          <a:lnRef idx="1">
-            <a:schemeClr val="accent1"/>
-          </a:lnRef>
-          <a:fillRef idx="3">
-            <a:schemeClr val="accent1"/>
-          </a:fillRef>
-          <a:effectRef idx="2">
-            <a:schemeClr val="accent1"/>
-          </a:effectRef>
-          <a:fontRef idx="minor">
-            <a:schemeClr val="lt1"/>
-          </a:fontRef>
-        </p:style>
         <p:txBody>
           <a:bodyPr rtlCol="0" anchor="ctr"/>
           <a:lstStyle/>
@@ -11769,18 +10897,18 @@
             <a:r>
               <a:rPr sz="950" b="1" i="0">
                 <a:solidFill>
-                  <a:srgbClr val="6366F1"/>
-                </a:solidFill>
-                <a:latin typeface="Inter"/>
+                  <a:srgbClr val="0D0D0D"/>
+                </a:solidFill>
+                <a:latin typeface="Jost"/>
               </a:rPr>
               <a:t>1  </a:t>
             </a:r>
             <a:r>
               <a:rPr sz="1050" b="1" i="0">
                 <a:solidFill>
-                  <a:srgbClr val="EBEBEF"/>
-                </a:solidFill>
-                <a:latin typeface="Inter"/>
+                  <a:srgbClr val="0D0D0D"/>
+                </a:solidFill>
+                <a:latin typeface="Jost"/>
               </a:rPr>
               <a:t>Sync markets</a:t>
             </a:r>
@@ -11813,9 +10941,9 @@
             <a:r>
               <a:rPr sz="1100" b="1" i="0">
                 <a:solidFill>
-                  <a:srgbClr val="5C5E6A"/>
-                </a:solidFill>
-                <a:latin typeface="Inter"/>
+                  <a:srgbClr val="9A9A9A"/>
+                </a:solidFill>
+                <a:latin typeface="Jost"/>
               </a:rPr>
               <a:t>→</a:t>
             </a:r>
@@ -11839,29 +10967,15 @@
             </a:avLst>
           </a:prstGeom>
           <a:solidFill>
-            <a:srgbClr val="18191E"/>
+            <a:srgbClr val="FFFFFF"/>
           </a:solidFill>
           <a:ln w="9525">
             <a:solidFill>
-              <a:srgbClr val="24252C"/>
+              <a:srgbClr val="E0E0E0"/>
             </a:solidFill>
           </a:ln>
           <a:effectLst/>
         </p:spPr>
-        <p:style>
-          <a:lnRef idx="1">
-            <a:schemeClr val="accent1"/>
-          </a:lnRef>
-          <a:fillRef idx="3">
-            <a:schemeClr val="accent1"/>
-          </a:fillRef>
-          <a:effectRef idx="2">
-            <a:schemeClr val="accent1"/>
-          </a:effectRef>
-          <a:fontRef idx="minor">
-            <a:schemeClr val="lt1"/>
-          </a:fontRef>
-        </p:style>
         <p:txBody>
           <a:bodyPr rtlCol="0" anchor="ctr"/>
           <a:lstStyle/>
@@ -11900,18 +11014,18 @@
             <a:r>
               <a:rPr sz="950" b="1" i="0">
                 <a:solidFill>
-                  <a:srgbClr val="6366F1"/>
-                </a:solidFill>
-                <a:latin typeface="Inter"/>
+                  <a:srgbClr val="0D0D0D"/>
+                </a:solidFill>
+                <a:latin typeface="Jost"/>
               </a:rPr>
               <a:t>2  </a:t>
             </a:r>
             <a:r>
               <a:rPr sz="1050" b="1" i="0">
                 <a:solidFill>
-                  <a:srgbClr val="EBEBEF"/>
-                </a:solidFill>
-                <a:latin typeface="Inter"/>
+                  <a:srgbClr val="0D0D0D"/>
+                </a:solidFill>
+                <a:latin typeface="Jost"/>
               </a:rPr>
               <a:t>Scrape</a:t>
             </a:r>
@@ -11944,9 +11058,9 @@
             <a:r>
               <a:rPr sz="1100" b="1" i="0">
                 <a:solidFill>
-                  <a:srgbClr val="5C5E6A"/>
-                </a:solidFill>
-                <a:latin typeface="Inter"/>
+                  <a:srgbClr val="9A9A9A"/>
+                </a:solidFill>
+                <a:latin typeface="Jost"/>
               </a:rPr>
               <a:t>→</a:t>
             </a:r>
@@ -11970,29 +11084,15 @@
             </a:avLst>
           </a:prstGeom>
           <a:solidFill>
-            <a:srgbClr val="18191E"/>
+            <a:srgbClr val="FFFFFF"/>
           </a:solidFill>
           <a:ln w="9525">
             <a:solidFill>
-              <a:srgbClr val="24252C"/>
+              <a:srgbClr val="E0E0E0"/>
             </a:solidFill>
           </a:ln>
           <a:effectLst/>
         </p:spPr>
-        <p:style>
-          <a:lnRef idx="1">
-            <a:schemeClr val="accent1"/>
-          </a:lnRef>
-          <a:fillRef idx="3">
-            <a:schemeClr val="accent1"/>
-          </a:fillRef>
-          <a:effectRef idx="2">
-            <a:schemeClr val="accent1"/>
-          </a:effectRef>
-          <a:fontRef idx="minor">
-            <a:schemeClr val="lt1"/>
-          </a:fontRef>
-        </p:style>
         <p:txBody>
           <a:bodyPr rtlCol="0" anchor="ctr"/>
           <a:lstStyle/>
@@ -12031,18 +11131,18 @@
             <a:r>
               <a:rPr sz="950" b="1" i="0">
                 <a:solidFill>
-                  <a:srgbClr val="6366F1"/>
-                </a:solidFill>
-                <a:latin typeface="Inter"/>
+                  <a:srgbClr val="0D0D0D"/>
+                </a:solidFill>
+                <a:latin typeface="Jost"/>
               </a:rPr>
               <a:t>3  </a:t>
             </a:r>
             <a:r>
               <a:rPr sz="1050" b="1" i="0">
                 <a:solidFill>
-                  <a:srgbClr val="EBEBEF"/>
-                </a:solidFill>
-                <a:latin typeface="Inter"/>
+                  <a:srgbClr val="0D0D0D"/>
+                </a:solidFill>
+                <a:latin typeface="Jost"/>
               </a:rPr>
               <a:t>Dedupe</a:t>
             </a:r>
@@ -12075,9 +11175,9 @@
             <a:r>
               <a:rPr sz="1100" b="1" i="0">
                 <a:solidFill>
-                  <a:srgbClr val="5C5E6A"/>
-                </a:solidFill>
-                <a:latin typeface="Inter"/>
+                  <a:srgbClr val="9A9A9A"/>
+                </a:solidFill>
+                <a:latin typeface="Jost"/>
               </a:rPr>
               <a:t>→</a:t>
             </a:r>
@@ -12101,29 +11201,15 @@
             </a:avLst>
           </a:prstGeom>
           <a:solidFill>
-            <a:srgbClr val="18191E"/>
+            <a:srgbClr val="FFFFFF"/>
           </a:solidFill>
           <a:ln w="9525">
             <a:solidFill>
-              <a:srgbClr val="24252C"/>
+              <a:srgbClr val="E0E0E0"/>
             </a:solidFill>
           </a:ln>
           <a:effectLst/>
         </p:spPr>
-        <p:style>
-          <a:lnRef idx="1">
-            <a:schemeClr val="accent1"/>
-          </a:lnRef>
-          <a:fillRef idx="3">
-            <a:schemeClr val="accent1"/>
-          </a:fillRef>
-          <a:effectRef idx="2">
-            <a:schemeClr val="accent1"/>
-          </a:effectRef>
-          <a:fontRef idx="minor">
-            <a:schemeClr val="lt1"/>
-          </a:fontRef>
-        </p:style>
         <p:txBody>
           <a:bodyPr rtlCol="0" anchor="ctr"/>
           <a:lstStyle/>
@@ -12162,18 +11248,18 @@
             <a:r>
               <a:rPr sz="950" b="1" i="0">
                 <a:solidFill>
-                  <a:srgbClr val="6366F1"/>
-                </a:solidFill>
-                <a:latin typeface="Inter"/>
+                  <a:srgbClr val="0D0D0D"/>
+                </a:solidFill>
+                <a:latin typeface="Jost"/>
               </a:rPr>
               <a:t>4  </a:t>
             </a:r>
             <a:r>
               <a:rPr sz="1050" b="1" i="0">
                 <a:solidFill>
-                  <a:srgbClr val="EBEBEF"/>
-                </a:solidFill>
-                <a:latin typeface="Inter"/>
+                  <a:srgbClr val="0D0D0D"/>
+                </a:solidFill>
+                <a:latin typeface="Jost"/>
               </a:rPr>
               <a:t>Extract</a:t>
             </a:r>
@@ -12206,9 +11292,9 @@
             <a:r>
               <a:rPr sz="1100" b="1" i="0">
                 <a:solidFill>
-                  <a:srgbClr val="5C5E6A"/>
-                </a:solidFill>
-                <a:latin typeface="Inter"/>
+                  <a:srgbClr val="9A9A9A"/>
+                </a:solidFill>
+                <a:latin typeface="Jost"/>
               </a:rPr>
               <a:t>→</a:t>
             </a:r>
@@ -12232,29 +11318,15 @@
             </a:avLst>
           </a:prstGeom>
           <a:solidFill>
-            <a:srgbClr val="18191E"/>
+            <a:srgbClr val="FFFFFF"/>
           </a:solidFill>
           <a:ln w="9525">
             <a:solidFill>
-              <a:srgbClr val="24252C"/>
+              <a:srgbClr val="E0E0E0"/>
             </a:solidFill>
           </a:ln>
           <a:effectLst/>
         </p:spPr>
-        <p:style>
-          <a:lnRef idx="1">
-            <a:schemeClr val="accent1"/>
-          </a:lnRef>
-          <a:fillRef idx="3">
-            <a:schemeClr val="accent1"/>
-          </a:fillRef>
-          <a:effectRef idx="2">
-            <a:schemeClr val="accent1"/>
-          </a:effectRef>
-          <a:fontRef idx="minor">
-            <a:schemeClr val="lt1"/>
-          </a:fontRef>
-        </p:style>
         <p:txBody>
           <a:bodyPr rtlCol="0" anchor="ctr"/>
           <a:lstStyle/>
@@ -12293,18 +11365,18 @@
             <a:r>
               <a:rPr sz="950" b="1" i="0">
                 <a:solidFill>
-                  <a:srgbClr val="6366F1"/>
-                </a:solidFill>
-                <a:latin typeface="Inter"/>
+                  <a:srgbClr val="0D0D0D"/>
+                </a:solidFill>
+                <a:latin typeface="Jost"/>
               </a:rPr>
               <a:t>5  </a:t>
             </a:r>
             <a:r>
               <a:rPr sz="1050" b="1" i="0">
                 <a:solidFill>
-                  <a:srgbClr val="EBEBEF"/>
-                </a:solidFill>
-                <a:latin typeface="Inter"/>
+                  <a:srgbClr val="0D0D0D"/>
+                </a:solidFill>
+                <a:latin typeface="Jost"/>
               </a:rPr>
               <a:t>Match</a:t>
             </a:r>
@@ -12337,9 +11409,9 @@
             <a:r>
               <a:rPr sz="1100" b="1" i="0">
                 <a:solidFill>
-                  <a:srgbClr val="5C5E6A"/>
-                </a:solidFill>
-                <a:latin typeface="Inter"/>
+                  <a:srgbClr val="9A9A9A"/>
+                </a:solidFill>
+                <a:latin typeface="Jost"/>
               </a:rPr>
               <a:t>→</a:t>
             </a:r>
@@ -12363,29 +11435,15 @@
             </a:avLst>
           </a:prstGeom>
           <a:solidFill>
-            <a:srgbClr val="1F2027"/>
+            <a:srgbClr val="FFFFFF"/>
           </a:solidFill>
           <a:ln w="9525">
             <a:solidFill>
-              <a:srgbClr val="F43F5E"/>
+              <a:srgbClr val="0D0D0D"/>
             </a:solidFill>
           </a:ln>
           <a:effectLst/>
         </p:spPr>
-        <p:style>
-          <a:lnRef idx="1">
-            <a:schemeClr val="accent1"/>
-          </a:lnRef>
-          <a:fillRef idx="3">
-            <a:schemeClr val="accent1"/>
-          </a:fillRef>
-          <a:effectRef idx="2">
-            <a:schemeClr val="accent1"/>
-          </a:effectRef>
-          <a:fontRef idx="minor">
-            <a:schemeClr val="lt1"/>
-          </a:fontRef>
-        </p:style>
         <p:txBody>
           <a:bodyPr rtlCol="0" anchor="ctr"/>
           <a:lstStyle/>
@@ -12424,18 +11482,18 @@
             <a:r>
               <a:rPr sz="950" b="1" i="0">
                 <a:solidFill>
-                  <a:srgbClr val="6366F1"/>
-                </a:solidFill>
-                <a:latin typeface="Inter"/>
+                  <a:srgbClr val="0D0D0D"/>
+                </a:solidFill>
+                <a:latin typeface="Jost"/>
               </a:rPr>
               <a:t>6  </a:t>
             </a:r>
             <a:r>
               <a:rPr sz="1050" b="1" i="0">
                 <a:solidFill>
-                  <a:srgbClr val="EBEBEF"/>
-                </a:solidFill>
-                <a:latin typeface="Inter"/>
+                  <a:srgbClr val="0D0D0D"/>
+                </a:solidFill>
+                <a:latin typeface="Jost"/>
               </a:rPr>
               <a:t>Resolve</a:t>
             </a:r>
@@ -12459,29 +11517,15 @@
             </a:avLst>
           </a:prstGeom>
           <a:solidFill>
-            <a:srgbClr val="1F2027"/>
+            <a:srgbClr val="FFFFFF"/>
           </a:solidFill>
           <a:ln w="9525">
             <a:solidFill>
-              <a:srgbClr val="F43F5E"/>
+              <a:srgbClr val="0D0D0D"/>
             </a:solidFill>
           </a:ln>
           <a:effectLst/>
         </p:spPr>
-        <p:style>
-          <a:lnRef idx="1">
-            <a:schemeClr val="accent1"/>
-          </a:lnRef>
-          <a:fillRef idx="3">
-            <a:schemeClr val="accent1"/>
-          </a:fillRef>
-          <a:effectRef idx="2">
-            <a:schemeClr val="accent1"/>
-          </a:effectRef>
-          <a:fontRef idx="minor">
-            <a:schemeClr val="lt1"/>
-          </a:fontRef>
-        </p:style>
         <p:txBody>
           <a:bodyPr rtlCol="0" anchor="ctr"/>
           <a:lstStyle/>
@@ -12520,18 +11564,18 @@
             <a:r>
               <a:rPr sz="950" b="1" i="0">
                 <a:solidFill>
-                  <a:srgbClr val="6366F1"/>
-                </a:solidFill>
-                <a:latin typeface="Inter"/>
+                  <a:srgbClr val="0D0D0D"/>
+                </a:solidFill>
+                <a:latin typeface="Jost"/>
               </a:rPr>
               <a:t>7  </a:t>
             </a:r>
             <a:r>
               <a:rPr sz="1050" b="1" i="0">
                 <a:solidFill>
-                  <a:srgbClr val="EBEBEF"/>
-                </a:solidFill>
-                <a:latin typeface="Inter"/>
+                  <a:srgbClr val="0D0D0D"/>
+                </a:solidFill>
+                <a:latin typeface="Jost"/>
               </a:rPr>
               <a:t>Score</a:t>
             </a:r>
@@ -12564,9 +11608,9 @@
             <a:r>
               <a:rPr sz="1100" b="1" i="0">
                 <a:solidFill>
-                  <a:srgbClr val="5C5E6A"/>
-                </a:solidFill>
-                <a:latin typeface="Inter"/>
+                  <a:srgbClr val="9A9A9A"/>
+                </a:solidFill>
+                <a:latin typeface="Jost"/>
               </a:rPr>
               <a:t>→</a:t>
             </a:r>
@@ -12590,29 +11634,15 @@
             </a:avLst>
           </a:prstGeom>
           <a:solidFill>
-            <a:srgbClr val="18191E"/>
+            <a:srgbClr val="FFFFFF"/>
           </a:solidFill>
           <a:ln w="9525">
             <a:solidFill>
-              <a:srgbClr val="24252C"/>
+              <a:srgbClr val="E0E0E0"/>
             </a:solidFill>
           </a:ln>
           <a:effectLst/>
         </p:spPr>
-        <p:style>
-          <a:lnRef idx="1">
-            <a:schemeClr val="accent1"/>
-          </a:lnRef>
-          <a:fillRef idx="3">
-            <a:schemeClr val="accent1"/>
-          </a:fillRef>
-          <a:effectRef idx="2">
-            <a:schemeClr val="accent1"/>
-          </a:effectRef>
-          <a:fontRef idx="minor">
-            <a:schemeClr val="lt1"/>
-          </a:fontRef>
-        </p:style>
         <p:txBody>
           <a:bodyPr rtlCol="0" anchor="ctr"/>
           <a:lstStyle/>
@@ -12651,18 +11681,18 @@
             <a:r>
               <a:rPr sz="950" b="1" i="0">
                 <a:solidFill>
-                  <a:srgbClr val="6366F1"/>
-                </a:solidFill>
-                <a:latin typeface="Inter"/>
+                  <a:srgbClr val="0D0D0D"/>
+                </a:solidFill>
+                <a:latin typeface="Jost"/>
               </a:rPr>
               <a:t>8  </a:t>
             </a:r>
             <a:r>
               <a:rPr sz="1050" b="1" i="0">
                 <a:solidFill>
-                  <a:srgbClr val="EBEBEF"/>
-                </a:solidFill>
-                <a:latin typeface="Inter"/>
+                  <a:srgbClr val="0D0D0D"/>
+                </a:solidFill>
+                <a:latin typeface="Jost"/>
               </a:rPr>
               <a:t>Signal</a:t>
             </a:r>
@@ -12695,9 +11725,9 @@
             <a:r>
               <a:rPr sz="1100" b="1" i="0">
                 <a:solidFill>
-                  <a:srgbClr val="5C5E6A"/>
-                </a:solidFill>
-                <a:latin typeface="Inter"/>
+                  <a:srgbClr val="9A9A9A"/>
+                </a:solidFill>
+                <a:latin typeface="Jost"/>
               </a:rPr>
               <a:t>→</a:t>
             </a:r>
@@ -12721,29 +11751,15 @@
             </a:avLst>
           </a:prstGeom>
           <a:solidFill>
-            <a:srgbClr val="18191E"/>
+            <a:srgbClr val="FFFFFF"/>
           </a:solidFill>
           <a:ln w="9525">
             <a:solidFill>
-              <a:srgbClr val="24252C"/>
+              <a:srgbClr val="E0E0E0"/>
             </a:solidFill>
           </a:ln>
           <a:effectLst/>
         </p:spPr>
-        <p:style>
-          <a:lnRef idx="1">
-            <a:schemeClr val="accent1"/>
-          </a:lnRef>
-          <a:fillRef idx="3">
-            <a:schemeClr val="accent1"/>
-          </a:fillRef>
-          <a:effectRef idx="2">
-            <a:schemeClr val="accent1"/>
-          </a:effectRef>
-          <a:fontRef idx="minor">
-            <a:schemeClr val="lt1"/>
-          </a:fontRef>
-        </p:style>
         <p:txBody>
           <a:bodyPr rtlCol="0" anchor="ctr"/>
           <a:lstStyle/>
@@ -12782,18 +11798,18 @@
             <a:r>
               <a:rPr sz="950" b="1" i="0">
                 <a:solidFill>
-                  <a:srgbClr val="6366F1"/>
-                </a:solidFill>
-                <a:latin typeface="Inter"/>
+                  <a:srgbClr val="0D0D0D"/>
+                </a:solidFill>
+                <a:latin typeface="Jost"/>
               </a:rPr>
               <a:t>9  </a:t>
             </a:r>
             <a:r>
               <a:rPr sz="1050" b="1" i="0">
                 <a:solidFill>
-                  <a:srgbClr val="EBEBEF"/>
-                </a:solidFill>
-                <a:latin typeface="Inter"/>
+                  <a:srgbClr val="0D0D0D"/>
+                </a:solidFill>
+                <a:latin typeface="Jost"/>
               </a:rPr>
               <a:t>Paper-trade</a:t>
             </a:r>
@@ -12826,9 +11842,9 @@
             <a:r>
               <a:rPr sz="1100" b="1" i="0">
                 <a:solidFill>
-                  <a:srgbClr val="5C5E6A"/>
-                </a:solidFill>
-                <a:latin typeface="Inter"/>
+                  <a:srgbClr val="9A9A9A"/>
+                </a:solidFill>
+                <a:latin typeface="Jost"/>
               </a:rPr>
               <a:t>→</a:t>
             </a:r>
@@ -12852,29 +11868,15 @@
             </a:avLst>
           </a:prstGeom>
           <a:solidFill>
-            <a:srgbClr val="18191E"/>
+            <a:srgbClr val="FFFFFF"/>
           </a:solidFill>
           <a:ln w="9525">
             <a:solidFill>
-              <a:srgbClr val="24252C"/>
+              <a:srgbClr val="E0E0E0"/>
             </a:solidFill>
           </a:ln>
           <a:effectLst/>
         </p:spPr>
-        <p:style>
-          <a:lnRef idx="1">
-            <a:schemeClr val="accent1"/>
-          </a:lnRef>
-          <a:fillRef idx="3">
-            <a:schemeClr val="accent1"/>
-          </a:fillRef>
-          <a:effectRef idx="2">
-            <a:schemeClr val="accent1"/>
-          </a:effectRef>
-          <a:fontRef idx="minor">
-            <a:schemeClr val="lt1"/>
-          </a:fontRef>
-        </p:style>
         <p:txBody>
           <a:bodyPr rtlCol="0" anchor="ctr"/>
           <a:lstStyle/>
@@ -12913,18 +11915,18 @@
             <a:r>
               <a:rPr sz="950" b="1" i="0">
                 <a:solidFill>
-                  <a:srgbClr val="6366F1"/>
-                </a:solidFill>
-                <a:latin typeface="Inter"/>
+                  <a:srgbClr val="0D0D0D"/>
+                </a:solidFill>
+                <a:latin typeface="Jost"/>
               </a:rPr>
               <a:t>10  </a:t>
             </a:r>
             <a:r>
               <a:rPr sz="1050" b="1" i="0">
                 <a:solidFill>
-                  <a:srgbClr val="EBEBEF"/>
-                </a:solidFill>
-                <a:latin typeface="Inter"/>
+                  <a:srgbClr val="0D0D0D"/>
+                </a:solidFill>
+                <a:latin typeface="Jost"/>
               </a:rPr>
               <a:t>Monitor + alert</a:t>
             </a:r>
@@ -12957,9 +11959,9 @@
             <a:r>
               <a:rPr sz="1100" b="1" i="0">
                 <a:solidFill>
-                  <a:srgbClr val="5C5E6A"/>
-                </a:solidFill>
-                <a:latin typeface="Inter"/>
+                  <a:srgbClr val="9A9A9A"/>
+                </a:solidFill>
+                <a:latin typeface="Jost"/>
               </a:rPr>
               <a:t>→</a:t>
             </a:r>
@@ -12983,29 +11985,15 @@
             </a:avLst>
           </a:prstGeom>
           <a:solidFill>
-            <a:srgbClr val="18191E"/>
+            <a:srgbClr val="FFFFFF"/>
           </a:solidFill>
           <a:ln w="9525">
             <a:solidFill>
-              <a:srgbClr val="24252C"/>
+              <a:srgbClr val="E0E0E0"/>
             </a:solidFill>
           </a:ln>
           <a:effectLst/>
         </p:spPr>
-        <p:style>
-          <a:lnRef idx="1">
-            <a:schemeClr val="accent1"/>
-          </a:lnRef>
-          <a:fillRef idx="3">
-            <a:schemeClr val="accent1"/>
-          </a:fillRef>
-          <a:effectRef idx="2">
-            <a:schemeClr val="accent1"/>
-          </a:effectRef>
-          <a:fontRef idx="minor">
-            <a:schemeClr val="lt1"/>
-          </a:fontRef>
-        </p:style>
         <p:txBody>
           <a:bodyPr rtlCol="0" anchor="ctr"/>
           <a:lstStyle/>
@@ -13044,18 +12032,18 @@
             <a:r>
               <a:rPr sz="950" b="1" i="0">
                 <a:solidFill>
-                  <a:srgbClr val="6366F1"/>
-                </a:solidFill>
-                <a:latin typeface="Inter"/>
+                  <a:srgbClr val="0D0D0D"/>
+                </a:solidFill>
+                <a:latin typeface="Jost"/>
               </a:rPr>
               <a:t>11  </a:t>
             </a:r>
             <a:r>
               <a:rPr sz="1050" b="1" i="0">
                 <a:solidFill>
-                  <a:srgbClr val="EBEBEF"/>
-                </a:solidFill>
-                <a:latin typeface="Inter"/>
+                  <a:srgbClr val="0D0D0D"/>
+                </a:solidFill>
+                <a:latin typeface="Jost"/>
               </a:rPr>
               <a:t>Backtest</a:t>
             </a:r>
@@ -13092,19 +12080,19 @@
             <a:r>
               <a:rPr sz="1050" b="1" i="0">
                 <a:solidFill>
-                  <a:srgbClr val="F43F5E"/>
-                </a:solidFill>
-                <a:latin typeface="Inter"/>
+                  <a:srgbClr val="0D0D0D"/>
+                </a:solidFill>
+                <a:latin typeface="Jost"/>
               </a:rPr>
               <a:t>↺  resolve → score:
 </a:t>
             </a:r>
             <a:r>
-              <a:rPr sz="1000" b="0" i="0">
-                <a:solidFill>
-                  <a:srgbClr val="8B8D98"/>
-                </a:solidFill>
-                <a:latin typeface="Inter"/>
+              <a:rPr sz="1100" b="0" i="1">
+                <a:solidFill>
+                  <a:srgbClr val="5A5A5A"/>
+                </a:solidFill>
+                <a:latin typeface="Lora"/>
               </a:rPr>
               <a:t>the accountability loop</a:t>
             </a:r>
@@ -13142,29 +12130,29 @@
               </a:spcAft>
             </a:pPr>
             <a:r>
+              <a:rPr sz="1350" b="0" i="0">
+                <a:solidFill>
+                  <a:srgbClr val="B0B0B0"/>
+                </a:solidFill>
+                <a:latin typeface="Jost"/>
+              </a:rPr>
+              <a:t>—  </a:t>
+            </a:r>
+            <a:r>
               <a:rPr sz="1350" b="1" i="0">
                 <a:solidFill>
-                  <a:srgbClr val="6366F1"/>
-                </a:solidFill>
-                <a:latin typeface="Inter"/>
-              </a:rPr>
-              <a:t>—  </a:t>
-            </a:r>
-            <a:r>
-              <a:rPr sz="1350" b="1" i="0">
-                <a:solidFill>
-                  <a:srgbClr val="EBEBEF"/>
-                </a:solidFill>
-                <a:latin typeface="Inter"/>
+                  <a:srgbClr val="0D0D0D"/>
+                </a:solidFill>
+                <a:latin typeface="Jost"/>
               </a:rPr>
               <a:t>Cost-engineered extraction. </a:t>
             </a:r>
             <a:r>
               <a:rPr sz="1350" b="0" i="0">
                 <a:solidFill>
-                  <a:srgbClr val="8B8D98"/>
-                </a:solidFill>
-                <a:latin typeface="Inter"/>
+                  <a:srgbClr val="5A5A5A"/>
+                </a:solidFill>
+                <a:latin typeface="Jost"/>
               </a:rPr>
               <a:t>Free regex first, Claude only on misses, cached by content hash — viral reposts cost $0. LLM stage catches ~3–5x more signal than regex alone (internal benchmark).</a:t>
             </a:r>
@@ -13179,29 +12167,29 @@
               </a:spcAft>
             </a:pPr>
             <a:r>
+              <a:rPr sz="1350" b="0" i="0">
+                <a:solidFill>
+                  <a:srgbClr val="B0B0B0"/>
+                </a:solidFill>
+                <a:latin typeface="Jost"/>
+              </a:rPr>
+              <a:t>—  </a:t>
+            </a:r>
+            <a:r>
               <a:rPr sz="1350" b="1" i="0">
                 <a:solidFill>
-                  <a:srgbClr val="6366F1"/>
-                </a:solidFill>
-                <a:latin typeface="Inter"/>
-              </a:rPr>
-              <a:t>—  </a:t>
-            </a:r>
-            <a:r>
-              <a:rPr sz="1350" b="1" i="0">
-                <a:solidFill>
-                  <a:srgbClr val="EBEBEF"/>
-                </a:solidFill>
-                <a:latin typeface="Inter"/>
+                  <a:srgbClr val="0D0D0D"/>
+                </a:solidFill>
+                <a:latin typeface="Jost"/>
               </a:rPr>
               <a:t>Credibility is earned, not asserted. </a:t>
             </a:r>
             <a:r>
               <a:rPr sz="1350" b="0" i="0">
                 <a:solidFill>
-                  <a:srgbClr val="8B8D98"/>
-                </a:solidFill>
-                <a:latin typeface="Inter"/>
+                  <a:srgbClr val="5A5A5A"/>
+                </a:solidFill>
+                <a:latin typeface="Jost"/>
               </a:rPr>
               <a:t>10-prediction / 3-category unlock, 12-hour anti-freeroll rule, 60-day recency decay, Bayesian smoothing.</a:t>
             </a:r>
@@ -13216,29 +12204,29 @@
               </a:spcAft>
             </a:pPr>
             <a:r>
+              <a:rPr sz="1350" b="0" i="0">
+                <a:solidFill>
+                  <a:srgbClr val="B0B0B0"/>
+                </a:solidFill>
+                <a:latin typeface="Jost"/>
+              </a:rPr>
+              <a:t>—  </a:t>
+            </a:r>
+            <a:r>
               <a:rPr sz="1350" b="1" i="0">
                 <a:solidFill>
-                  <a:srgbClr val="6366F1"/>
-                </a:solidFill>
-                <a:latin typeface="Inter"/>
-              </a:rPr>
-              <a:t>—  </a:t>
-            </a:r>
-            <a:r>
-              <a:rPr sz="1350" b="1" i="0">
-                <a:solidFill>
-                  <a:srgbClr val="EBEBEF"/>
-                </a:solidFill>
-                <a:latin typeface="Inter"/>
+                  <a:srgbClr val="0D0D0D"/>
+                </a:solidFill>
+                <a:latin typeface="Jost"/>
               </a:rPr>
               <a:t>Liquidity-honest EV. </a:t>
             </a:r>
             <a:r>
               <a:rPr sz="1350" b="0" i="0">
                 <a:solidFill>
-                  <a:srgbClr val="8B8D98"/>
-                </a:solidFill>
-                <a:latin typeface="Inter"/>
+                  <a:srgbClr val="5A5A5A"/>
+                </a:solidFill>
+                <a:latin typeface="Jost"/>
               </a:rPr>
               <a:t>Order-book walk shows slippage at $100 / $1k / $10k — the “this edge dies past $X” reality midpoint services hide.</a:t>
             </a:r>
@@ -13278,27 +12266,13 @@
             <a:avLst/>
           </a:prstGeom>
           <a:solidFill>
-            <a:srgbClr val="0C0D10"/>
+            <a:srgbClr val="F5F5F5"/>
           </a:solidFill>
           <a:ln>
             <a:noFill/>
           </a:ln>
           <a:effectLst/>
         </p:spPr>
-        <p:style>
-          <a:lnRef idx="1">
-            <a:schemeClr val="accent1"/>
-          </a:lnRef>
-          <a:fillRef idx="3">
-            <a:schemeClr val="accent1"/>
-          </a:fillRef>
-          <a:effectRef idx="2">
-            <a:schemeClr val="accent1"/>
-          </a:effectRef>
-          <a:fontRef idx="minor">
-            <a:schemeClr val="lt1"/>
-          </a:fontRef>
-        </p:style>
         <p:txBody>
           <a:bodyPr rtlCol="0" anchor="ctr"/>
           <a:lstStyle/>
@@ -13330,11 +12304,11 @@
           <a:lstStyle/>
           <a:p>
             <a:r>
-              <a:rPr sz="1250" b="1" i="0" spc="220">
-                <a:solidFill>
-                  <a:srgbClr val="6366F1"/>
-                </a:solidFill>
-                <a:latin typeface="Inter"/>
+              <a:rPr sz="1100" b="0" i="0" spc="260">
+                <a:solidFill>
+                  <a:srgbClr val="9A9A9A"/>
+                </a:solidFill>
+                <a:latin typeface="Jost"/>
               </a:rPr>
               <a:t>WHY NOW</a:t>
             </a:r>
@@ -13366,9 +12340,9 @@
             <a:r>
               <a:rPr sz="900" b="0" i="0">
                 <a:solidFill>
-                  <a:srgbClr val="5C5E6A"/>
-                </a:solidFill>
-                <a:latin typeface="Inter"/>
+                  <a:srgbClr val="9A9A9A"/>
+                </a:solidFill>
+                <a:latin typeface="Jost"/>
               </a:rPr>
               <a:t>narve.ai — confidential</a:t>
             </a:r>
@@ -13401,9 +12375,9 @@
             <a:r>
               <a:rPr sz="900" b="0" i="0">
                 <a:solidFill>
-                  <a:srgbClr val="5C5E6A"/>
-                </a:solidFill>
-                <a:latin typeface="Inter"/>
+                  <a:srgbClr val="9A9A9A"/>
+                </a:solidFill>
+                <a:latin typeface="Jost"/>
               </a:rPr>
               <a:t>05 / 14</a:t>
             </a:r>
@@ -13438,13 +12412,22 @@
               </a:lnSpc>
             </a:pPr>
             <a:r>
-              <a:rPr sz="2600" b="1" i="0" spc="-30">
-                <a:solidFill>
-                  <a:srgbClr val="EBEBEF"/>
-                </a:solidFill>
-                <a:latin typeface="Inter"/>
-              </a:rPr>
-              <a:t>The market ~5x'd in seven months; the intelligence layer barely exists.</a:t>
+              <a:rPr sz="2700" b="0" i="0" spc="-50">
+                <a:solidFill>
+                  <a:srgbClr val="0D0D0D"/>
+                </a:solidFill>
+                <a:latin typeface="Jost"/>
+              </a:rPr>
+              <a:t>The market ~5x'd in seven months; the intelligence layer </a:t>
+            </a:r>
+            <a:r>
+              <a:rPr sz="2700" b="0" i="1" spc="-30">
+                <a:solidFill>
+                  <a:srgbClr val="0D0D0D"/>
+                </a:solidFill>
+                <a:latin typeface="Lora"/>
+              </a:rPr>
+              <a:t>barely exists.</a:t>
             </a:r>
           </a:p>
         </p:txBody>
@@ -13466,29 +12449,15 @@
             </a:avLst>
           </a:prstGeom>
           <a:solidFill>
-            <a:srgbClr val="18191E"/>
+            <a:srgbClr val="FFFFFF"/>
           </a:solidFill>
           <a:ln w="9525">
             <a:solidFill>
-              <a:srgbClr val="24252C"/>
+              <a:srgbClr val="E0E0E0"/>
             </a:solidFill>
           </a:ln>
           <a:effectLst/>
         </p:spPr>
-        <p:style>
-          <a:lnRef idx="1">
-            <a:schemeClr val="accent1"/>
-          </a:lnRef>
-          <a:fillRef idx="3">
-            <a:schemeClr val="accent1"/>
-          </a:fillRef>
-          <a:effectRef idx="2">
-            <a:schemeClr val="accent1"/>
-          </a:effectRef>
-          <a:fontRef idx="minor">
-            <a:schemeClr val="lt1"/>
-          </a:fontRef>
-        </p:style>
         <p:txBody>
           <a:bodyPr rtlCol="0" anchor="ctr"/>
           <a:lstStyle/>
@@ -13505,8 +12474,8 @@
         </p:nvSpPr>
         <p:spPr>
           <a:xfrm>
-            <a:off x="886968" y="2267712"/>
-            <a:ext cx="2131237" cy="1463040"/>
+            <a:off x="905256" y="2286000"/>
+            <a:ext cx="2094661" cy="1426464"/>
           </a:xfrm>
           <a:prstGeom prst="rect">
             <a:avLst/>
@@ -13521,17 +12490,17 @@
           <a:p>
             <a:pPr>
               <a:spcAft>
-                <a:spcPts val="700"/>
+                <a:spcPts val="800"/>
               </a:spcAft>
             </a:pPr>
             <a:r>
-              <a:rPr sz="1150" b="1" i="0" spc="80">
-                <a:solidFill>
-                  <a:srgbClr val="5C5E6A"/>
-                </a:solidFill>
-                <a:latin typeface="Inter"/>
-              </a:rPr>
-              <a:t>Monthly volume</a:t>
+              <a:rPr sz="950" b="0" i="0" spc="160">
+                <a:solidFill>
+                  <a:srgbClr val="9A9A9A"/>
+                </a:solidFill>
+                <a:latin typeface="Jost"/>
+              </a:rPr>
+              <a:t>MONTHLY VOLUME</a:t>
             </a:r>
           </a:p>
           <a:p>
@@ -13541,11 +12510,11 @@
               </a:spcAft>
             </a:pPr>
             <a:r>
-              <a:rPr sz="2100" b="1" i="0" spc="-40">
-                <a:solidFill>
-                  <a:srgbClr val="EBEBEF"/>
-                </a:solidFill>
-                <a:latin typeface="Inter"/>
+              <a:rPr sz="2100" b="0" i="1" spc="-40">
+                <a:solidFill>
+                  <a:srgbClr val="0D0D0D"/>
+                </a:solidFill>
+                <a:latin typeface="Fraunces"/>
               </a:rPr>
               <a:t>&lt;$5B → ~$24B</a:t>
             </a:r>
@@ -13559,9 +12528,9 @@
             <a:r>
               <a:rPr sz="1050" b="0" i="0">
                 <a:solidFill>
-                  <a:srgbClr val="8B8D98"/>
-                </a:solidFill>
-                <a:latin typeface="Inter"/>
+                  <a:srgbClr val="5A5A5A"/>
+                </a:solidFill>
+                <a:latin typeface="Jost"/>
               </a:rPr>
               <a:t>Sep 2025 → Apr 2026 — Pew Research</a:t>
             </a:r>
@@ -13571,52 +12540,6 @@
       <p:sp>
         <p:nvSpPr>
           <p:cNvPr id="9" name="Rounded Rectangle 8"/>
-          <p:cNvSpPr/>
-          <p:nvPr/>
-        </p:nvSpPr>
-        <p:spPr>
-          <a:xfrm>
-            <a:off x="685800" y="2304288"/>
-            <a:ext cx="27432" cy="256032"/>
-          </a:xfrm>
-          <a:prstGeom prst="roundRect">
-            <a:avLst>
-              <a:gd name="adj" fmla="val 50000"/>
-            </a:avLst>
-          </a:prstGeom>
-          <a:solidFill>
-            <a:srgbClr val="6366F1"/>
-          </a:solidFill>
-          <a:ln>
-            <a:noFill/>
-          </a:ln>
-          <a:effectLst/>
-        </p:spPr>
-        <p:style>
-          <a:lnRef idx="1">
-            <a:schemeClr val="accent1"/>
-          </a:lnRef>
-          <a:fillRef idx="3">
-            <a:schemeClr val="accent1"/>
-          </a:fillRef>
-          <a:effectRef idx="2">
-            <a:schemeClr val="accent1"/>
-          </a:effectRef>
-          <a:fontRef idx="minor">
-            <a:schemeClr val="lt1"/>
-          </a:fontRef>
-        </p:style>
-        <p:txBody>
-          <a:bodyPr rtlCol="0" anchor="ctr"/>
-          <a:lstStyle/>
-          <a:p>
-            <a:pPr algn="ctr"/>
-          </a:p>
-        </p:txBody>
-      </p:sp>
-      <p:sp>
-        <p:nvSpPr>
-          <p:cNvPr id="10" name="Rounded Rectangle 9"/>
           <p:cNvSpPr/>
           <p:nvPr/>
         </p:nvSpPr>
@@ -13631,29 +12554,15 @@
             </a:avLst>
           </a:prstGeom>
           <a:solidFill>
-            <a:srgbClr val="18191E"/>
+            <a:srgbClr val="FFFFFF"/>
           </a:solidFill>
           <a:ln w="9525">
             <a:solidFill>
-              <a:srgbClr val="24252C"/>
+              <a:srgbClr val="E0E0E0"/>
             </a:solidFill>
           </a:ln>
           <a:effectLst/>
         </p:spPr>
-        <p:style>
-          <a:lnRef idx="1">
-            <a:schemeClr val="accent1"/>
-          </a:lnRef>
-          <a:fillRef idx="3">
-            <a:schemeClr val="accent1"/>
-          </a:fillRef>
-          <a:effectRef idx="2">
-            <a:schemeClr val="accent1"/>
-          </a:effectRef>
-          <a:fontRef idx="minor">
-            <a:schemeClr val="lt1"/>
-          </a:fontRef>
-        </p:style>
         <p:txBody>
           <a:bodyPr rtlCol="0" anchor="ctr"/>
           <a:lstStyle/>
@@ -13664,14 +12573,14 @@
       </p:sp>
       <p:sp>
         <p:nvSpPr>
-          <p:cNvPr id="11" name="TextBox 10"/>
+          <p:cNvPr id="10" name="TextBox 9"/>
           <p:cNvSpPr txBox="1"/>
           <p:nvPr/>
         </p:nvSpPr>
         <p:spPr>
           <a:xfrm>
-            <a:off x="3649141" y="2267712"/>
-            <a:ext cx="2131237" cy="1463040"/>
+            <a:off x="3667429" y="2286000"/>
+            <a:ext cx="2094661" cy="1426464"/>
           </a:xfrm>
           <a:prstGeom prst="rect">
             <a:avLst/>
@@ -13686,17 +12595,17 @@
           <a:p>
             <a:pPr>
               <a:spcAft>
-                <a:spcPts val="700"/>
+                <a:spcPts val="800"/>
               </a:spcAft>
             </a:pPr>
             <a:r>
-              <a:rPr sz="1150" b="1" i="0" spc="80">
-                <a:solidFill>
-                  <a:srgbClr val="5C5E6A"/>
-                </a:solidFill>
-                <a:latin typeface="Inter"/>
-              </a:rPr>
-              <a:t>First federal rulebook</a:t>
+              <a:rPr sz="950" b="0" i="0" spc="160">
+                <a:solidFill>
+                  <a:srgbClr val="9A9A9A"/>
+                </a:solidFill>
+                <a:latin typeface="Jost"/>
+              </a:rPr>
+              <a:t>FIRST FEDERAL RULEBOOK</a:t>
             </a:r>
           </a:p>
           <a:p>
@@ -13706,11 +12615,11 @@
               </a:spcAft>
             </a:pPr>
             <a:r>
-              <a:rPr sz="2100" b="1" i="0" spc="-40">
-                <a:solidFill>
-                  <a:srgbClr val="EBEBEF"/>
-                </a:solidFill>
-                <a:latin typeface="Inter"/>
+              <a:rPr sz="2100" b="0" i="1" spc="-40">
+                <a:solidFill>
+                  <a:srgbClr val="0D0D0D"/>
+                </a:solidFill>
+                <a:latin typeface="Fraunces"/>
               </a:rPr>
               <a:t>CFTC NPRM</a:t>
             </a:r>
@@ -13724,9 +12633,9 @@
             <a:r>
               <a:rPr sz="1050" b="0" i="0">
                 <a:solidFill>
-                  <a:srgbClr val="8B8D98"/>
-                </a:solidFill>
-                <a:latin typeface="Inter"/>
+                  <a:srgbClr val="5A5A5A"/>
+                </a:solidFill>
+                <a:latin typeface="Jost"/>
               </a:rPr>
               <a:t>Prediction-market rules, Jun 2026 — Federal Register</a:t>
             </a:r>
@@ -13735,53 +12644,7 @@
       </p:sp>
       <p:sp>
         <p:nvSpPr>
-          <p:cNvPr id="12" name="Rounded Rectangle 11"/>
-          <p:cNvSpPr/>
-          <p:nvPr/>
-        </p:nvSpPr>
-        <p:spPr>
-          <a:xfrm>
-            <a:off x="3447973" y="2304288"/>
-            <a:ext cx="27432" cy="256032"/>
-          </a:xfrm>
-          <a:prstGeom prst="roundRect">
-            <a:avLst>
-              <a:gd name="adj" fmla="val 50000"/>
-            </a:avLst>
-          </a:prstGeom>
-          <a:solidFill>
-            <a:srgbClr val="059669"/>
-          </a:solidFill>
-          <a:ln>
-            <a:noFill/>
-          </a:ln>
-          <a:effectLst/>
-        </p:spPr>
-        <p:style>
-          <a:lnRef idx="1">
-            <a:schemeClr val="accent1"/>
-          </a:lnRef>
-          <a:fillRef idx="3">
-            <a:schemeClr val="accent1"/>
-          </a:fillRef>
-          <a:effectRef idx="2">
-            <a:schemeClr val="accent1"/>
-          </a:effectRef>
-          <a:fontRef idx="minor">
-            <a:schemeClr val="lt1"/>
-          </a:fontRef>
-        </p:style>
-        <p:txBody>
-          <a:bodyPr rtlCol="0" anchor="ctr"/>
-          <a:lstStyle/>
-          <a:p>
-            <a:pPr algn="ctr"/>
-          </a:p>
-        </p:txBody>
-      </p:sp>
-      <p:sp>
-        <p:nvSpPr>
-          <p:cNvPr id="13" name="Rounded Rectangle 12"/>
+          <p:cNvPr id="11" name="Rounded Rectangle 10"/>
           <p:cNvSpPr/>
           <p:nvPr/>
         </p:nvSpPr>
@@ -13796,29 +12659,15 @@
             </a:avLst>
           </a:prstGeom>
           <a:solidFill>
-            <a:srgbClr val="18191E"/>
+            <a:srgbClr val="FFFFFF"/>
           </a:solidFill>
           <a:ln w="9525">
             <a:solidFill>
-              <a:srgbClr val="24252C"/>
+              <a:srgbClr val="E0E0E0"/>
             </a:solidFill>
           </a:ln>
           <a:effectLst/>
         </p:spPr>
-        <p:style>
-          <a:lnRef idx="1">
-            <a:schemeClr val="accent1"/>
-          </a:lnRef>
-          <a:fillRef idx="3">
-            <a:schemeClr val="accent1"/>
-          </a:fillRef>
-          <a:effectRef idx="2">
-            <a:schemeClr val="accent1"/>
-          </a:effectRef>
-          <a:fontRef idx="minor">
-            <a:schemeClr val="lt1"/>
-          </a:fontRef>
-        </p:style>
         <p:txBody>
           <a:bodyPr rtlCol="0" anchor="ctr"/>
           <a:lstStyle/>
@@ -13829,14 +12678,14 @@
       </p:sp>
       <p:sp>
         <p:nvSpPr>
-          <p:cNvPr id="14" name="TextBox 13"/>
+          <p:cNvPr id="12" name="TextBox 11"/>
           <p:cNvSpPr txBox="1"/>
           <p:nvPr/>
         </p:nvSpPr>
         <p:spPr>
           <a:xfrm>
-            <a:off x="6411314" y="2267712"/>
-            <a:ext cx="2131237" cy="1463040"/>
+            <a:off x="6429602" y="2286000"/>
+            <a:ext cx="2094661" cy="1426464"/>
           </a:xfrm>
           <a:prstGeom prst="rect">
             <a:avLst/>
@@ -13851,17 +12700,17 @@
           <a:p>
             <a:pPr>
               <a:spcAft>
-                <a:spcPts val="700"/>
+                <a:spcPts val="800"/>
               </a:spcAft>
             </a:pPr>
             <a:r>
-              <a:rPr sz="1150" b="1" i="0" spc="80">
-                <a:solidFill>
-                  <a:srgbClr val="5C5E6A"/>
-                </a:solidFill>
-                <a:latin typeface="Inter"/>
-              </a:rPr>
-              <a:t>Capital asymmetry</a:t>
+              <a:rPr sz="950" b="0" i="0" spc="160">
+                <a:solidFill>
+                  <a:srgbClr val="9A9A9A"/>
+                </a:solidFill>
+                <a:latin typeface="Jost"/>
+              </a:rPr>
+              <a:t>CAPITAL ASYMMETRY</a:t>
             </a:r>
           </a:p>
           <a:p>
@@ -13871,11 +12720,11 @@
               </a:spcAft>
             </a:pPr>
             <a:r>
-              <a:rPr sz="2100" b="1" i="0" spc="-40">
-                <a:solidFill>
-                  <a:srgbClr val="EBEBEF"/>
-                </a:solidFill>
-                <a:latin typeface="Inter"/>
+              <a:rPr sz="2100" b="0" i="1" spc="-40">
+                <a:solidFill>
+                  <a:srgbClr val="0D0D0D"/>
+                </a:solidFill>
+                <a:latin typeface="Fraunces"/>
               </a:rPr>
               <a:t>$3.7B vs $91M</a:t>
             </a:r>
@@ -13889,9 +12738,9 @@
             <a:r>
               <a:rPr sz="1050" b="0" i="0">
                 <a:solidFill>
-                  <a:srgbClr val="8B8D98"/>
-                </a:solidFill>
-                <a:latin typeface="Inter"/>
+                  <a:srgbClr val="5A5A5A"/>
+                </a:solidFill>
+                <a:latin typeface="Jost"/>
               </a:rPr>
               <a:t>Venues vs tooling, 2025 — Forbes / Seedtable</a:t>
             </a:r>
@@ -13900,53 +12749,7 @@
       </p:sp>
       <p:sp>
         <p:nvSpPr>
-          <p:cNvPr id="15" name="Rounded Rectangle 14"/>
-          <p:cNvSpPr/>
-          <p:nvPr/>
-        </p:nvSpPr>
-        <p:spPr>
-          <a:xfrm>
-            <a:off x="6210146" y="2304288"/>
-            <a:ext cx="27432" cy="256032"/>
-          </a:xfrm>
-          <a:prstGeom prst="roundRect">
-            <a:avLst>
-              <a:gd name="adj" fmla="val 50000"/>
-            </a:avLst>
-          </a:prstGeom>
-          <a:solidFill>
-            <a:srgbClr val="D97706"/>
-          </a:solidFill>
-          <a:ln>
-            <a:noFill/>
-          </a:ln>
-          <a:effectLst/>
-        </p:spPr>
-        <p:style>
-          <a:lnRef idx="1">
-            <a:schemeClr val="accent1"/>
-          </a:lnRef>
-          <a:fillRef idx="3">
-            <a:schemeClr val="accent1"/>
-          </a:fillRef>
-          <a:effectRef idx="2">
-            <a:schemeClr val="accent1"/>
-          </a:effectRef>
-          <a:fontRef idx="minor">
-            <a:schemeClr val="lt1"/>
-          </a:fontRef>
-        </p:style>
-        <p:txBody>
-          <a:bodyPr rtlCol="0" anchor="ctr"/>
-          <a:lstStyle/>
-          <a:p>
-            <a:pPr algn="ctr"/>
-          </a:p>
-        </p:txBody>
-      </p:sp>
-      <p:sp>
-        <p:nvSpPr>
-          <p:cNvPr id="16" name="Rounded Rectangle 15"/>
+          <p:cNvPr id="13" name="Rounded Rectangle 12"/>
           <p:cNvSpPr/>
           <p:nvPr/>
         </p:nvSpPr>
@@ -13961,29 +12764,15 @@
             </a:avLst>
           </a:prstGeom>
           <a:solidFill>
-            <a:srgbClr val="18191E"/>
+            <a:srgbClr val="FFFFFF"/>
           </a:solidFill>
           <a:ln w="9525">
             <a:solidFill>
-              <a:srgbClr val="24252C"/>
+              <a:srgbClr val="E0E0E0"/>
             </a:solidFill>
           </a:ln>
           <a:effectLst/>
         </p:spPr>
-        <p:style>
-          <a:lnRef idx="1">
-            <a:schemeClr val="accent1"/>
-          </a:lnRef>
-          <a:fillRef idx="3">
-            <a:schemeClr val="accent1"/>
-          </a:fillRef>
-          <a:effectRef idx="2">
-            <a:schemeClr val="accent1"/>
-          </a:effectRef>
-          <a:fontRef idx="minor">
-            <a:schemeClr val="lt1"/>
-          </a:fontRef>
-        </p:style>
         <p:txBody>
           <a:bodyPr rtlCol="0" anchor="ctr"/>
           <a:lstStyle/>
@@ -13994,14 +12783,14 @@
       </p:sp>
       <p:sp>
         <p:nvSpPr>
-          <p:cNvPr id="17" name="TextBox 16"/>
+          <p:cNvPr id="14" name="TextBox 13"/>
           <p:cNvSpPr txBox="1"/>
           <p:nvPr/>
         </p:nvSpPr>
         <p:spPr>
           <a:xfrm>
-            <a:off x="9173487" y="2267712"/>
-            <a:ext cx="2131237" cy="1463040"/>
+            <a:off x="9191775" y="2286000"/>
+            <a:ext cx="2094661" cy="1426464"/>
           </a:xfrm>
           <a:prstGeom prst="rect">
             <a:avLst/>
@@ -14016,17 +12805,17 @@
           <a:p>
             <a:pPr>
               <a:spcAft>
-                <a:spcPts val="700"/>
+                <a:spcPts val="800"/>
               </a:spcAft>
             </a:pPr>
             <a:r>
-              <a:rPr sz="1150" b="1" i="0" spc="80">
-                <a:solidFill>
-                  <a:srgbClr val="5C5E6A"/>
-                </a:solidFill>
-                <a:latin typeface="Inter"/>
-              </a:rPr>
-              <a:t>LLM inference cost</a:t>
+              <a:rPr sz="950" b="0" i="0" spc="160">
+                <a:solidFill>
+                  <a:srgbClr val="9A9A9A"/>
+                </a:solidFill>
+                <a:latin typeface="Jost"/>
+              </a:rPr>
+              <a:t>LLM INFERENCE COST</a:t>
             </a:r>
           </a:p>
           <a:p>
@@ -14036,11 +12825,11 @@
               </a:spcAft>
             </a:pPr>
             <a:r>
-              <a:rPr sz="2100" b="1" i="0" spc="-40">
-                <a:solidFill>
-                  <a:srgbClr val="EBEBEF"/>
-                </a:solidFill>
-                <a:latin typeface="Inter"/>
+              <a:rPr sz="2100" b="0" i="1" spc="-40">
+                <a:solidFill>
+                  <a:srgbClr val="0D0D0D"/>
+                </a:solidFill>
+                <a:latin typeface="Fraunces"/>
               </a:rPr>
               <a:t>−99.7%</a:t>
             </a:r>
@@ -14054,9 +12843,9 @@
             <a:r>
               <a:rPr sz="1050" b="0" i="0">
                 <a:solidFill>
-                  <a:srgbClr val="8B8D98"/>
-                </a:solidFill>
-                <a:latin typeface="Inter"/>
+                  <a:srgbClr val="5A5A5A"/>
+                </a:solidFill>
+                <a:latin typeface="Jost"/>
               </a:rPr>
               <a:t>Since 2023 — a16z “LLMflation”</a:t>
             </a:r>
@@ -14065,53 +12854,7 @@
       </p:sp>
       <p:sp>
         <p:nvSpPr>
-          <p:cNvPr id="18" name="Rounded Rectangle 17"/>
-          <p:cNvSpPr/>
-          <p:nvPr/>
-        </p:nvSpPr>
-        <p:spPr>
-          <a:xfrm>
-            <a:off x="8972319" y="2304288"/>
-            <a:ext cx="27432" cy="256032"/>
-          </a:xfrm>
-          <a:prstGeom prst="roundRect">
-            <a:avLst>
-              <a:gd name="adj" fmla="val 50000"/>
-            </a:avLst>
-          </a:prstGeom>
-          <a:solidFill>
-            <a:srgbClr val="F43F5E"/>
-          </a:solidFill>
-          <a:ln>
-            <a:noFill/>
-          </a:ln>
-          <a:effectLst/>
-        </p:spPr>
-        <p:style>
-          <a:lnRef idx="1">
-            <a:schemeClr val="accent1"/>
-          </a:lnRef>
-          <a:fillRef idx="3">
-            <a:schemeClr val="accent1"/>
-          </a:fillRef>
-          <a:effectRef idx="2">
-            <a:schemeClr val="accent1"/>
-          </a:effectRef>
-          <a:fontRef idx="minor">
-            <a:schemeClr val="lt1"/>
-          </a:fontRef>
-        </p:style>
-        <p:txBody>
-          <a:bodyPr rtlCol="0" anchor="ctr"/>
-          <a:lstStyle/>
-          <a:p>
-            <a:pPr algn="ctr"/>
-          </a:p>
-        </p:txBody>
-      </p:sp>
-      <p:sp>
-        <p:nvSpPr>
-          <p:cNvPr id="19" name="TextBox 18"/>
+          <p:cNvPr id="15" name="TextBox 14"/>
           <p:cNvSpPr txBox="1"/>
           <p:nvPr/>
         </p:nvSpPr>
@@ -14139,9 +12882,9 @@
             <a:r>
               <a:rPr sz="1700" b="0" i="0">
                 <a:solidFill>
-                  <a:srgbClr val="8B8D98"/>
-                </a:solidFill>
-                <a:latin typeface="Inter"/>
+                  <a:srgbClr val="5A5A5A"/>
+                </a:solidFill>
+                <a:latin typeface="Jost"/>
               </a:rPr>
               <a:t>This product was cost-prohibitive in 2023. Today the marginal LLM cost per post trends toward zero — and the venues just got their first federal rulebook.</a:t>
             </a:r>
@@ -14150,7 +12893,7 @@
       </p:sp>
       <p:sp>
         <p:nvSpPr>
-          <p:cNvPr id="20" name="TextBox 19"/>
+          <p:cNvPr id="16" name="TextBox 15"/>
           <p:cNvSpPr txBox="1"/>
           <p:nvPr/>
         </p:nvSpPr>
@@ -14173,9 +12916,9 @@
             <a:r>
               <a:rPr sz="1150" b="0" i="0">
                 <a:solidFill>
-                  <a:srgbClr val="5C5E6A"/>
-                </a:solidFill>
-                <a:latin typeface="Inter"/>
+                  <a:srgbClr val="9A9A9A"/>
+                </a:solidFill>
+                <a:latin typeface="Jost"/>
               </a:rPr>
               <a:t>Prior art proves demand: PunditTracker tried accountability in 2012 — pre-LLM, pre-liquid-markets. Both blockers are gone.</a:t>
             </a:r>
@@ -14215,27 +12958,13 @@
             <a:avLst/>
           </a:prstGeom>
           <a:solidFill>
-            <a:srgbClr val="0C0D10"/>
+            <a:srgbClr val="F5F5F5"/>
           </a:solidFill>
           <a:ln>
             <a:noFill/>
           </a:ln>
           <a:effectLst/>
         </p:spPr>
-        <p:style>
-          <a:lnRef idx="1">
-            <a:schemeClr val="accent1"/>
-          </a:lnRef>
-          <a:fillRef idx="3">
-            <a:schemeClr val="accent1"/>
-          </a:fillRef>
-          <a:effectRef idx="2">
-            <a:schemeClr val="accent1"/>
-          </a:effectRef>
-          <a:fontRef idx="minor">
-            <a:schemeClr val="lt1"/>
-          </a:fontRef>
-        </p:style>
         <p:txBody>
           <a:bodyPr rtlCol="0" anchor="ctr"/>
           <a:lstStyle/>
@@ -14267,11 +12996,11 @@
           <a:lstStyle/>
           <a:p>
             <a:r>
-              <a:rPr sz="1250" b="1" i="0" spc="220">
-                <a:solidFill>
-                  <a:srgbClr val="6366F1"/>
-                </a:solidFill>
-                <a:latin typeface="Inter"/>
+              <a:rPr sz="1100" b="0" i="0" spc="260">
+                <a:solidFill>
+                  <a:srgbClr val="9A9A9A"/>
+                </a:solidFill>
+                <a:latin typeface="Jost"/>
               </a:rPr>
               <a:t>PRODUCT</a:t>
             </a:r>
@@ -14303,9 +13032,9 @@
             <a:r>
               <a:rPr sz="900" b="0" i="0">
                 <a:solidFill>
-                  <a:srgbClr val="5C5E6A"/>
-                </a:solidFill>
-                <a:latin typeface="Inter"/>
+                  <a:srgbClr val="9A9A9A"/>
+                </a:solidFill>
+                <a:latin typeface="Jost"/>
               </a:rPr>
               <a:t>narve.ai — confidential</a:t>
             </a:r>
@@ -14338,9 +13067,9 @@
             <a:r>
               <a:rPr sz="900" b="0" i="0">
                 <a:solidFill>
-                  <a:srgbClr val="5C5E6A"/>
-                </a:solidFill>
-                <a:latin typeface="Inter"/>
+                  <a:srgbClr val="9A9A9A"/>
+                </a:solidFill>
+                <a:latin typeface="Jost"/>
               </a:rPr>
               <a:t>06 / 14</a:t>
             </a:r>
@@ -14375,13 +13104,22 @@
               </a:lnSpc>
             </a:pPr>
             <a:r>
-              <a:rPr sz="2900" b="1" i="0" spc="-30">
-                <a:solidFill>
-                  <a:srgbClr val="EBEBEF"/>
-                </a:solidFill>
-                <a:latin typeface="Inter"/>
-              </a:rPr>
-              <a:t>truth.narve.ai is built, tested, and demo-ready today.</a:t>
+              <a:rPr sz="3000" b="0" i="0" spc="-50">
+                <a:solidFill>
+                  <a:srgbClr val="0D0D0D"/>
+                </a:solidFill>
+                <a:latin typeface="Jost"/>
+              </a:rPr>
+              <a:t>truth.narve.ai is built, tested, and </a:t>
+            </a:r>
+            <a:r>
+              <a:rPr sz="3000" b="0" i="1" spc="-30">
+                <a:solidFill>
+                  <a:srgbClr val="0D0D0D"/>
+                </a:solidFill>
+                <a:latin typeface="Lora"/>
+              </a:rPr>
+              <a:t>demo-ready today.</a:t>
             </a:r>
           </a:p>
         </p:txBody>
@@ -14403,29 +13141,15 @@
             </a:avLst>
           </a:prstGeom>
           <a:solidFill>
-            <a:srgbClr val="18191E"/>
+            <a:srgbClr val="FFFFFF"/>
           </a:solidFill>
           <a:ln w="9525">
             <a:solidFill>
-              <a:srgbClr val="24252C"/>
+              <a:srgbClr val="E0E0E0"/>
             </a:solidFill>
           </a:ln>
           <a:effectLst/>
         </p:spPr>
-        <p:style>
-          <a:lnRef idx="1">
-            <a:schemeClr val="accent1"/>
-          </a:lnRef>
-          <a:fillRef idx="3">
-            <a:schemeClr val="accent1"/>
-          </a:fillRef>
-          <a:effectRef idx="2">
-            <a:schemeClr val="accent1"/>
-          </a:effectRef>
-          <a:fontRef idx="minor">
-            <a:schemeClr val="lt1"/>
-          </a:fontRef>
-        </p:style>
         <p:txBody>
           <a:bodyPr rtlCol="0" anchor="ctr"/>
           <a:lstStyle/>
@@ -14451,27 +13175,13 @@
             </a:avLst>
           </a:prstGeom>
           <a:solidFill>
-            <a:srgbClr val="6366F1"/>
+            <a:srgbClr val="0D0D0D"/>
           </a:solidFill>
           <a:ln>
             <a:noFill/>
           </a:ln>
           <a:effectLst/>
         </p:spPr>
-        <p:style>
-          <a:lnRef idx="1">
-            <a:schemeClr val="accent1"/>
-          </a:lnRef>
-          <a:fillRef idx="3">
-            <a:schemeClr val="accent1"/>
-          </a:fillRef>
-          <a:effectRef idx="2">
-            <a:schemeClr val="accent1"/>
-          </a:effectRef>
-          <a:fontRef idx="minor">
-            <a:schemeClr val="lt1"/>
-          </a:fontRef>
-        </p:style>
         <p:txBody>
           <a:bodyPr rtlCol="0" anchor="ctr"/>
           <a:lstStyle/>
@@ -14510,9 +13220,9 @@
             <a:r>
               <a:rPr sz="1500" b="1" i="0">
                 <a:solidFill>
-                  <a:srgbClr val="EBEBEF"/>
-                </a:solidFill>
-                <a:latin typeface="Inter"/>
+                  <a:srgbClr val="0D0D0D"/>
+                </a:solidFill>
+                <a:latin typeface="Jost"/>
               </a:rPr>
               <a:t>Signal feed</a:t>
             </a:r>
@@ -14526,9 +13236,9 @@
             <a:r>
               <a:rPr sz="1200" b="0" i="0">
                 <a:solidFill>
-                  <a:srgbClr val="8B8D98"/>
-                </a:solidFill>
-                <a:latin typeface="Inter"/>
+                  <a:srgbClr val="5A5A5A"/>
+                </a:solidFill>
+                <a:latin typeface="Jost"/>
               </a:rPr>
               <a:t>BUY YES / BUY NO calls ranked by best-side EV, source credibility attached, nine distinct risk flags.</a:t>
             </a:r>
@@ -14552,29 +13262,15 @@
             </a:avLst>
           </a:prstGeom>
           <a:solidFill>
-            <a:srgbClr val="18191E"/>
+            <a:srgbClr val="FFFFFF"/>
           </a:solidFill>
           <a:ln w="9525">
             <a:solidFill>
-              <a:srgbClr val="24252C"/>
+              <a:srgbClr val="E0E0E0"/>
             </a:solidFill>
           </a:ln>
           <a:effectLst/>
         </p:spPr>
-        <p:style>
-          <a:lnRef idx="1">
-            <a:schemeClr val="accent1"/>
-          </a:lnRef>
-          <a:fillRef idx="3">
-            <a:schemeClr val="accent1"/>
-          </a:fillRef>
-          <a:effectRef idx="2">
-            <a:schemeClr val="accent1"/>
-          </a:effectRef>
-          <a:fontRef idx="minor">
-            <a:schemeClr val="lt1"/>
-          </a:fontRef>
-        </p:style>
         <p:txBody>
           <a:bodyPr rtlCol="0" anchor="ctr"/>
           <a:lstStyle/>
@@ -14600,27 +13296,13 @@
             </a:avLst>
           </a:prstGeom>
           <a:solidFill>
-            <a:srgbClr val="059669"/>
+            <a:srgbClr val="0D0D0D"/>
           </a:solidFill>
           <a:ln>
             <a:noFill/>
           </a:ln>
           <a:effectLst/>
         </p:spPr>
-        <p:style>
-          <a:lnRef idx="1">
-            <a:schemeClr val="accent1"/>
-          </a:lnRef>
-          <a:fillRef idx="3">
-            <a:schemeClr val="accent1"/>
-          </a:fillRef>
-          <a:effectRef idx="2">
-            <a:schemeClr val="accent1"/>
-          </a:effectRef>
-          <a:fontRef idx="minor">
-            <a:schemeClr val="lt1"/>
-          </a:fontRef>
-        </p:style>
         <p:txBody>
           <a:bodyPr rtlCol="0" anchor="ctr"/>
           <a:lstStyle/>
@@ -14659,9 +13341,9 @@
             <a:r>
               <a:rPr sz="1500" b="1" i="0">
                 <a:solidFill>
-                  <a:srgbClr val="EBEBEF"/>
-                </a:solidFill>
-                <a:latin typeface="Inter"/>
+                  <a:srgbClr val="0D0D0D"/>
+                </a:solidFill>
+                <a:latin typeface="Jost"/>
               </a:rPr>
               <a:t>Source leaderboard</a:t>
             </a:r>
@@ -14675,9 +13357,9 @@
             <a:r>
               <a:rPr sz="1200" b="0" i="0">
                 <a:solidFill>
-                  <a:srgbClr val="8B8D98"/>
-                </a:solidFill>
-                <a:latin typeface="Inter"/>
+                  <a:srgbClr val="5A5A5A"/>
+                </a:solidFill>
+                <a:latin typeface="Jost"/>
               </a:rPr>
               <a:t>Brier-calibrated credibility per handle, 30-point trend history, public SVG share cards — receipts, not vibes.</a:t>
             </a:r>
@@ -14701,29 +13383,15 @@
             </a:avLst>
           </a:prstGeom>
           <a:solidFill>
-            <a:srgbClr val="18191E"/>
+            <a:srgbClr val="FFFFFF"/>
           </a:solidFill>
           <a:ln w="9525">
             <a:solidFill>
-              <a:srgbClr val="24252C"/>
+              <a:srgbClr val="E0E0E0"/>
             </a:solidFill>
           </a:ln>
           <a:effectLst/>
         </p:spPr>
-        <p:style>
-          <a:lnRef idx="1">
-            <a:schemeClr val="accent1"/>
-          </a:lnRef>
-          <a:fillRef idx="3">
-            <a:schemeClr val="accent1"/>
-          </a:fillRef>
-          <a:effectRef idx="2">
-            <a:schemeClr val="accent1"/>
-          </a:effectRef>
-          <a:fontRef idx="minor">
-            <a:schemeClr val="lt1"/>
-          </a:fontRef>
-        </p:style>
         <p:txBody>
           <a:bodyPr rtlCol="0" anchor="ctr"/>
           <a:lstStyle/>
@@ -14749,27 +13417,13 @@
             </a:avLst>
           </a:prstGeom>
           <a:solidFill>
-            <a:srgbClr val="D97706"/>
+            <a:srgbClr val="0D0D0D"/>
           </a:solidFill>
           <a:ln>
             <a:noFill/>
           </a:ln>
           <a:effectLst/>
         </p:spPr>
-        <p:style>
-          <a:lnRef idx="1">
-            <a:schemeClr val="accent1"/>
-          </a:lnRef>
-          <a:fillRef idx="3">
-            <a:schemeClr val="accent1"/>
-          </a:fillRef>
-          <a:effectRef idx="2">
-            <a:schemeClr val="accent1"/>
-          </a:effectRef>
-          <a:fontRef idx="minor">
-            <a:schemeClr val="lt1"/>
-          </a:fontRef>
-        </p:style>
         <p:txBody>
           <a:bodyPr rtlCol="0" anchor="ctr"/>
           <a:lstStyle/>
@@ -14808,9 +13462,9 @@
             <a:r>
               <a:rPr sz="1500" b="1" i="0">
                 <a:solidFill>
-                  <a:srgbClr val="EBEBEF"/>
-                </a:solidFill>
-                <a:latin typeface="Inter"/>
+                  <a:srgbClr val="0D0D0D"/>
+                </a:solidFill>
+                <a:latin typeface="Jost"/>
               </a:rPr>
               <a:t>Backtest harness</a:t>
             </a:r>
@@ -14824,9 +13478,9 @@
             <a:r>
               <a:rPr sz="1200" b="0" i="0">
                 <a:solidFill>
-                  <a:srgbClr val="8B8D98"/>
-                </a:solidFill>
-                <a:latin typeface="Inter"/>
+                  <a:srgbClr val="5A5A5A"/>
+                </a:solidFill>
+                <a:latin typeface="Jost"/>
               </a:rPr>
               <a:t>Sharpe, max drawdown, per-category P&amp;L at tunable thresholds — the “would I trust this with real money?” screen.</a:t>
             </a:r>
@@ -14850,29 +13504,15 @@
             </a:avLst>
           </a:prstGeom>
           <a:solidFill>
-            <a:srgbClr val="18191E"/>
+            <a:srgbClr val="FFFFFF"/>
           </a:solidFill>
           <a:ln w="9525">
             <a:solidFill>
-              <a:srgbClr val="24252C"/>
+              <a:srgbClr val="E0E0E0"/>
             </a:solidFill>
           </a:ln>
           <a:effectLst/>
         </p:spPr>
-        <p:style>
-          <a:lnRef idx="1">
-            <a:schemeClr val="accent1"/>
-          </a:lnRef>
-          <a:fillRef idx="3">
-            <a:schemeClr val="accent1"/>
-          </a:fillRef>
-          <a:effectRef idx="2">
-            <a:schemeClr val="accent1"/>
-          </a:effectRef>
-          <a:fontRef idx="minor">
-            <a:schemeClr val="lt1"/>
-          </a:fontRef>
-        </p:style>
         <p:txBody>
           <a:bodyPr rtlCol="0" anchor="ctr"/>
           <a:lstStyle/>
@@ -14898,27 +13538,13 @@
             </a:avLst>
           </a:prstGeom>
           <a:solidFill>
-            <a:srgbClr val="F43F5E"/>
+            <a:srgbClr val="0D0D0D"/>
           </a:solidFill>
           <a:ln>
             <a:noFill/>
           </a:ln>
           <a:effectLst/>
         </p:spPr>
-        <p:style>
-          <a:lnRef idx="1">
-            <a:schemeClr val="accent1"/>
-          </a:lnRef>
-          <a:fillRef idx="3">
-            <a:schemeClr val="accent1"/>
-          </a:fillRef>
-          <a:effectRef idx="2">
-            <a:schemeClr val="accent1"/>
-          </a:effectRef>
-          <a:fontRef idx="minor">
-            <a:schemeClr val="lt1"/>
-          </a:fontRef>
-        </p:style>
         <p:txBody>
           <a:bodyPr rtlCol="0" anchor="ctr"/>
           <a:lstStyle/>
@@ -14957,9 +13583,9 @@
             <a:r>
               <a:rPr sz="1500" b="1" i="0">
                 <a:solidFill>
-                  <a:srgbClr val="EBEBEF"/>
-                </a:solidFill>
-                <a:latin typeface="Inter"/>
+                  <a:srgbClr val="0D0D0D"/>
+                </a:solidFill>
+                <a:latin typeface="Jost"/>
               </a:rPr>
               <a:t>API, alerts &amp; arbitrage</a:t>
             </a:r>
@@ -14973,11 +13599,11 @@
             <a:r>
               <a:rPr sz="1200" b="0" i="0">
                 <a:solidFill>
-                  <a:srgbClr val="8B8D98"/>
-                </a:solidFill>
-                <a:latin typeface="Inter"/>
-              </a:rPr>
-              <a:t>Public /api/v1 for quants and bots, per-user Telegram alerts, cross-venue Polymarket ↔ Kalshi arbitrage.</a:t>
+                  <a:srgbClr val="5A5A5A"/>
+                </a:solidFill>
+                <a:latin typeface="Jost"/>
+              </a:rPr>
+              <a:t>Public /api/v1 for quants and bots, per-user Telegram alerts, cross-venue Polymarket–Kalshi arbitrage.</a:t>
             </a:r>
           </a:p>
         </p:txBody>
@@ -15008,9 +13634,9 @@
             <a:r>
               <a:rPr sz="1200" b="1" i="0">
                 <a:solidFill>
-                  <a:srgbClr val="5C5E6A"/>
-                </a:solidFill>
-                <a:latin typeface="Inter"/>
+                  <a:srgbClr val="9A9A9A"/>
+                </a:solidFill>
+                <a:latin typeface="Jost"/>
               </a:rPr>
               <a:t>Launch-ready and wired into the billing gateway — demo today via scoped investor access keys, no signup.</a:t>
             </a:r>
@@ -15050,27 +13676,13 @@
             <a:avLst/>
           </a:prstGeom>
           <a:solidFill>
-            <a:srgbClr val="0C0D10"/>
+            <a:srgbClr val="F5F5F5"/>
           </a:solidFill>
           <a:ln>
             <a:noFill/>
           </a:ln>
           <a:effectLst/>
         </p:spPr>
-        <p:style>
-          <a:lnRef idx="1">
-            <a:schemeClr val="accent1"/>
-          </a:lnRef>
-          <a:fillRef idx="3">
-            <a:schemeClr val="accent1"/>
-          </a:fillRef>
-          <a:effectRef idx="2">
-            <a:schemeClr val="accent1"/>
-          </a:effectRef>
-          <a:fontRef idx="minor">
-            <a:schemeClr val="lt1"/>
-          </a:fontRef>
-        </p:style>
         <p:txBody>
           <a:bodyPr rtlCol="0" anchor="ctr"/>
           <a:lstStyle/>
@@ -15102,11 +13714,11 @@
           <a:lstStyle/>
           <a:p>
             <a:r>
-              <a:rPr sz="1250" b="1" i="0" spc="220">
-                <a:solidFill>
-                  <a:srgbClr val="6366F1"/>
-                </a:solidFill>
-                <a:latin typeface="Inter"/>
+              <a:rPr sz="1100" b="0" i="0" spc="260">
+                <a:solidFill>
+                  <a:srgbClr val="9A9A9A"/>
+                </a:solidFill>
+                <a:latin typeface="Jost"/>
               </a:rPr>
               <a:t>MOAT</a:t>
             </a:r>
@@ -15138,9 +13750,9 @@
             <a:r>
               <a:rPr sz="900" b="0" i="0">
                 <a:solidFill>
-                  <a:srgbClr val="5C5E6A"/>
-                </a:solidFill>
-                <a:latin typeface="Inter"/>
+                  <a:srgbClr val="9A9A9A"/>
+                </a:solidFill>
+                <a:latin typeface="Jost"/>
               </a:rPr>
               <a:t>narve.ai — confidential</a:t>
             </a:r>
@@ -15173,9 +13785,9 @@
             <a:r>
               <a:rPr sz="900" b="0" i="0">
                 <a:solidFill>
-                  <a:srgbClr val="5C5E6A"/>
-                </a:solidFill>
-                <a:latin typeface="Inter"/>
+                  <a:srgbClr val="9A9A9A"/>
+                </a:solidFill>
+                <a:latin typeface="Jost"/>
               </a:rPr>
               <a:t>07 / 14</a:t>
             </a:r>
@@ -15210,13 +13822,22 @@
               </a:lnSpc>
             </a:pPr>
             <a:r>
-              <a:rPr sz="2600" b="1" i="0" spc="-30">
-                <a:solidFill>
-                  <a:srgbClr val="EBEBEF"/>
-                </a:solidFill>
-                <a:latin typeface="Inter"/>
-              </a:rPr>
-              <a:t>Every settled market deepens a dataset competitors can never backfill.</a:t>
+              <a:rPr sz="2700" b="0" i="0" spc="-50">
+                <a:solidFill>
+                  <a:srgbClr val="0D0D0D"/>
+                </a:solidFill>
+                <a:latin typeface="Jost"/>
+              </a:rPr>
+              <a:t>Every settled market deepens a dataset competitors can </a:t>
+            </a:r>
+            <a:r>
+              <a:rPr sz="2700" b="0" i="1" spc="-30">
+                <a:solidFill>
+                  <a:srgbClr val="0D0D0D"/>
+                </a:solidFill>
+                <a:latin typeface="Lora"/>
+              </a:rPr>
+              <a:t>never backfill.</a:t>
             </a:r>
           </a:p>
         </p:txBody>
@@ -15252,29 +13873,29 @@
               </a:spcAft>
             </a:pPr>
             <a:r>
+              <a:rPr sz="1350" b="0" i="0">
+                <a:solidFill>
+                  <a:srgbClr val="B0B0B0"/>
+                </a:solidFill>
+                <a:latin typeface="Jost"/>
+              </a:rPr>
+              <a:t>—  </a:t>
+            </a:r>
+            <a:r>
               <a:rPr sz="1350" b="1" i="0">
                 <a:solidFill>
-                  <a:srgbClr val="6366F1"/>
-                </a:solidFill>
-                <a:latin typeface="Inter"/>
-              </a:rPr>
-              <a:t>—  </a:t>
-            </a:r>
-            <a:r>
-              <a:rPr sz="1350" b="1" i="0">
-                <a:solidFill>
-                  <a:srgbClr val="EBEBEF"/>
-                </a:solidFill>
-                <a:latin typeface="Inter"/>
+                  <a:srgbClr val="0D0D0D"/>
+                </a:solidFill>
+                <a:latin typeface="Jost"/>
               </a:rPr>
               <a:t>Unreconstructable history. </a:t>
             </a:r>
             <a:r>
               <a:rPr sz="1350" b="0" i="0">
                 <a:solidFill>
-                  <a:srgbClr val="8B8D98"/>
-                </a:solidFill>
-                <a:latin typeface="Inter"/>
+                  <a:srgbClr val="5A5A5A"/>
+                </a:solidFill>
+                <a:latin typeface="Jost"/>
               </a:rPr>
               <a:t>The timestamped joint record — (claim, market price at claim time, resolved outcome) — cannot be rebuilt later.</a:t>
             </a:r>
@@ -15289,29 +13910,29 @@
               </a:spcAft>
             </a:pPr>
             <a:r>
+              <a:rPr sz="1350" b="0" i="0">
+                <a:solidFill>
+                  <a:srgbClr val="B0B0B0"/>
+                </a:solidFill>
+                <a:latin typeface="Jost"/>
+              </a:rPr>
+              <a:t>—  </a:t>
+            </a:r>
+            <a:r>
               <a:rPr sz="1350" b="1" i="0">
                 <a:solidFill>
-                  <a:srgbClr val="6366F1"/>
-                </a:solidFill>
-                <a:latin typeface="Inter"/>
-              </a:rPr>
-              <a:t>—  </a:t>
-            </a:r>
-            <a:r>
-              <a:rPr sz="1350" b="1" i="0">
-                <a:solidFill>
-                  <a:srgbClr val="EBEBEF"/>
-                </a:solidFill>
-                <a:latin typeface="Inter"/>
+                  <a:srgbClr val="0D0D0D"/>
+                </a:solidFill>
+                <a:latin typeface="Jost"/>
               </a:rPr>
               <a:t>Ephemeral inputs. </a:t>
             </a:r>
             <a:r>
               <a:rPr sz="1350" b="0" i="0">
                 <a:solidFill>
-                  <a:srgbClr val="8B8D98"/>
-                </a:solidFill>
-                <a:latin typeface="Inter"/>
+                  <a:srgbClr val="5A5A5A"/>
+                </a:solidFill>
+                <a:latin typeface="Jost"/>
               </a:rPr>
               <a:t>Posts get deleted; pre-resolution prices vanish. A competitor starting in 2028 starts at zero.</a:t>
             </a:r>
@@ -15326,29 +13947,29 @@
               </a:spcAft>
             </a:pPr>
             <a:r>
+              <a:rPr sz="1350" b="0" i="0">
+                <a:solidFill>
+                  <a:srgbClr val="B0B0B0"/>
+                </a:solidFill>
+                <a:latin typeface="Jost"/>
+              </a:rPr>
+              <a:t>—  </a:t>
+            </a:r>
+            <a:r>
               <a:rPr sz="1350" b="1" i="0">
                 <a:solidFill>
-                  <a:srgbClr val="6366F1"/>
-                </a:solidFill>
-                <a:latin typeface="Inter"/>
-              </a:rPr>
-              <a:t>—  </a:t>
-            </a:r>
-            <a:r>
-              <a:rPr sz="1350" b="1" i="0">
-                <a:solidFill>
-                  <a:srgbClr val="EBEBEF"/>
-                </a:solidFill>
-                <a:latin typeface="Inter"/>
+                  <a:srgbClr val="0D0D0D"/>
+                </a:solidFill>
+                <a:latin typeface="Jost"/>
               </a:rPr>
               <a:t>Owned training data. </a:t>
             </a:r>
             <a:r>
               <a:rPr sz="1350" b="0" i="0">
                 <a:solidFill>
-                  <a:srgbClr val="8B8D98"/>
-                </a:solidFill>
-                <a:latin typeface="Inter"/>
+                  <a:srgbClr val="5A5A5A"/>
+                </a:solidFill>
+                <a:latin typeface="Jost"/>
               </a:rPr>
               <a:t>ExtractionCache: a growing corpus of Claude-labeled social posts — paid once, owned forever.</a:t>
             </a:r>
@@ -15363,29 +13984,29 @@
               </a:spcAft>
             </a:pPr>
             <a:r>
+              <a:rPr sz="1350" b="0" i="0">
+                <a:solidFill>
+                  <a:srgbClr val="B0B0B0"/>
+                </a:solidFill>
+                <a:latin typeface="Jost"/>
+              </a:rPr>
+              <a:t>—  </a:t>
+            </a:r>
+            <a:r>
               <a:rPr sz="1350" b="1" i="0">
                 <a:solidFill>
-                  <a:srgbClr val="6366F1"/>
-                </a:solidFill>
-                <a:latin typeface="Inter"/>
-              </a:rPr>
-              <a:t>—  </a:t>
-            </a:r>
-            <a:r>
-              <a:rPr sz="1350" b="1" i="0">
-                <a:solidFill>
-                  <a:srgbClr val="EBEBEF"/>
-                </a:solidFill>
-                <a:latin typeface="Inter"/>
+                  <a:srgbClr val="0D0D0D"/>
+                </a:solidFill>
+                <a:latin typeface="Jost"/>
               </a:rPr>
               <a:t>Free labeled data. </a:t>
             </a:r>
             <a:r>
               <a:rPr sz="1350" b="0" i="0">
                 <a:solidFill>
-                  <a:srgbClr val="8B8D98"/>
-                </a:solidFill>
-                <a:latin typeface="Inter"/>
+                  <a:srgbClr val="5A5A5A"/>
+                </a:solidFill>
+                <a:latin typeface="Jost"/>
               </a:rPr>
               <a:t>User calibration mode: users build their own track records; the extractor learns from them.</a:t>
             </a:r>
@@ -15409,29 +14030,15 @@
             </a:avLst>
           </a:prstGeom>
           <a:solidFill>
-            <a:srgbClr val="18191E"/>
+            <a:srgbClr val="FFFFFF"/>
           </a:solidFill>
           <a:ln w="9525">
             <a:solidFill>
-              <a:srgbClr val="24252C"/>
+              <a:srgbClr val="E0E0E0"/>
             </a:solidFill>
           </a:ln>
           <a:effectLst/>
         </p:spPr>
-        <p:style>
-          <a:lnRef idx="1">
-            <a:schemeClr val="accent1"/>
-          </a:lnRef>
-          <a:fillRef idx="3">
-            <a:schemeClr val="accent1"/>
-          </a:fillRef>
-          <a:effectRef idx="2">
-            <a:schemeClr val="accent1"/>
-          </a:effectRef>
-          <a:fontRef idx="minor">
-            <a:schemeClr val="lt1"/>
-          </a:fontRef>
-        </p:style>
         <p:txBody>
           <a:bodyPr rtlCol="0" anchor="ctr"/>
           <a:lstStyle/>
@@ -15457,27 +14064,13 @@
             </a:avLst>
           </a:prstGeom>
           <a:solidFill>
-            <a:srgbClr val="6366F1"/>
+            <a:srgbClr val="0D0D0D"/>
           </a:solidFill>
           <a:ln>
             <a:noFill/>
           </a:ln>
           <a:effectLst/>
         </p:spPr>
-        <p:style>
-          <a:lnRef idx="1">
-            <a:schemeClr val="accent1"/>
-          </a:lnRef>
-          <a:fillRef idx="3">
-            <a:schemeClr val="accent1"/>
-          </a:fillRef>
-          <a:effectRef idx="2">
-            <a:schemeClr val="accent1"/>
-          </a:effectRef>
-          <a:fontRef idx="minor">
-            <a:schemeClr val="lt1"/>
-          </a:fontRef>
-        </p:style>
         <p:txBody>
           <a:bodyPr rtlCol="0" anchor="ctr"/>
           <a:lstStyle/>
@@ -15503,27 +14096,13 @@
             </a:avLst>
           </a:prstGeom>
           <a:solidFill>
-            <a:srgbClr val="6366F1"/>
+            <a:srgbClr val="0D0D0D"/>
           </a:solidFill>
           <a:ln>
             <a:noFill/>
           </a:ln>
           <a:effectLst/>
         </p:spPr>
-        <p:style>
-          <a:lnRef idx="1">
-            <a:schemeClr val="accent1"/>
-          </a:lnRef>
-          <a:fillRef idx="3">
-            <a:schemeClr val="accent1"/>
-          </a:fillRef>
-          <a:effectRef idx="2">
-            <a:schemeClr val="accent1"/>
-          </a:effectRef>
-          <a:fontRef idx="minor">
-            <a:schemeClr val="lt1"/>
-          </a:fontRef>
-        </p:style>
         <p:txBody>
           <a:bodyPr rtlCol="0" anchor="ctr"/>
           <a:lstStyle/>
@@ -15549,27 +14128,13 @@
             </a:avLst>
           </a:prstGeom>
           <a:solidFill>
-            <a:srgbClr val="6366F1"/>
+            <a:srgbClr val="0D0D0D"/>
           </a:solidFill>
           <a:ln>
             <a:noFill/>
           </a:ln>
           <a:effectLst/>
         </p:spPr>
-        <p:style>
-          <a:lnRef idx="1">
-            <a:schemeClr val="accent1"/>
-          </a:lnRef>
-          <a:fillRef idx="3">
-            <a:schemeClr val="accent1"/>
-          </a:fillRef>
-          <a:effectRef idx="2">
-            <a:schemeClr val="accent1"/>
-          </a:effectRef>
-          <a:fontRef idx="minor">
-            <a:schemeClr val="lt1"/>
-          </a:fontRef>
-        </p:style>
         <p:txBody>
           <a:bodyPr rtlCol="0" anchor="ctr"/>
           <a:lstStyle/>
@@ -15595,27 +14160,13 @@
             </a:avLst>
           </a:prstGeom>
           <a:solidFill>
-            <a:srgbClr val="6366F1"/>
+            <a:srgbClr val="0D0D0D"/>
           </a:solidFill>
           <a:ln>
             <a:noFill/>
           </a:ln>
           <a:effectLst/>
         </p:spPr>
-        <p:style>
-          <a:lnRef idx="1">
-            <a:schemeClr val="accent1"/>
-          </a:lnRef>
-          <a:fillRef idx="3">
-            <a:schemeClr val="accent1"/>
-          </a:fillRef>
-          <a:effectRef idx="2">
-            <a:schemeClr val="accent1"/>
-          </a:effectRef>
-          <a:fontRef idx="minor">
-            <a:schemeClr val="lt1"/>
-          </a:fontRef>
-        </p:style>
         <p:txBody>
           <a:bodyPr rtlCol="0" anchor="ctr"/>
           <a:lstStyle/>
@@ -15641,27 +14192,13 @@
             </a:avLst>
           </a:prstGeom>
           <a:solidFill>
-            <a:srgbClr val="6366F1"/>
+            <a:srgbClr val="0D0D0D"/>
           </a:solidFill>
           <a:ln>
             <a:noFill/>
           </a:ln>
           <a:effectLst/>
         </p:spPr>
-        <p:style>
-          <a:lnRef idx="1">
-            <a:schemeClr val="accent1"/>
-          </a:lnRef>
-          <a:fillRef idx="3">
-            <a:schemeClr val="accent1"/>
-          </a:fillRef>
-          <a:effectRef idx="2">
-            <a:schemeClr val="accent1"/>
-          </a:effectRef>
-          <a:fontRef idx="minor">
-            <a:schemeClr val="lt1"/>
-          </a:fontRef>
-        </p:style>
         <p:txBody>
           <a:bodyPr rtlCol="0" anchor="ctr"/>
           <a:lstStyle/>
@@ -15687,27 +14224,13 @@
             </a:avLst>
           </a:prstGeom>
           <a:solidFill>
-            <a:srgbClr val="6366F1"/>
+            <a:srgbClr val="0D0D0D"/>
           </a:solidFill>
           <a:ln>
             <a:noFill/>
           </a:ln>
           <a:effectLst/>
         </p:spPr>
-        <p:style>
-          <a:lnRef idx="1">
-            <a:schemeClr val="accent1"/>
-          </a:lnRef>
-          <a:fillRef idx="3">
-            <a:schemeClr val="accent1"/>
-          </a:fillRef>
-          <a:effectRef idx="2">
-            <a:schemeClr val="accent1"/>
-          </a:effectRef>
-          <a:fontRef idx="minor">
-            <a:schemeClr val="lt1"/>
-          </a:fontRef>
-        </p:style>
         <p:txBody>
           <a:bodyPr rtlCol="0" anchor="ctr"/>
           <a:lstStyle/>
@@ -15733,27 +14256,13 @@
             </a:avLst>
           </a:prstGeom>
           <a:solidFill>
-            <a:srgbClr val="6366F1"/>
+            <a:srgbClr val="0D0D0D"/>
           </a:solidFill>
           <a:ln>
             <a:noFill/>
           </a:ln>
           <a:effectLst/>
         </p:spPr>
-        <p:style>
-          <a:lnRef idx="1">
-            <a:schemeClr val="accent1"/>
-          </a:lnRef>
-          <a:fillRef idx="3">
-            <a:schemeClr val="accent1"/>
-          </a:fillRef>
-          <a:effectRef idx="2">
-            <a:schemeClr val="accent1"/>
-          </a:effectRef>
-          <a:fontRef idx="minor">
-            <a:schemeClr val="lt1"/>
-          </a:fontRef>
-        </p:style>
         <p:txBody>
           <a:bodyPr rtlCol="0" anchor="ctr"/>
           <a:lstStyle/>
@@ -15779,27 +14288,13 @@
             </a:avLst>
           </a:prstGeom>
           <a:solidFill>
-            <a:srgbClr val="6366F1"/>
+            <a:srgbClr val="0D0D0D"/>
           </a:solidFill>
           <a:ln>
             <a:noFill/>
           </a:ln>
           <a:effectLst/>
         </p:spPr>
-        <p:style>
-          <a:lnRef idx="1">
-            <a:schemeClr val="accent1"/>
-          </a:lnRef>
-          <a:fillRef idx="3">
-            <a:schemeClr val="accent1"/>
-          </a:fillRef>
-          <a:effectRef idx="2">
-            <a:schemeClr val="accent1"/>
-          </a:effectRef>
-          <a:fontRef idx="minor">
-            <a:schemeClr val="lt1"/>
-          </a:fontRef>
-        </p:style>
         <p:txBody>
           <a:bodyPr rtlCol="0" anchor="ctr"/>
           <a:lstStyle/>
@@ -15825,27 +14320,13 @@
             </a:avLst>
           </a:prstGeom>
           <a:solidFill>
-            <a:srgbClr val="6366F1"/>
+            <a:srgbClr val="0D0D0D"/>
           </a:solidFill>
           <a:ln>
             <a:noFill/>
           </a:ln>
           <a:effectLst/>
         </p:spPr>
-        <p:style>
-          <a:lnRef idx="1">
-            <a:schemeClr val="accent1"/>
-          </a:lnRef>
-          <a:fillRef idx="3">
-            <a:schemeClr val="accent1"/>
-          </a:fillRef>
-          <a:effectRef idx="2">
-            <a:schemeClr val="accent1"/>
-          </a:effectRef>
-          <a:fontRef idx="minor">
-            <a:schemeClr val="lt1"/>
-          </a:fontRef>
-        </p:style>
         <p:txBody>
           <a:bodyPr rtlCol="0" anchor="ctr"/>
           <a:lstStyle/>
@@ -15869,27 +14350,13 @@
             <a:avLst/>
           </a:prstGeom>
           <a:solidFill>
-            <a:srgbClr val="5C5E6A"/>
+            <a:srgbClr val="9A9A9A"/>
           </a:solidFill>
           <a:ln>
             <a:noFill/>
           </a:ln>
           <a:effectLst/>
         </p:spPr>
-        <p:style>
-          <a:lnRef idx="1">
-            <a:schemeClr val="accent1"/>
-          </a:lnRef>
-          <a:fillRef idx="3">
-            <a:schemeClr val="accent1"/>
-          </a:fillRef>
-          <a:effectRef idx="2">
-            <a:schemeClr val="accent1"/>
-          </a:effectRef>
-          <a:fontRef idx="minor">
-            <a:schemeClr val="lt1"/>
-          </a:fontRef>
-        </p:style>
         <p:txBody>
           <a:bodyPr rtlCol="0" anchor="ctr"/>
           <a:lstStyle/>
@@ -15928,18 +14395,18 @@
             <a:r>
               <a:rPr sz="1100" b="1" i="0">
                 <a:solidFill>
-                  <a:srgbClr val="6366F1"/>
-                </a:solidFill>
-                <a:latin typeface="Inter"/>
+                  <a:srgbClr val="0D0D0D"/>
+                </a:solidFill>
+                <a:latin typeface="Jost"/>
               </a:rPr>
               <a:t>● </a:t>
             </a:r>
             <a:r>
               <a:rPr sz="1100" b="0" i="0">
                 <a:solidFill>
-                  <a:srgbClr val="8B8D98"/>
-                </a:solidFill>
-                <a:latin typeface="Inter"/>
+                  <a:srgbClr val="5A5A5A"/>
+                </a:solidFill>
+                <a:latin typeface="Jost"/>
               </a:rPr>
               <a:t>our ledger — compounds every 5 minutes</a:t>
             </a:r>
@@ -15976,18 +14443,18 @@
             <a:r>
               <a:rPr sz="1100" b="1" i="0">
                 <a:solidFill>
-                  <a:srgbClr val="5C5E6A"/>
-                </a:solidFill>
-                <a:latin typeface="Inter"/>
+                  <a:srgbClr val="9A9A9A"/>
+                </a:solidFill>
+                <a:latin typeface="Jost"/>
               </a:rPr>
               <a:t>● </a:t>
             </a:r>
             <a:r>
               <a:rPr sz="1100" b="0" i="0">
                 <a:solidFill>
-                  <a:srgbClr val="5C5E6A"/>
-                </a:solidFill>
-                <a:latin typeface="Inter"/>
+                  <a:srgbClr val="9A9A9A"/>
+                </a:solidFill>
+                <a:latin typeface="Jost"/>
               </a:rPr>
               <a:t>competitor starting 2028 — zero history, forever behind</a:t>
             </a:r>
@@ -16027,27 +14494,13 @@
             <a:avLst/>
           </a:prstGeom>
           <a:solidFill>
-            <a:srgbClr val="0C0D10"/>
+            <a:srgbClr val="F5F5F5"/>
           </a:solidFill>
           <a:ln>
             <a:noFill/>
           </a:ln>
           <a:effectLst/>
         </p:spPr>
-        <p:style>
-          <a:lnRef idx="1">
-            <a:schemeClr val="accent1"/>
-          </a:lnRef>
-          <a:fillRef idx="3">
-            <a:schemeClr val="accent1"/>
-          </a:fillRef>
-          <a:effectRef idx="2">
-            <a:schemeClr val="accent1"/>
-          </a:effectRef>
-          <a:fontRef idx="minor">
-            <a:schemeClr val="lt1"/>
-          </a:fontRef>
-        </p:style>
         <p:txBody>
           <a:bodyPr rtlCol="0" anchor="ctr"/>
           <a:lstStyle/>
@@ -16079,11 +14532,11 @@
           <a:lstStyle/>
           <a:p>
             <a:r>
-              <a:rPr sz="1250" b="1" i="0" spc="220">
-                <a:solidFill>
-                  <a:srgbClr val="6366F1"/>
-                </a:solidFill>
-                <a:latin typeface="Inter"/>
+              <a:rPr sz="1100" b="0" i="0" spc="260">
+                <a:solidFill>
+                  <a:srgbClr val="9A9A9A"/>
+                </a:solidFill>
+                <a:latin typeface="Jost"/>
               </a:rPr>
               <a:t>PLATFORM &amp; EXPANSION</a:t>
             </a:r>
@@ -16115,9 +14568,9 @@
             <a:r>
               <a:rPr sz="900" b="0" i="0">
                 <a:solidFill>
-                  <a:srgbClr val="5C5E6A"/>
-                </a:solidFill>
-                <a:latin typeface="Inter"/>
+                  <a:srgbClr val="9A9A9A"/>
+                </a:solidFill>
+                <a:latin typeface="Jost"/>
               </a:rPr>
               <a:t>narve.ai — confidential</a:t>
             </a:r>
@@ -16150,9 +14603,9 @@
             <a:r>
               <a:rPr sz="900" b="0" i="0">
                 <a:solidFill>
-                  <a:srgbClr val="5C5E6A"/>
-                </a:solidFill>
-                <a:latin typeface="Inter"/>
+                  <a:srgbClr val="9A9A9A"/>
+                </a:solidFill>
+                <a:latin typeface="Jost"/>
               </a:rPr>
               <a:t>08 / 14</a:t>
             </a:r>
@@ -16187,13 +14640,22 @@
               </a:lnSpc>
             </a:pPr>
             <a:r>
-              <a:rPr sz="2600" b="1" i="0" spc="-30">
-                <a:solidFill>
-                  <a:srgbClr val="EBEBEF"/>
-                </a:solidFill>
-                <a:latin typeface="Inter"/>
-              </a:rPr>
-              <a:t>One gateway, 15 dashboard SKUs: a new product ships as a config entry.</a:t>
+              <a:rPr sz="2700" b="0" i="0" spc="-50">
+                <a:solidFill>
+                  <a:srgbClr val="0D0D0D"/>
+                </a:solidFill>
+                <a:latin typeface="Jost"/>
+              </a:rPr>
+              <a:t>One gateway, 15 dashboard SKUs: a new product ships as </a:t>
+            </a:r>
+            <a:r>
+              <a:rPr sz="2700" b="0" i="1" spc="-30">
+                <a:solidFill>
+                  <a:srgbClr val="0D0D0D"/>
+                </a:solidFill>
+                <a:latin typeface="Lora"/>
+              </a:rPr>
+              <a:t>a config entry.</a:t>
             </a:r>
           </a:p>
         </p:txBody>
@@ -16229,29 +14691,29 @@
               </a:spcAft>
             </a:pPr>
             <a:r>
+              <a:rPr sz="1350" b="0" i="0">
+                <a:solidFill>
+                  <a:srgbClr val="B0B0B0"/>
+                </a:solidFill>
+                <a:latin typeface="Jost"/>
+              </a:rPr>
+              <a:t>—  </a:t>
+            </a:r>
+            <a:r>
               <a:rPr sz="1350" b="1" i="0">
                 <a:solidFill>
-                  <a:srgbClr val="6366F1"/>
-                </a:solidFill>
-                <a:latin typeface="Inter"/>
-              </a:rPr>
-              <a:t>—  </a:t>
-            </a:r>
-            <a:r>
-              <a:rPr sz="1350" b="1" i="0">
-                <a:solidFill>
-                  <a:srgbClr val="EBEBEF"/>
-                </a:solidFill>
-                <a:latin typeface="Inter"/>
+                  <a:srgbClr val="0D0D0D"/>
+                </a:solidFill>
+                <a:latin typeface="Jost"/>
               </a:rPr>
               <a:t>One rail. </a:t>
             </a:r>
             <a:r>
               <a:rPr sz="1350" b="0" i="0">
                 <a:solidFill>
-                  <a:srgbClr val="8B8D98"/>
-                </a:solidFill>
-                <a:latin typeface="Inter"/>
+                  <a:srgbClr val="5A5A5A"/>
+                </a:solidFill>
+                <a:latin typeface="Jost"/>
               </a:rPr>
               <a:t>Single SSO + Stripe: one cookie across all subdomains, per-request subscription gating.</a:t>
             </a:r>
@@ -16266,29 +14728,29 @@
               </a:spcAft>
             </a:pPr>
             <a:r>
+              <a:rPr sz="1350" b="0" i="0">
+                <a:solidFill>
+                  <a:srgbClr val="B0B0B0"/>
+                </a:solidFill>
+                <a:latin typeface="Jost"/>
+              </a:rPr>
+              <a:t>—  </a:t>
+            </a:r>
+            <a:r>
               <a:rPr sz="1350" b="1" i="0">
                 <a:solidFill>
-                  <a:srgbClr val="6366F1"/>
-                </a:solidFill>
-                <a:latin typeface="Inter"/>
-              </a:rPr>
-              <a:t>—  </a:t>
-            </a:r>
-            <a:r>
-              <a:rPr sz="1350" b="1" i="0">
-                <a:solidFill>
-                  <a:srgbClr val="EBEBEF"/>
-                </a:solidFill>
-                <a:latin typeface="Inter"/>
+                  <a:srgbClr val="0D0D0D"/>
+                </a:solidFill>
+                <a:latin typeface="Jost"/>
               </a:rPr>
               <a:t>Curated storefront. </a:t>
             </a:r>
             <a:r>
               <a:rPr sz="1350" b="0" i="0">
                 <a:solidFill>
-                  <a:srgbClr val="8B8D98"/>
-                </a:solidFill>
-                <a:latin typeface="Inter"/>
+                  <a:srgbClr val="5A5A5A"/>
+                </a:solidFill>
+                <a:latin typeface="Jost"/>
               </a:rPr>
               <a:t>3 live products today; ~10 built-and-parked dashboards as pre-built optionality.</a:t>
             </a:r>
@@ -16303,29 +14765,29 @@
               </a:spcAft>
             </a:pPr>
             <a:r>
+              <a:rPr sz="1350" b="0" i="0">
+                <a:solidFill>
+                  <a:srgbClr val="B0B0B0"/>
+                </a:solidFill>
+                <a:latin typeface="Jost"/>
+              </a:rPr>
+              <a:t>—  </a:t>
+            </a:r>
+            <a:r>
               <a:rPr sz="1350" b="1" i="0">
                 <a:solidFill>
-                  <a:srgbClr val="6366F1"/>
-                </a:solidFill>
-                <a:latin typeface="Inter"/>
-              </a:rPr>
-              <a:t>—  </a:t>
-            </a:r>
-            <a:r>
-              <a:rPr sz="1350" b="1" i="0">
-                <a:solidFill>
-                  <a:srgbClr val="EBEBEF"/>
-                </a:solidFill>
-                <a:latin typeface="Inter"/>
+                  <a:srgbClr val="0D0D0D"/>
+                </a:solidFill>
+                <a:latin typeface="Jost"/>
               </a:rPr>
               <a:t>Lifecycle ops proven. </a:t>
             </a:r>
             <a:r>
               <a:rPr sz="1350" b="0" i="0">
                 <a:solidFill>
-                  <a:srgbClr val="8B8D98"/>
-                </a:solidFill>
-                <a:latin typeface="Inter"/>
+                  <a:srgbClr val="5A5A5A"/>
+                </a:solidFill>
+                <a:latin typeface="Jost"/>
               </a:rPr>
               <a:t>Merge, bundle, park, revive via config flags — legacy subscriber access preserved.</a:t>
             </a:r>
@@ -16340,29 +14802,29 @@
               </a:spcAft>
             </a:pPr>
             <a:r>
+              <a:rPr sz="1350" b="0" i="0">
+                <a:solidFill>
+                  <a:srgbClr val="B0B0B0"/>
+                </a:solidFill>
+                <a:latin typeface="Jost"/>
+              </a:rPr>
+              <a:t>—  </a:t>
+            </a:r>
+            <a:r>
               <a:rPr sz="1350" b="1" i="0">
                 <a:solidFill>
-                  <a:srgbClr val="6366F1"/>
-                </a:solidFill>
-                <a:latin typeface="Inter"/>
-              </a:rPr>
-              <a:t>—  </a:t>
-            </a:r>
-            <a:r>
-              <a:rPr sz="1350" b="1" i="0">
-                <a:solidFill>
-                  <a:srgbClr val="EBEBEF"/>
-                </a:solidFill>
-                <a:latin typeface="Inter"/>
+                  <a:srgbClr val="0D0D0D"/>
+                </a:solidFill>
+                <a:latin typeface="Jost"/>
               </a:rPr>
               <a:t>Non-storefront IP. </a:t>
             </a:r>
             <a:r>
               <a:rPr sz="1350" b="0" i="0">
                 <a:solidFill>
-                  <a:srgbClr val="8B8D98"/>
-                </a:solidFill>
-                <a:latin typeface="Inter"/>
+                  <a:srgbClr val="5A5A5A"/>
+                </a:solidFill>
+                <a:latin typeface="Jost"/>
               </a:rPr>
               <a:t>Two headless Polymarket trading bots.</a:t>
             </a:r>
@@ -16383,26 +14845,13 @@
           <a:prstGeom prst="line">
             <a:avLst/>
           </a:prstGeom>
-          <a:ln w="12700">
+          <a:ln w="9525">
             <a:solidFill>
-              <a:srgbClr val="24252C"/>
+              <a:srgbClr val="B0B0B0"/>
             </a:solidFill>
           </a:ln>
-        </p:spPr>
-        <p:style>
-          <a:lnRef idx="2">
-            <a:schemeClr val="accent1"/>
-          </a:lnRef>
-          <a:fillRef idx="0">
-            <a:schemeClr val="accent1"/>
-          </a:fillRef>
-          <a:effectRef idx="1">
-            <a:schemeClr val="accent1"/>
-          </a:effectRef>
-          <a:fontRef idx="minor">
-            <a:schemeClr val="tx1"/>
-          </a:fontRef>
-        </p:style>
+          <a:effectLst/>
+        </p:spPr>
       </p:cxnSp>
       <p:cxnSp>
         <p:nvCxnSpPr>
@@ -16418,26 +14867,13 @@
           <a:prstGeom prst="line">
             <a:avLst/>
           </a:prstGeom>
-          <a:ln w="12700">
+          <a:ln w="9525">
             <a:solidFill>
-              <a:srgbClr val="24252C"/>
+              <a:srgbClr val="B0B0B0"/>
             </a:solidFill>
           </a:ln>
-        </p:spPr>
-        <p:style>
-          <a:lnRef idx="2">
-            <a:schemeClr val="accent1"/>
-          </a:lnRef>
-          <a:fillRef idx="0">
-            <a:schemeClr val="accent1"/>
-          </a:fillRef>
-          <a:effectRef idx="1">
-            <a:schemeClr val="accent1"/>
-          </a:effectRef>
-          <a:fontRef idx="minor">
-            <a:schemeClr val="tx1"/>
-          </a:fontRef>
-        </p:style>
+          <a:effectLst/>
+        </p:spPr>
       </p:cxnSp>
       <p:cxnSp>
         <p:nvCxnSpPr>
@@ -16453,26 +14889,13 @@
           <a:prstGeom prst="line">
             <a:avLst/>
           </a:prstGeom>
-          <a:ln w="12700">
+          <a:ln w="9525">
             <a:solidFill>
-              <a:srgbClr val="24252C"/>
+              <a:srgbClr val="B0B0B0"/>
             </a:solidFill>
           </a:ln>
-        </p:spPr>
-        <p:style>
-          <a:lnRef idx="2">
-            <a:schemeClr val="accent1"/>
-          </a:lnRef>
-          <a:fillRef idx="0">
-            <a:schemeClr val="accent1"/>
-          </a:fillRef>
-          <a:effectRef idx="1">
-            <a:schemeClr val="accent1"/>
-          </a:effectRef>
-          <a:fontRef idx="minor">
-            <a:schemeClr val="tx1"/>
-          </a:fontRef>
-        </p:style>
+          <a:effectLst/>
+        </p:spPr>
       </p:cxnSp>
       <p:cxnSp>
         <p:nvCxnSpPr>
@@ -16488,26 +14911,13 @@
           <a:prstGeom prst="line">
             <a:avLst/>
           </a:prstGeom>
-          <a:ln w="12700">
+          <a:ln w="9525">
             <a:solidFill>
-              <a:srgbClr val="24252C"/>
+              <a:srgbClr val="B0B0B0"/>
             </a:solidFill>
           </a:ln>
-        </p:spPr>
-        <p:style>
-          <a:lnRef idx="2">
-            <a:schemeClr val="accent1"/>
-          </a:lnRef>
-          <a:fillRef idx="0">
-            <a:schemeClr val="accent1"/>
-          </a:fillRef>
-          <a:effectRef idx="1">
-            <a:schemeClr val="accent1"/>
-          </a:effectRef>
-          <a:fontRef idx="minor">
-            <a:schemeClr val="tx1"/>
-          </a:fontRef>
-        </p:style>
+          <a:effectLst/>
+        </p:spPr>
       </p:cxnSp>
       <p:cxnSp>
         <p:nvCxnSpPr>
@@ -16523,26 +14933,13 @@
           <a:prstGeom prst="line">
             <a:avLst/>
           </a:prstGeom>
-          <a:ln w="12700">
+          <a:ln w="9525">
             <a:solidFill>
-              <a:srgbClr val="24252C"/>
+              <a:srgbClr val="B0B0B0"/>
             </a:solidFill>
           </a:ln>
-        </p:spPr>
-        <p:style>
-          <a:lnRef idx="2">
-            <a:schemeClr val="accent1"/>
-          </a:lnRef>
-          <a:fillRef idx="0">
-            <a:schemeClr val="accent1"/>
-          </a:fillRef>
-          <a:effectRef idx="1">
-            <a:schemeClr val="accent1"/>
-          </a:effectRef>
-          <a:fontRef idx="minor">
-            <a:schemeClr val="tx1"/>
-          </a:fontRef>
-        </p:style>
+          <a:effectLst/>
+        </p:spPr>
       </p:cxnSp>
       <p:cxnSp>
         <p:nvCxnSpPr>
@@ -16558,26 +14955,13 @@
           <a:prstGeom prst="line">
             <a:avLst/>
           </a:prstGeom>
-          <a:ln w="12700">
+          <a:ln w="9525">
             <a:solidFill>
-              <a:srgbClr val="24252C"/>
+              <a:srgbClr val="B0B0B0"/>
             </a:solidFill>
           </a:ln>
-        </p:spPr>
-        <p:style>
-          <a:lnRef idx="2">
-            <a:schemeClr val="accent1"/>
-          </a:lnRef>
-          <a:fillRef idx="0">
-            <a:schemeClr val="accent1"/>
-          </a:fillRef>
-          <a:effectRef idx="1">
-            <a:schemeClr val="accent1"/>
-          </a:effectRef>
-          <a:fontRef idx="minor">
-            <a:schemeClr val="tx1"/>
-          </a:fontRef>
-        </p:style>
+          <a:effectLst/>
+        </p:spPr>
       </p:cxnSp>
       <p:sp>
         <p:nvSpPr>
@@ -16596,29 +14980,15 @@
             </a:avLst>
           </a:prstGeom>
           <a:solidFill>
-            <a:srgbClr val="18191E"/>
+            <a:srgbClr val="FFFFFF"/>
           </a:solidFill>
           <a:ln w="9525">
             <a:solidFill>
-              <a:srgbClr val="24252C"/>
+              <a:srgbClr val="E0E0E0"/>
             </a:solidFill>
           </a:ln>
           <a:effectLst/>
         </p:spPr>
-        <p:style>
-          <a:lnRef idx="1">
-            <a:schemeClr val="accent1"/>
-          </a:lnRef>
-          <a:fillRef idx="3">
-            <a:schemeClr val="accent1"/>
-          </a:fillRef>
-          <a:effectRef idx="2">
-            <a:schemeClr val="accent1"/>
-          </a:effectRef>
-          <a:fontRef idx="minor">
-            <a:schemeClr val="lt1"/>
-          </a:fontRef>
-        </p:style>
         <p:txBody>
           <a:bodyPr rtlCol="0" anchor="ctr"/>
           <a:lstStyle/>
@@ -16652,18 +15022,18 @@
             <a:r>
               <a:rPr sz="850" b="1" i="0" spc="80">
                 <a:solidFill>
-                  <a:srgbClr val="6366F1"/>
-                </a:solidFill>
-                <a:latin typeface="Inter"/>
+                  <a:srgbClr val="0D0D0D"/>
+                </a:solidFill>
+                <a:latin typeface="Jost"/>
               </a:rPr>
               <a:t>LIVE   </a:t>
             </a:r>
             <a:r>
               <a:rPr sz="1000" b="1" i="0">
                 <a:solidFill>
-                  <a:srgbClr val="EBEBEF"/>
-                </a:solidFill>
-                <a:latin typeface="Inter"/>
+                  <a:srgbClr val="0D0D0D"/>
+                </a:solidFill>
+                <a:latin typeface="Jost"/>
               </a:rPr>
               <a:t>Weather  $7.99</a:t>
             </a:r>
@@ -16687,29 +15057,15 @@
             </a:avLst>
           </a:prstGeom>
           <a:solidFill>
-            <a:srgbClr val="18191E"/>
+            <a:srgbClr val="FFFFFF"/>
           </a:solidFill>
           <a:ln w="9525">
             <a:solidFill>
-              <a:srgbClr val="24252C"/>
+              <a:srgbClr val="E0E0E0"/>
             </a:solidFill>
           </a:ln>
           <a:effectLst/>
         </p:spPr>
-        <p:style>
-          <a:lnRef idx="1">
-            <a:schemeClr val="accent1"/>
-          </a:lnRef>
-          <a:fillRef idx="3">
-            <a:schemeClr val="accent1"/>
-          </a:fillRef>
-          <a:effectRef idx="2">
-            <a:schemeClr val="accent1"/>
-          </a:effectRef>
-          <a:fontRef idx="minor">
-            <a:schemeClr val="lt1"/>
-          </a:fontRef>
-        </p:style>
         <p:txBody>
           <a:bodyPr rtlCol="0" anchor="ctr"/>
           <a:lstStyle/>
@@ -16743,18 +15099,18 @@
             <a:r>
               <a:rPr sz="850" b="1" i="0" spc="80">
                 <a:solidFill>
-                  <a:srgbClr val="6366F1"/>
-                </a:solidFill>
-                <a:latin typeface="Inter"/>
+                  <a:srgbClr val="0D0D0D"/>
+                </a:solidFill>
+                <a:latin typeface="Jost"/>
               </a:rPr>
               <a:t>LIVE   </a:t>
             </a:r>
             <a:r>
               <a:rPr sz="1000" b="1" i="0">
                 <a:solidFill>
-                  <a:srgbClr val="EBEBEF"/>
-                </a:solidFill>
-                <a:latin typeface="Inter"/>
+                  <a:srgbClr val="0D0D0D"/>
+                </a:solidFill>
+                <a:latin typeface="Jost"/>
               </a:rPr>
               <a:t>Midterm  $14.99</a:t>
             </a:r>
@@ -16778,29 +15134,15 @@
             </a:avLst>
           </a:prstGeom>
           <a:solidFill>
-            <a:srgbClr val="18191E"/>
+            <a:srgbClr val="FFFFFF"/>
           </a:solidFill>
           <a:ln w="9525">
             <a:solidFill>
-              <a:srgbClr val="24252C"/>
+              <a:srgbClr val="E0E0E0"/>
             </a:solidFill>
           </a:ln>
           <a:effectLst/>
         </p:spPr>
-        <p:style>
-          <a:lnRef idx="1">
-            <a:schemeClr val="accent1"/>
-          </a:lnRef>
-          <a:fillRef idx="3">
-            <a:schemeClr val="accent1"/>
-          </a:fillRef>
-          <a:effectRef idx="2">
-            <a:schemeClr val="accent1"/>
-          </a:effectRef>
-          <a:fontRef idx="minor">
-            <a:schemeClr val="lt1"/>
-          </a:fontRef>
-        </p:style>
         <p:txBody>
           <a:bodyPr rtlCol="0" anchor="ctr"/>
           <a:lstStyle/>
@@ -16834,18 +15176,18 @@
             <a:r>
               <a:rPr sz="850" b="1" i="0" spc="80">
                 <a:solidFill>
-                  <a:srgbClr val="6366F1"/>
-                </a:solidFill>
-                <a:latin typeface="Inter"/>
+                  <a:srgbClr val="0D0D0D"/>
+                </a:solidFill>
+                <a:latin typeface="Jost"/>
               </a:rPr>
               <a:t>LIVE   </a:t>
             </a:r>
             <a:r>
               <a:rPr sz="1000" b="1" i="0">
                 <a:solidFill>
-                  <a:srgbClr val="EBEBEF"/>
-                </a:solidFill>
-                <a:latin typeface="Inter"/>
+                  <a:srgbClr val="0D0D0D"/>
+                </a:solidFill>
+                <a:latin typeface="Jost"/>
               </a:rPr>
               <a:t>Market Edge  $9.99</a:t>
             </a:r>
@@ -16869,29 +15211,15 @@
             </a:avLst>
           </a:prstGeom>
           <a:solidFill>
-            <a:srgbClr val="1F2027"/>
+            <a:srgbClr val="FFFFFF"/>
           </a:solidFill>
           <a:ln w="9525">
             <a:solidFill>
-              <a:srgbClr val="F43F5E"/>
+              <a:srgbClr val="0D0D0D"/>
             </a:solidFill>
           </a:ln>
           <a:effectLst/>
         </p:spPr>
-        <p:style>
-          <a:lnRef idx="1">
-            <a:schemeClr val="accent1"/>
-          </a:lnRef>
-          <a:fillRef idx="3">
-            <a:schemeClr val="accent1"/>
-          </a:fillRef>
-          <a:effectRef idx="2">
-            <a:schemeClr val="accent1"/>
-          </a:effectRef>
-          <a:fontRef idx="minor">
-            <a:schemeClr val="lt1"/>
-          </a:fontRef>
-        </p:style>
         <p:txBody>
           <a:bodyPr rtlCol="0" anchor="ctr"/>
           <a:lstStyle/>
@@ -16925,18 +15253,18 @@
             <a:r>
               <a:rPr sz="850" b="1" i="0" spc="80">
                 <a:solidFill>
-                  <a:srgbClr val="F43F5E"/>
-                </a:solidFill>
-                <a:latin typeface="Inter"/>
+                  <a:srgbClr val="0D0D0D"/>
+                </a:solidFill>
+                <a:latin typeface="Jost"/>
               </a:rPr>
               <a:t>NEXT   </a:t>
             </a:r>
             <a:r>
               <a:rPr sz="1000" b="1" i="0">
                 <a:solidFill>
-                  <a:srgbClr val="EBEBEF"/>
-                </a:solidFill>
-                <a:latin typeface="Inter"/>
+                  <a:srgbClr val="0D0D0D"/>
+                </a:solidFill>
+                <a:latin typeface="Jost"/>
               </a:rPr>
               <a:t>truth.narve.ai</a:t>
             </a:r>
@@ -16960,29 +15288,15 @@
             </a:avLst>
           </a:prstGeom>
           <a:solidFill>
-            <a:srgbClr val="18191E"/>
+            <a:srgbClr val="FFFFFF"/>
           </a:solidFill>
           <a:ln w="9525">
             <a:solidFill>
-              <a:srgbClr val="24252C"/>
+              <a:srgbClr val="E0E0E0"/>
             </a:solidFill>
           </a:ln>
           <a:effectLst/>
         </p:spPr>
-        <p:style>
-          <a:lnRef idx="1">
-            <a:schemeClr val="accent1"/>
-          </a:lnRef>
-          <a:fillRef idx="3">
-            <a:schemeClr val="accent1"/>
-          </a:fillRef>
-          <a:effectRef idx="2">
-            <a:schemeClr val="accent1"/>
-          </a:effectRef>
-          <a:fontRef idx="minor">
-            <a:schemeClr val="lt1"/>
-          </a:fontRef>
-        </p:style>
         <p:txBody>
           <a:bodyPr rtlCol="0" anchor="ctr"/>
           <a:lstStyle/>
@@ -17016,18 +15330,18 @@
             <a:r>
               <a:rPr sz="850" b="1" i="0" spc="80">
                 <a:solidFill>
-                  <a:srgbClr val="5C5E6A"/>
-                </a:solidFill>
-                <a:latin typeface="Inter"/>
+                  <a:srgbClr val="9A9A9A"/>
+                </a:solidFill>
+                <a:latin typeface="Jost"/>
               </a:rPr>
               <a:t>PARKED   </a:t>
             </a:r>
             <a:r>
               <a:rPr sz="1000" b="0" i="0">
                 <a:solidFill>
-                  <a:srgbClr val="5C5E6A"/>
-                </a:solidFill>
-                <a:latin typeface="Inter"/>
+                  <a:srgbClr val="9A9A9A"/>
+                </a:solidFill>
+                <a:latin typeface="Jost"/>
               </a:rPr>
               <a:t>sports · whale · traders</a:t>
             </a:r>
@@ -17051,29 +15365,15 @@
             </a:avLst>
           </a:prstGeom>
           <a:solidFill>
-            <a:srgbClr val="18191E"/>
+            <a:srgbClr val="FFFFFF"/>
           </a:solidFill>
           <a:ln w="9525">
             <a:solidFill>
-              <a:srgbClr val="24252C"/>
+              <a:srgbClr val="E0E0E0"/>
             </a:solidFill>
           </a:ln>
           <a:effectLst/>
         </p:spPr>
-        <p:style>
-          <a:lnRef idx="1">
-            <a:schemeClr val="accent1"/>
-          </a:lnRef>
-          <a:fillRef idx="3">
-            <a:schemeClr val="accent1"/>
-          </a:fillRef>
-          <a:effectRef idx="2">
-            <a:schemeClr val="accent1"/>
-          </a:effectRef>
-          <a:fontRef idx="minor">
-            <a:schemeClr val="lt1"/>
-          </a:fontRef>
-        </p:style>
         <p:txBody>
           <a:bodyPr rtlCol="0" anchor="ctr"/>
           <a:lstStyle/>
@@ -17107,18 +15407,18 @@
             <a:r>
               <a:rPr sz="850" b="1" i="0" spc="80">
                 <a:solidFill>
-                  <a:srgbClr val="5C5E6A"/>
-                </a:solidFill>
-                <a:latin typeface="Inter"/>
+                  <a:srgbClr val="9A9A9A"/>
+                </a:solidFill>
+                <a:latin typeface="Jost"/>
               </a:rPr>
               <a:t>PARKED   </a:t>
             </a:r>
             <a:r>
               <a:rPr sz="1000" b="0" i="0">
                 <a:solidFill>
-                  <a:srgbClr val="5C5E6A"/>
-                </a:solidFill>
-                <a:latin typeface="Inter"/>
+                  <a:srgbClr val="9A9A9A"/>
+                </a:solidFill>
+                <a:latin typeface="Jost"/>
               </a:rPr>
               <a:t>world · religion · +4</a:t>
             </a:r>
@@ -17142,29 +15442,15 @@
             </a:avLst>
           </a:prstGeom>
           <a:solidFill>
-            <a:srgbClr val="1F2027"/>
+            <a:srgbClr val="FFFFFF"/>
           </a:solidFill>
           <a:ln w="9525">
             <a:solidFill>
-              <a:srgbClr val="6366F1"/>
+              <a:srgbClr val="0D0D0D"/>
             </a:solidFill>
           </a:ln>
           <a:effectLst/>
         </p:spPr>
-        <p:style>
-          <a:lnRef idx="1">
-            <a:schemeClr val="accent1"/>
-          </a:lnRef>
-          <a:fillRef idx="3">
-            <a:schemeClr val="accent1"/>
-          </a:fillRef>
-          <a:effectRef idx="2">
-            <a:schemeClr val="accent1"/>
-          </a:effectRef>
-          <a:fontRef idx="minor">
-            <a:schemeClr val="lt1"/>
-          </a:fontRef>
-        </p:style>
         <p:txBody>
           <a:bodyPr rtlCol="0" anchor="ctr"/>
           <a:lstStyle/>
@@ -17196,26 +15482,28 @@
           <a:lstStyle/>
           <a:p>
             <a:pPr algn="ctr">
-              <a:lnSpc>
-                <a:spcPct val="115000"/>
-              </a:lnSpc>
+              <a:spcAft>
+                <a:spcPts val="200"/>
+              </a:spcAft>
             </a:pPr>
             <a:r>
               <a:rPr sz="1400" b="1" i="0">
                 <a:solidFill>
-                  <a:srgbClr val="EBEBEF"/>
-                </a:solidFill>
-                <a:latin typeface="Inter"/>
-              </a:rPr>
-              <a:t>gateway
-</a:t>
-            </a:r>
+                  <a:srgbClr val="0D0D0D"/>
+                </a:solidFill>
+                <a:latin typeface="Jost"/>
+              </a:rPr>
+              <a:t>gateway</a:t>
+            </a:r>
+          </a:p>
+          <a:p>
+            <a:pPr algn="ctr"/>
             <a:r>
               <a:rPr sz="950" b="0" i="0">
                 <a:solidFill>
-                  <a:srgbClr val="8B8D98"/>
-                </a:solidFill>
-                <a:latin typeface="Inter"/>
+                  <a:srgbClr val="5A5A5A"/>
+                </a:solidFill>
+                <a:latin typeface="Jost"/>
               </a:rPr>
               <a:t>SSO · Stripe · proxy · fleet</a:t>
             </a:r>
@@ -17248,9 +15536,9 @@
             <a:r>
               <a:rPr sz="1100" b="1" i="0">
                 <a:solidFill>
-                  <a:srgbClr val="5C5E6A"/>
-                </a:solidFill>
-                <a:latin typeface="Inter"/>
+                  <a:srgbClr val="9A9A9A"/>
+                </a:solidFill>
+                <a:latin typeface="Jost"/>
               </a:rPr>
               <a:t>New SKU = config entry + port + DNS route.</a:t>
             </a:r>
@@ -17290,27 +15578,13 @@
             <a:avLst/>
           </a:prstGeom>
           <a:solidFill>
-            <a:srgbClr val="0C0D10"/>
+            <a:srgbClr val="F5F5F5"/>
           </a:solidFill>
           <a:ln>
             <a:noFill/>
           </a:ln>
           <a:effectLst/>
         </p:spPr>
-        <p:style>
-          <a:lnRef idx="1">
-            <a:schemeClr val="accent1"/>
-          </a:lnRef>
-          <a:fillRef idx="3">
-            <a:schemeClr val="accent1"/>
-          </a:fillRef>
-          <a:effectRef idx="2">
-            <a:schemeClr val="accent1"/>
-          </a:effectRef>
-          <a:fontRef idx="minor">
-            <a:schemeClr val="lt1"/>
-          </a:fontRef>
-        </p:style>
         <p:txBody>
           <a:bodyPr rtlCol="0" anchor="ctr"/>
           <a:lstStyle/>
@@ -17342,11 +15616,11 @@
           <a:lstStyle/>
           <a:p>
             <a:r>
-              <a:rPr sz="1250" b="1" i="0" spc="220">
-                <a:solidFill>
-                  <a:srgbClr val="6366F1"/>
-                </a:solidFill>
-                <a:latin typeface="Inter"/>
+              <a:rPr sz="1100" b="0" i="0" spc="260">
+                <a:solidFill>
+                  <a:srgbClr val="9A9A9A"/>
+                </a:solidFill>
+                <a:latin typeface="Jost"/>
               </a:rPr>
               <a:t>BUSINESS MODEL</a:t>
             </a:r>
@@ -17378,9 +15652,9 @@
             <a:r>
               <a:rPr sz="900" b="0" i="0">
                 <a:solidFill>
-                  <a:srgbClr val="5C5E6A"/>
-                </a:solidFill>
-                <a:latin typeface="Inter"/>
+                  <a:srgbClr val="9A9A9A"/>
+                </a:solidFill>
+                <a:latin typeface="Jost"/>
               </a:rPr>
               <a:t>narve.ai — confidential</a:t>
             </a:r>
@@ -17413,9 +15687,9 @@
             <a:r>
               <a:rPr sz="900" b="0" i="0">
                 <a:solidFill>
-                  <a:srgbClr val="5C5E6A"/>
-                </a:solidFill>
-                <a:latin typeface="Inter"/>
+                  <a:srgbClr val="9A9A9A"/>
+                </a:solidFill>
+                <a:latin typeface="Jost"/>
               </a:rPr>
               <a:t>09 / 14</a:t>
             </a:r>
@@ -17450,13 +15724,22 @@
               </a:lnSpc>
             </a:pPr>
             <a:r>
-              <a:rPr sz="2400" b="1" i="0" spc="-30">
-                <a:solidFill>
-                  <a:srgbClr val="EBEBEF"/>
-                </a:solidFill>
-                <a:latin typeface="Inter"/>
-              </a:rPr>
-              <a:t>Pick-and-mix subscriptions, $5.99–$19.99/mo — and revenue is a documented ~30-minute switch-flip.</a:t>
+              <a:rPr sz="2700" b="0" i="0" spc="-50">
+                <a:solidFill>
+                  <a:srgbClr val="0D0D0D"/>
+                </a:solidFill>
+                <a:latin typeface="Jost"/>
+              </a:rPr>
+              <a:t>Pick-and-mix subscriptions, $5.99–$19.99/mo — revenue is a </a:t>
+            </a:r>
+            <a:r>
+              <a:rPr sz="2700" b="0" i="1" spc="-30">
+                <a:solidFill>
+                  <a:srgbClr val="0D0D0D"/>
+                </a:solidFill>
+                <a:latin typeface="Lora"/>
+              </a:rPr>
+              <a:t>switch-flip.</a:t>
             </a:r>
           </a:p>
         </p:txBody>
@@ -17478,29 +15761,15 @@
             </a:avLst>
           </a:prstGeom>
           <a:solidFill>
-            <a:srgbClr val="18191E"/>
+            <a:srgbClr val="FFFFFF"/>
           </a:solidFill>
           <a:ln w="9525">
             <a:solidFill>
-              <a:srgbClr val="24252C"/>
+              <a:srgbClr val="E0E0E0"/>
             </a:solidFill>
           </a:ln>
           <a:effectLst/>
         </p:spPr>
-        <p:style>
-          <a:lnRef idx="1">
-            <a:schemeClr val="accent1"/>
-          </a:lnRef>
-          <a:fillRef idx="3">
-            <a:schemeClr val="accent1"/>
-          </a:fillRef>
-          <a:effectRef idx="2">
-            <a:schemeClr val="accent1"/>
-          </a:effectRef>
-          <a:fontRef idx="minor">
-            <a:schemeClr val="lt1"/>
-          </a:fontRef>
-        </p:style>
         <p:txBody>
           <a:bodyPr rtlCol="0" anchor="ctr"/>
           <a:lstStyle/>
@@ -17539,9 +15808,9 @@
             <a:r>
               <a:rPr sz="1000" b="1" i="0" spc="120">
                 <a:solidFill>
-                  <a:srgbClr val="5C5E6A"/>
-                </a:solidFill>
-                <a:latin typeface="Inter"/>
+                  <a:srgbClr val="9A9A9A"/>
+                </a:solidFill>
+                <a:latin typeface="Jost"/>
               </a:rPr>
               <a:t>PER-DASHBOARD</a:t>
             </a:r>
@@ -17555,9 +15824,9 @@
             <a:r>
               <a:rPr sz="2300" b="1" i="0" spc="-30">
                 <a:solidFill>
-                  <a:srgbClr val="EBEBEF"/>
-                </a:solidFill>
-                <a:latin typeface="Inter"/>
+                  <a:srgbClr val="0D0D0D"/>
+                </a:solidFill>
+                <a:latin typeface="Jost"/>
               </a:rPr>
               <a:t>$5.99–$19.99</a:t>
             </a:r>
@@ -17571,9 +15840,9 @@
             <a:r>
               <a:rPr sz="1050" b="0" i="0">
                 <a:solidFill>
-                  <a:srgbClr val="8B8D98"/>
-                </a:solidFill>
-                <a:latin typeface="Inter"/>
+                  <a:srgbClr val="5A5A5A"/>
+                </a:solidFill>
+                <a:latin typeface="Jost"/>
               </a:rPr>
               <a:t>per month · annual ≈ 2 months free (gateway config)</a:t>
             </a:r>
@@ -17597,29 +15866,15 @@
             </a:avLst>
           </a:prstGeom>
           <a:solidFill>
-            <a:srgbClr val="1F2027"/>
+            <a:srgbClr val="FFFFFF"/>
           </a:solidFill>
           <a:ln w="9525">
             <a:solidFill>
-              <a:srgbClr val="6366F1"/>
+              <a:srgbClr val="0D0D0D"/>
             </a:solidFill>
           </a:ln>
           <a:effectLst/>
         </p:spPr>
-        <p:style>
-          <a:lnRef idx="1">
-            <a:schemeClr val="accent1"/>
-          </a:lnRef>
-          <a:fillRef idx="3">
-            <a:schemeClr val="accent1"/>
-          </a:fillRef>
-          <a:effectRef idx="2">
-            <a:schemeClr val="accent1"/>
-          </a:effectRef>
-          <a:fontRef idx="minor">
-            <a:schemeClr val="lt1"/>
-          </a:fontRef>
-        </p:style>
         <p:txBody>
           <a:bodyPr rtlCol="0" anchor="ctr"/>
           <a:lstStyle/>
@@ -17658,9 +15913,9 @@
             <a:r>
               <a:rPr sz="1000" b="1" i="0" spc="120">
                 <a:solidFill>
-                  <a:srgbClr val="6366F1"/>
-                </a:solidFill>
-                <a:latin typeface="Inter"/>
+                  <a:srgbClr val="0D0D0D"/>
+                </a:solidFill>
+                <a:latin typeface="Jost"/>
               </a:rPr>
               <a:t>TRUTH RESEARCH</a:t>
             </a:r>
@@ -17674,9 +15929,9 @@
             <a:r>
               <a:rPr sz="2300" b="1" i="0" spc="-30">
                 <a:solidFill>
-                  <a:srgbClr val="EBEBEF"/>
-                </a:solidFill>
-                <a:latin typeface="Inter"/>
+                  <a:srgbClr val="0D0D0D"/>
+                </a:solidFill>
+                <a:latin typeface="Jost"/>
               </a:rPr>
               <a:t>$14.99 / mo</a:t>
             </a:r>
@@ -17690,9 +15945,9 @@
             <a:r>
               <a:rPr sz="1050" b="0" i="0">
                 <a:solidFill>
-                  <a:srgbClr val="8B8D98"/>
-                </a:solidFill>
-                <a:latin typeface="Inter"/>
+                  <a:srgbClr val="5A5A5A"/>
+                </a:solidFill>
+                <a:latin typeface="Jost"/>
               </a:rPr>
               <a:t>$149 / yr — SKU already wired into checkout</a:t>
             </a:r>
@@ -17716,29 +15971,15 @@
             </a:avLst>
           </a:prstGeom>
           <a:solidFill>
-            <a:srgbClr val="18191E"/>
+            <a:srgbClr val="FFFFFF"/>
           </a:solidFill>
           <a:ln w="9525">
             <a:solidFill>
-              <a:srgbClr val="24252C"/>
+              <a:srgbClr val="E0E0E0"/>
             </a:solidFill>
           </a:ln>
           <a:effectLst/>
         </p:spPr>
-        <p:style>
-          <a:lnRef idx="1">
-            <a:schemeClr val="accent1"/>
-          </a:lnRef>
-          <a:fillRef idx="3">
-            <a:schemeClr val="accent1"/>
-          </a:fillRef>
-          <a:effectRef idx="2">
-            <a:schemeClr val="accent1"/>
-          </a:effectRef>
-          <a:fontRef idx="minor">
-            <a:schemeClr val="lt1"/>
-          </a:fontRef>
-        </p:style>
         <p:txBody>
           <a:bodyPr rtlCol="0" anchor="ctr"/>
           <a:lstStyle/>
@@ -17777,9 +16018,9 @@
             <a:r>
               <a:rPr sz="1000" b="1" i="0" spc="120">
                 <a:solidFill>
-                  <a:srgbClr val="5C5E6A"/>
-                </a:solidFill>
-                <a:latin typeface="Inter"/>
+                  <a:srgbClr val="9A9A9A"/>
+                </a:solidFill>
+                <a:latin typeface="Jost"/>
               </a:rPr>
               <a:t>ALL-ACCESS BUNDLES</a:t>
             </a:r>
@@ -17793,9 +16034,9 @@
             <a:r>
               <a:rPr sz="2300" b="1" i="0" spc="-30">
                 <a:solidFill>
-                  <a:srgbClr val="EBEBEF"/>
-                </a:solidFill>
-                <a:latin typeface="Inter"/>
+                  <a:srgbClr val="0D0D0D"/>
+                </a:solidFill>
+                <a:latin typeface="Jost"/>
               </a:rPr>
               <a:t>$49 / $149</a:t>
             </a:r>
@@ -17809,9 +16050,9 @@
             <a:r>
               <a:rPr sz="1050" b="0" i="0">
                 <a:solidFill>
-                  <a:srgbClr val="8B8D98"/>
-                </a:solidFill>
-                <a:latin typeface="Inter"/>
+                  <a:srgbClr val="5A5A5A"/>
+                </a:solidFill>
+                <a:latin typeface="Jost"/>
               </a:rPr>
               <a:t>Trader / Pro per month — coded in checkout</a:t>
             </a:r>
@@ -17835,29 +16076,15 @@
             </a:avLst>
           </a:prstGeom>
           <a:solidFill>
-            <a:srgbClr val="18191E"/>
+            <a:srgbClr val="FFFFFF"/>
           </a:solidFill>
           <a:ln w="9525">
             <a:solidFill>
-              <a:srgbClr val="24252C"/>
+              <a:srgbClr val="E0E0E0"/>
             </a:solidFill>
           </a:ln>
           <a:effectLst/>
         </p:spPr>
-        <p:style>
-          <a:lnRef idx="1">
-            <a:schemeClr val="accent1"/>
-          </a:lnRef>
-          <a:fillRef idx="3">
-            <a:schemeClr val="accent1"/>
-          </a:fillRef>
-          <a:effectRef idx="2">
-            <a:schemeClr val="accent1"/>
-          </a:effectRef>
-          <a:fontRef idx="minor">
-            <a:schemeClr val="lt1"/>
-          </a:fontRef>
-        </p:style>
         <p:txBody>
           <a:bodyPr rtlCol="0" anchor="ctr"/>
           <a:lstStyle/>
@@ -17896,9 +16123,9 @@
             <a:r>
               <a:rPr sz="1000" b="1" i="0" spc="120">
                 <a:solidFill>
-                  <a:srgbClr val="5C5E6A"/>
-                </a:solidFill>
-                <a:latin typeface="Inter"/>
+                  <a:srgbClr val="9A9A9A"/>
+                </a:solidFill>
+                <a:latin typeface="Jost"/>
               </a:rPr>
               <a:t>INSTITUTIONAL FEEDS</a:t>
             </a:r>
@@ -17912,9 +16139,9 @@
             <a:r>
               <a:rPr sz="2300" b="1" i="0" spc="-30">
                 <a:solidFill>
-                  <a:srgbClr val="EBEBEF"/>
-                </a:solidFill>
-                <a:latin typeface="Inter"/>
+                  <a:srgbClr val="0D0D0D"/>
+                </a:solidFill>
+                <a:latin typeface="Jost"/>
               </a:rPr>
               <a:t>custom</a:t>
             </a:r>
@@ -17928,9 +16155,9 @@
             <a:r>
               <a:rPr sz="1050" b="0" i="0">
                 <a:solidFill>
-                  <a:srgbClr val="8B8D98"/>
-                </a:solidFill>
-                <a:latin typeface="Inter"/>
+                  <a:srgbClr val="5A5A5A"/>
+                </a:solidFill>
+                <a:latin typeface="Jost"/>
               </a:rPr>
               <a:t>ICE already sells one (Polymarket Signals, Feb 2026 — ICE IR)</a:t>
             </a:r>
@@ -17968,29 +16195,29 @@
               </a:spcAft>
             </a:pPr>
             <a:r>
+              <a:rPr sz="1350" b="0" i="0">
+                <a:solidFill>
+                  <a:srgbClr val="B0B0B0"/>
+                </a:solidFill>
+                <a:latin typeface="Jost"/>
+              </a:rPr>
+              <a:t>—  </a:t>
+            </a:r>
+            <a:r>
               <a:rPr sz="1350" b="1" i="0">
                 <a:solidFill>
-                  <a:srgbClr val="6366F1"/>
-                </a:solidFill>
-                <a:latin typeface="Inter"/>
-              </a:rPr>
-              <a:t>—  </a:t>
-            </a:r>
-            <a:r>
-              <a:rPr sz="1350" b="1" i="0">
-                <a:solidFill>
-                  <a:srgbClr val="EBEBEF"/>
-                </a:solidFill>
-                <a:latin typeface="Inter"/>
+                  <a:srgbClr val="0D0D0D"/>
+                </a:solidFill>
+                <a:latin typeface="Jost"/>
               </a:rPr>
               <a:t>Revenue is a switch-flip, not a build. </a:t>
             </a:r>
             <a:r>
               <a:rPr sz="1350" b="0" i="0">
                 <a:solidFill>
-                  <a:srgbClr val="8B8D98"/>
-                </a:solidFill>
-                <a:latin typeface="Inter"/>
+                  <a:srgbClr val="5A5A5A"/>
+                </a:solidFill>
+                <a:latin typeface="Jost"/>
               </a:rPr>
               <a:t>Checkout, webhooks, and live-format price IDs for seven products exist; wiring production Stripe keys is a documented ~30-minute checklist.</a:t>
             </a:r>
@@ -18005,29 +16232,29 @@
               </a:spcAft>
             </a:pPr>
             <a:r>
+              <a:rPr sz="1350" b="0" i="0">
+                <a:solidFill>
+                  <a:srgbClr val="B0B0B0"/>
+                </a:solidFill>
+                <a:latin typeface="Jost"/>
+              </a:rPr>
+              <a:t>—  </a:t>
+            </a:r>
+            <a:r>
               <a:rPr sz="1350" b="1" i="0">
                 <a:solidFill>
-                  <a:srgbClr val="6366F1"/>
-                </a:solidFill>
-                <a:latin typeface="Inter"/>
-              </a:rPr>
-              <a:t>—  </a:t>
-            </a:r>
-            <a:r>
-              <a:rPr sz="1350" b="1" i="0">
-                <a:solidFill>
-                  <a:srgbClr val="EBEBEF"/>
-                </a:solidFill>
-                <a:latin typeface="Inter"/>
+                  <a:srgbClr val="0D0D0D"/>
+                </a:solidFill>
+                <a:latin typeface="Jost"/>
               </a:rPr>
               <a:t>Two engines. </a:t>
             </a:r>
             <a:r>
               <a:rPr sz="1350" b="0" i="0">
                 <a:solidFill>
-                  <a:srgbClr val="8B8D98"/>
-                </a:solidFill>
-                <a:latin typeface="Inter"/>
+                  <a:srgbClr val="5A5A5A"/>
+                </a:solidFill>
+                <a:latin typeface="Jost"/>
               </a:rPr>
               <a:t>Prosumer subscriptions now; institutional data feeds later — the ICE playbook, one tier down.</a:t>
             </a:r>
